--- a/lectures/2026_GNET749_Lecture3.pptx
+++ b/lectures/2026_GNET749_Lecture3.pptx
@@ -5,36 +5,26 @@
     <p:sldMasterId id="2147483648" r:id="rId1"/>
   </p:sldMasterIdLst>
   <p:notesMasterIdLst>
-    <p:notesMasterId r:id="rId29"/>
+    <p:notesMasterId r:id="rId19"/>
   </p:notesMasterIdLst>
   <p:sldIdLst>
     <p:sldId id="256" r:id="rId2"/>
     <p:sldId id="302" r:id="rId3"/>
-    <p:sldId id="327" r:id="rId4"/>
-    <p:sldId id="305" r:id="rId5"/>
-    <p:sldId id="310" r:id="rId6"/>
-    <p:sldId id="322" r:id="rId7"/>
-    <p:sldId id="323" r:id="rId8"/>
-    <p:sldId id="312" r:id="rId9"/>
-    <p:sldId id="306" r:id="rId10"/>
-    <p:sldId id="316" r:id="rId11"/>
-    <p:sldId id="317" r:id="rId12"/>
-    <p:sldId id="318" r:id="rId13"/>
-    <p:sldId id="319" r:id="rId14"/>
-    <p:sldId id="300" r:id="rId15"/>
-    <p:sldId id="304" r:id="rId16"/>
-    <p:sldId id="301" r:id="rId17"/>
-    <p:sldId id="311" r:id="rId18"/>
-    <p:sldId id="313" r:id="rId19"/>
-    <p:sldId id="314" r:id="rId20"/>
-    <p:sldId id="315" r:id="rId21"/>
-    <p:sldId id="283" r:id="rId22"/>
-    <p:sldId id="320" r:id="rId23"/>
-    <p:sldId id="308" r:id="rId24"/>
-    <p:sldId id="321" r:id="rId25"/>
-    <p:sldId id="324" r:id="rId26"/>
-    <p:sldId id="325" r:id="rId27"/>
-    <p:sldId id="303" r:id="rId28"/>
+    <p:sldId id="305" r:id="rId4"/>
+    <p:sldId id="300" r:id="rId5"/>
+    <p:sldId id="304" r:id="rId6"/>
+    <p:sldId id="301" r:id="rId7"/>
+    <p:sldId id="311" r:id="rId8"/>
+    <p:sldId id="313" r:id="rId9"/>
+    <p:sldId id="314" r:id="rId10"/>
+    <p:sldId id="315" r:id="rId11"/>
+    <p:sldId id="283" r:id="rId12"/>
+    <p:sldId id="320" r:id="rId13"/>
+    <p:sldId id="308" r:id="rId14"/>
+    <p:sldId id="321" r:id="rId15"/>
+    <p:sldId id="324" r:id="rId16"/>
+    <p:sldId id="325" r:id="rId17"/>
+    <p:sldId id="303" r:id="rId18"/>
   </p:sldIdLst>
   <p:sldSz cx="12192000" cy="6858000"/>
   <p:notesSz cx="6858000" cy="9144000"/>
@@ -223,7 +213,7 @@
           <a:p>
             <a:fld id="{CED3B269-BCFD-3E4D-9867-060E5123D2F8}" type="datetimeFigureOut">
               <a:rPr lang="en-US" smtClean="0"/>
-              <a:t>4/16/25</a:t>
+              <a:t>4/21/26</a:t>
             </a:fld>
             <a:endParaRPr lang="en-US"/>
           </a:p>
@@ -718,7 +708,7 @@
           <a:p>
             <a:fld id="{C17BA9DE-A22B-9A47-BD58-93CE3EC6954C}" type="datetimeFigureOut">
               <a:rPr lang="en-US" smtClean="0"/>
-              <a:t>4/16/25</a:t>
+              <a:t>4/21/26</a:t>
             </a:fld>
             <a:endParaRPr lang="en-US"/>
           </a:p>
@@ -916,7 +906,7 @@
           <a:p>
             <a:fld id="{C17BA9DE-A22B-9A47-BD58-93CE3EC6954C}" type="datetimeFigureOut">
               <a:rPr lang="en-US" smtClean="0"/>
-              <a:t>4/16/25</a:t>
+              <a:t>4/21/26</a:t>
             </a:fld>
             <a:endParaRPr lang="en-US"/>
           </a:p>
@@ -1124,7 +1114,7 @@
           <a:p>
             <a:fld id="{C17BA9DE-A22B-9A47-BD58-93CE3EC6954C}" type="datetimeFigureOut">
               <a:rPr lang="en-US" smtClean="0"/>
-              <a:t>4/16/25</a:t>
+              <a:t>4/21/26</a:t>
             </a:fld>
             <a:endParaRPr lang="en-US"/>
           </a:p>
@@ -1322,7 +1312,7 @@
           <a:p>
             <a:fld id="{C17BA9DE-A22B-9A47-BD58-93CE3EC6954C}" type="datetimeFigureOut">
               <a:rPr lang="en-US" smtClean="0"/>
-              <a:t>4/16/25</a:t>
+              <a:t>4/21/26</a:t>
             </a:fld>
             <a:endParaRPr lang="en-US"/>
           </a:p>
@@ -1597,7 +1587,7 @@
           <a:p>
             <a:fld id="{C17BA9DE-A22B-9A47-BD58-93CE3EC6954C}" type="datetimeFigureOut">
               <a:rPr lang="en-US" smtClean="0"/>
-              <a:t>4/16/25</a:t>
+              <a:t>4/21/26</a:t>
             </a:fld>
             <a:endParaRPr lang="en-US"/>
           </a:p>
@@ -1862,7 +1852,7 @@
           <a:p>
             <a:fld id="{C17BA9DE-A22B-9A47-BD58-93CE3EC6954C}" type="datetimeFigureOut">
               <a:rPr lang="en-US" smtClean="0"/>
-              <a:t>4/16/25</a:t>
+              <a:t>4/21/26</a:t>
             </a:fld>
             <a:endParaRPr lang="en-US"/>
           </a:p>
@@ -2274,7 +2264,7 @@
           <a:p>
             <a:fld id="{C17BA9DE-A22B-9A47-BD58-93CE3EC6954C}" type="datetimeFigureOut">
               <a:rPr lang="en-US" smtClean="0"/>
-              <a:t>4/16/25</a:t>
+              <a:t>4/21/26</a:t>
             </a:fld>
             <a:endParaRPr lang="en-US"/>
           </a:p>
@@ -2415,7 +2405,7 @@
           <a:p>
             <a:fld id="{C17BA9DE-A22B-9A47-BD58-93CE3EC6954C}" type="datetimeFigureOut">
               <a:rPr lang="en-US" smtClean="0"/>
-              <a:t>4/16/25</a:t>
+              <a:t>4/21/26</a:t>
             </a:fld>
             <a:endParaRPr lang="en-US"/>
           </a:p>
@@ -2528,7 +2518,7 @@
           <a:p>
             <a:fld id="{C17BA9DE-A22B-9A47-BD58-93CE3EC6954C}" type="datetimeFigureOut">
               <a:rPr lang="en-US" smtClean="0"/>
-              <a:t>4/16/25</a:t>
+              <a:t>4/21/26</a:t>
             </a:fld>
             <a:endParaRPr lang="en-US"/>
           </a:p>
@@ -2839,7 +2829,7 @@
           <a:p>
             <a:fld id="{C17BA9DE-A22B-9A47-BD58-93CE3EC6954C}" type="datetimeFigureOut">
               <a:rPr lang="en-US" smtClean="0"/>
-              <a:t>4/16/25</a:t>
+              <a:t>4/21/26</a:t>
             </a:fld>
             <a:endParaRPr lang="en-US"/>
           </a:p>
@@ -3127,7 +3117,7 @@
           <a:p>
             <a:fld id="{C17BA9DE-A22B-9A47-BD58-93CE3EC6954C}" type="datetimeFigureOut">
               <a:rPr lang="en-US" smtClean="0"/>
-              <a:t>4/16/25</a:t>
+              <a:t>4/21/26</a:t>
             </a:fld>
             <a:endParaRPr lang="en-US"/>
           </a:p>
@@ -3368,7 +3358,7 @@
           <a:p>
             <a:fld id="{C17BA9DE-A22B-9A47-BD58-93CE3EC6954C}" type="datetimeFigureOut">
               <a:rPr lang="en-US" smtClean="0"/>
-              <a:t>4/16/25</a:t>
+              <a:t>4/21/26</a:t>
             </a:fld>
             <a:endParaRPr lang="en-US"/>
           </a:p>
@@ -3850,3194 +3840,6 @@
           <a:chExt cx="0" cy="0"/>
         </a:xfrm>
       </p:grpSpPr>
-      <p:sp>
-        <p:nvSpPr>
-          <p:cNvPr id="2" name="TextBox 1">
-            <a:extLst>
-              <a:ext uri="{FF2B5EF4-FFF2-40B4-BE49-F238E27FC236}">
-                <a16:creationId xmlns:a16="http://schemas.microsoft.com/office/drawing/2014/main" id="{D791C6AE-1BC4-B1E9-A3D8-86782E25B660}"/>
-              </a:ext>
-            </a:extLst>
-          </p:cNvPr>
-          <p:cNvSpPr txBox="1"/>
-          <p:nvPr/>
-        </p:nvSpPr>
-        <p:spPr>
-          <a:xfrm>
-            <a:off x="4696304" y="198968"/>
-            <a:ext cx="6908800" cy="369332"/>
-          </a:xfrm>
-          <a:prstGeom prst="rect">
-            <a:avLst/>
-          </a:prstGeom>
-          <a:noFill/>
-        </p:spPr>
-        <p:txBody>
-          <a:bodyPr wrap="square" rtlCol="0">
-            <a:spAutoFit/>
-          </a:bodyPr>
-          <a:lstStyle/>
-          <a:p>
-            <a:r>
-              <a:rPr lang="en-US" dirty="0"/>
-              <a:t>Characters vs Factors</a:t>
-            </a:r>
-          </a:p>
-        </p:txBody>
-      </p:sp>
-      <p:pic>
-        <p:nvPicPr>
-          <p:cNvPr id="7" name="Picture 6">
-            <a:extLst>
-              <a:ext uri="{FF2B5EF4-FFF2-40B4-BE49-F238E27FC236}">
-                <a16:creationId xmlns:a16="http://schemas.microsoft.com/office/drawing/2014/main" id="{5A122CF8-55EE-2648-D5D7-50DD741A3A59}"/>
-              </a:ext>
-            </a:extLst>
-          </p:cNvPr>
-          <p:cNvPicPr>
-            <a:picLocks noChangeAspect="1"/>
-          </p:cNvPicPr>
-          <p:nvPr/>
-        </p:nvPicPr>
-        <p:blipFill>
-          <a:blip r:embed="rId2"/>
-          <a:stretch>
-            <a:fillRect/>
-          </a:stretch>
-        </p:blipFill>
-        <p:spPr>
-          <a:xfrm>
-            <a:off x="593062" y="2017193"/>
-            <a:ext cx="2006600" cy="444500"/>
-          </a:xfrm>
-          <a:prstGeom prst="rect">
-            <a:avLst/>
-          </a:prstGeom>
-        </p:spPr>
-      </p:pic>
-      <p:pic>
-        <p:nvPicPr>
-          <p:cNvPr id="8" name="Picture 7">
-            <a:extLst>
-              <a:ext uri="{FF2B5EF4-FFF2-40B4-BE49-F238E27FC236}">
-                <a16:creationId xmlns:a16="http://schemas.microsoft.com/office/drawing/2014/main" id="{21F0FD66-6D1E-70B0-81FD-426B8F308423}"/>
-              </a:ext>
-            </a:extLst>
-          </p:cNvPr>
-          <p:cNvPicPr>
-            <a:picLocks noChangeAspect="1"/>
-          </p:cNvPicPr>
-          <p:nvPr/>
-        </p:nvPicPr>
-        <p:blipFill>
-          <a:blip r:embed="rId3"/>
-          <a:stretch>
-            <a:fillRect/>
-          </a:stretch>
-        </p:blipFill>
-        <p:spPr>
-          <a:xfrm>
-            <a:off x="540434" y="792023"/>
-            <a:ext cx="4889500" cy="330200"/>
-          </a:xfrm>
-          <a:prstGeom prst="rect">
-            <a:avLst/>
-          </a:prstGeom>
-        </p:spPr>
-      </p:pic>
-      <p:pic>
-        <p:nvPicPr>
-          <p:cNvPr id="9" name="Picture 8">
-            <a:extLst>
-              <a:ext uri="{FF2B5EF4-FFF2-40B4-BE49-F238E27FC236}">
-                <a16:creationId xmlns:a16="http://schemas.microsoft.com/office/drawing/2014/main" id="{130D36F0-A21F-E967-53D9-B55D91048E7C}"/>
-              </a:ext>
-            </a:extLst>
-          </p:cNvPr>
-          <p:cNvPicPr>
-            <a:picLocks noChangeAspect="1"/>
-          </p:cNvPicPr>
-          <p:nvPr/>
-        </p:nvPicPr>
-        <p:blipFill>
-          <a:blip r:embed="rId4"/>
-          <a:stretch>
-            <a:fillRect/>
-          </a:stretch>
-        </p:blipFill>
-        <p:spPr>
-          <a:xfrm>
-            <a:off x="540434" y="1209662"/>
-            <a:ext cx="4241800" cy="508000"/>
-          </a:xfrm>
-          <a:prstGeom prst="rect">
-            <a:avLst/>
-          </a:prstGeom>
-        </p:spPr>
-      </p:pic>
-      <p:pic>
-        <p:nvPicPr>
-          <p:cNvPr id="10" name="Picture 9">
-            <a:extLst>
-              <a:ext uri="{FF2B5EF4-FFF2-40B4-BE49-F238E27FC236}">
-                <a16:creationId xmlns:a16="http://schemas.microsoft.com/office/drawing/2014/main" id="{DC76B15E-E541-E67B-3201-D74761C8B0B9}"/>
-              </a:ext>
-            </a:extLst>
-          </p:cNvPr>
-          <p:cNvPicPr>
-            <a:picLocks noChangeAspect="1"/>
-          </p:cNvPicPr>
-          <p:nvPr/>
-        </p:nvPicPr>
-        <p:blipFill>
-          <a:blip r:embed="rId5"/>
-          <a:stretch>
-            <a:fillRect/>
-          </a:stretch>
-        </p:blipFill>
-        <p:spPr>
-          <a:xfrm>
-            <a:off x="4244768" y="2017193"/>
-            <a:ext cx="7772400" cy="382987"/>
-          </a:xfrm>
-          <a:prstGeom prst="rect">
-            <a:avLst/>
-          </a:prstGeom>
-        </p:spPr>
-      </p:pic>
-      <p:pic>
-        <p:nvPicPr>
-          <p:cNvPr id="11" name="Picture 10">
-            <a:extLst>
-              <a:ext uri="{FF2B5EF4-FFF2-40B4-BE49-F238E27FC236}">
-                <a16:creationId xmlns:a16="http://schemas.microsoft.com/office/drawing/2014/main" id="{1E0887DF-92D8-BCBE-104F-0FF6894E45EA}"/>
-              </a:ext>
-            </a:extLst>
-          </p:cNvPr>
-          <p:cNvPicPr>
-            <a:picLocks noChangeAspect="1"/>
-          </p:cNvPicPr>
-          <p:nvPr/>
-        </p:nvPicPr>
-        <p:blipFill>
-          <a:blip r:embed="rId6"/>
-          <a:stretch>
-            <a:fillRect/>
-          </a:stretch>
-        </p:blipFill>
-        <p:spPr>
-          <a:xfrm>
-            <a:off x="4244768" y="2494076"/>
-            <a:ext cx="1917700" cy="533400"/>
-          </a:xfrm>
-          <a:prstGeom prst="rect">
-            <a:avLst/>
-          </a:prstGeom>
-        </p:spPr>
-      </p:pic>
-      <p:pic>
-        <p:nvPicPr>
-          <p:cNvPr id="12" name="Picture 11">
-            <a:extLst>
-              <a:ext uri="{FF2B5EF4-FFF2-40B4-BE49-F238E27FC236}">
-                <a16:creationId xmlns:a16="http://schemas.microsoft.com/office/drawing/2014/main" id="{A483AC15-F8E9-851E-29AE-5A8889831DC1}"/>
-              </a:ext>
-            </a:extLst>
-          </p:cNvPr>
-          <p:cNvPicPr>
-            <a:picLocks noChangeAspect="1"/>
-          </p:cNvPicPr>
-          <p:nvPr/>
-        </p:nvPicPr>
-        <p:blipFill>
-          <a:blip r:embed="rId7"/>
-          <a:stretch>
-            <a:fillRect/>
-          </a:stretch>
-        </p:blipFill>
-        <p:spPr>
-          <a:xfrm>
-            <a:off x="4244768" y="3121372"/>
-            <a:ext cx="2501900" cy="800100"/>
-          </a:xfrm>
-          <a:prstGeom prst="rect">
-            <a:avLst/>
-          </a:prstGeom>
-        </p:spPr>
-      </p:pic>
-      <p:pic>
-        <p:nvPicPr>
-          <p:cNvPr id="13" name="Picture 12">
-            <a:extLst>
-              <a:ext uri="{FF2B5EF4-FFF2-40B4-BE49-F238E27FC236}">
-                <a16:creationId xmlns:a16="http://schemas.microsoft.com/office/drawing/2014/main" id="{3598E7ED-B347-0033-29C1-A518472CB09F}"/>
-              </a:ext>
-            </a:extLst>
-          </p:cNvPr>
-          <p:cNvPicPr>
-            <a:picLocks noChangeAspect="1"/>
-          </p:cNvPicPr>
-          <p:nvPr/>
-        </p:nvPicPr>
-        <p:blipFill>
-          <a:blip r:embed="rId8"/>
-          <a:stretch>
-            <a:fillRect/>
-          </a:stretch>
-        </p:blipFill>
-        <p:spPr>
-          <a:xfrm>
-            <a:off x="4244768" y="4015368"/>
-            <a:ext cx="5346700" cy="1181100"/>
-          </a:xfrm>
-          <a:prstGeom prst="rect">
-            <a:avLst/>
-          </a:prstGeom>
-        </p:spPr>
-      </p:pic>
-      <p:sp>
-        <p:nvSpPr>
-          <p:cNvPr id="14" name="TextBox 13">
-            <a:extLst>
-              <a:ext uri="{FF2B5EF4-FFF2-40B4-BE49-F238E27FC236}">
-                <a16:creationId xmlns:a16="http://schemas.microsoft.com/office/drawing/2014/main" id="{324BE73B-816F-9E18-728B-C2CD118CAB28}"/>
-              </a:ext>
-            </a:extLst>
-          </p:cNvPr>
-          <p:cNvSpPr txBox="1"/>
-          <p:nvPr/>
-        </p:nvSpPr>
-        <p:spPr>
-          <a:xfrm>
-            <a:off x="223666" y="2980023"/>
-            <a:ext cx="2927396" cy="3416320"/>
-          </a:xfrm>
-          <a:prstGeom prst="rect">
-            <a:avLst/>
-          </a:prstGeom>
-          <a:noFill/>
-        </p:spPr>
-        <p:txBody>
-          <a:bodyPr wrap="square" rtlCol="0">
-            <a:spAutoFit/>
-          </a:bodyPr>
-          <a:lstStyle/>
-          <a:p>
-            <a:r>
-              <a:rPr lang="en-US" dirty="0"/>
-              <a:t>Key Points</a:t>
-            </a:r>
-          </a:p>
-          <a:p>
-            <a:pPr marL="285750" indent="-285750">
-              <a:buFont typeface="Arial" panose="020B0604020202020204" pitchFamily="34" charset="0"/>
-              <a:buChar char="•"/>
-            </a:pPr>
-            <a:r>
-              <a:rPr lang="en-US" dirty="0"/>
-              <a:t>Characters are less picky and behave as you’d expect</a:t>
-            </a:r>
-          </a:p>
-          <a:p>
-            <a:pPr marL="285750" indent="-285750">
-              <a:buFont typeface="Arial" panose="020B0604020202020204" pitchFamily="34" charset="0"/>
-              <a:buChar char="•"/>
-            </a:pPr>
-            <a:r>
-              <a:rPr lang="en-US" dirty="0"/>
-              <a:t>Factors have predetermined levels </a:t>
-            </a:r>
-          </a:p>
-          <a:p>
-            <a:pPr marL="285750" indent="-285750">
-              <a:buFont typeface="Arial" panose="020B0604020202020204" pitchFamily="34" charset="0"/>
-              <a:buChar char="•"/>
-            </a:pPr>
-            <a:r>
-              <a:rPr lang="en-US" dirty="0"/>
-              <a:t>Factors have an order with a base</a:t>
-            </a:r>
-          </a:p>
-          <a:p>
-            <a:pPr marL="285750" indent="-285750">
-              <a:buFont typeface="Arial" panose="020B0604020202020204" pitchFamily="34" charset="0"/>
-              <a:buChar char="•"/>
-            </a:pPr>
-            <a:r>
-              <a:rPr lang="en-US" dirty="0"/>
-              <a:t>Base R will read in all strings as factors (</a:t>
-            </a:r>
-            <a:r>
-              <a:rPr lang="en-US" dirty="0" err="1"/>
-              <a:t>read.csv</a:t>
-            </a:r>
-            <a:r>
-              <a:rPr lang="en-US" dirty="0"/>
-              <a:t>) – but this can be turned off globally</a:t>
-            </a:r>
-          </a:p>
-        </p:txBody>
-      </p:sp>
-      <p:sp>
-        <p:nvSpPr>
-          <p:cNvPr id="3" name="TextBox 2">
-            <a:extLst>
-              <a:ext uri="{FF2B5EF4-FFF2-40B4-BE49-F238E27FC236}">
-                <a16:creationId xmlns:a16="http://schemas.microsoft.com/office/drawing/2014/main" id="{43FA81D7-8DF9-59C7-ADAC-3D4D4FFACB2E}"/>
-              </a:ext>
-            </a:extLst>
-          </p:cNvPr>
-          <p:cNvSpPr txBox="1"/>
-          <p:nvPr/>
-        </p:nvSpPr>
-        <p:spPr>
-          <a:xfrm>
-            <a:off x="7409768" y="1647861"/>
-            <a:ext cx="1754841" cy="369332"/>
-          </a:xfrm>
-          <a:prstGeom prst="rect">
-            <a:avLst/>
-          </a:prstGeom>
-          <a:noFill/>
-        </p:spPr>
-        <p:txBody>
-          <a:bodyPr wrap="square" rtlCol="0">
-            <a:spAutoFit/>
-          </a:bodyPr>
-          <a:lstStyle/>
-          <a:p>
-            <a:r>
-              <a:rPr lang="en-US" dirty="0"/>
-              <a:t>Factor</a:t>
-            </a:r>
-          </a:p>
-        </p:txBody>
-      </p:sp>
-      <p:sp>
-        <p:nvSpPr>
-          <p:cNvPr id="4" name="TextBox 3">
-            <a:extLst>
-              <a:ext uri="{FF2B5EF4-FFF2-40B4-BE49-F238E27FC236}">
-                <a16:creationId xmlns:a16="http://schemas.microsoft.com/office/drawing/2014/main" id="{F171264E-4FBC-5267-3DB2-AC65EC259D7C}"/>
-              </a:ext>
-            </a:extLst>
-          </p:cNvPr>
-          <p:cNvSpPr txBox="1"/>
-          <p:nvPr/>
-        </p:nvSpPr>
-        <p:spPr>
-          <a:xfrm>
-            <a:off x="2218702" y="422691"/>
-            <a:ext cx="1532964" cy="369332"/>
-          </a:xfrm>
-          <a:prstGeom prst="rect">
-            <a:avLst/>
-          </a:prstGeom>
-          <a:noFill/>
-        </p:spPr>
-        <p:txBody>
-          <a:bodyPr wrap="square" rtlCol="0">
-            <a:spAutoFit/>
-          </a:bodyPr>
-          <a:lstStyle/>
-          <a:p>
-            <a:r>
-              <a:rPr lang="en-US" dirty="0"/>
-              <a:t>Character</a:t>
-            </a:r>
-          </a:p>
-        </p:txBody>
-      </p:sp>
-    </p:spTree>
-    <p:extLst>
-      <p:ext uri="{BB962C8B-B14F-4D97-AF65-F5344CB8AC3E}">
-        <p14:creationId xmlns:p14="http://schemas.microsoft.com/office/powerpoint/2010/main" val="2915126508"/>
-      </p:ext>
-    </p:extLst>
-  </p:cSld>
-  <p:clrMapOvr>
-    <a:masterClrMapping/>
-  </p:clrMapOvr>
-</p:sld>
-</file>
-
-<file path=ppt/slides/slide11.xml><?xml version="1.0" encoding="utf-8"?>
-<p:sld xmlns:a="http://schemas.openxmlformats.org/drawingml/2006/main" xmlns:r="http://schemas.openxmlformats.org/officeDocument/2006/relationships" xmlns:p="http://schemas.openxmlformats.org/presentationml/2006/main">
-  <p:cSld>
-    <p:spTree>
-      <p:nvGrpSpPr>
-        <p:cNvPr id="1" name=""/>
-        <p:cNvGrpSpPr/>
-        <p:nvPr/>
-      </p:nvGrpSpPr>
-      <p:grpSpPr>
-        <a:xfrm>
-          <a:off x="0" y="0"/>
-          <a:ext cx="0" cy="0"/>
-          <a:chOff x="0" y="0"/>
-          <a:chExt cx="0" cy="0"/>
-        </a:xfrm>
-      </p:grpSpPr>
-      <p:sp>
-        <p:nvSpPr>
-          <p:cNvPr id="2" name="TextBox 1">
-            <a:extLst>
-              <a:ext uri="{FF2B5EF4-FFF2-40B4-BE49-F238E27FC236}">
-                <a16:creationId xmlns:a16="http://schemas.microsoft.com/office/drawing/2014/main" id="{6806DC0A-6D6D-CE06-DAEE-5E6C5AB98D9A}"/>
-              </a:ext>
-            </a:extLst>
-          </p:cNvPr>
-          <p:cNvSpPr txBox="1"/>
-          <p:nvPr/>
-        </p:nvSpPr>
-        <p:spPr>
-          <a:xfrm>
-            <a:off x="3415553" y="282388"/>
-            <a:ext cx="6145306" cy="369332"/>
-          </a:xfrm>
-          <a:prstGeom prst="rect">
-            <a:avLst/>
-          </a:prstGeom>
-          <a:noFill/>
-        </p:spPr>
-        <p:txBody>
-          <a:bodyPr wrap="square" rtlCol="0">
-            <a:spAutoFit/>
-          </a:bodyPr>
-          <a:lstStyle/>
-          <a:p>
-            <a:r>
-              <a:rPr lang="en-US" dirty="0"/>
-              <a:t>Tibbles helpfully tell you what data type is in a column</a:t>
-            </a:r>
-          </a:p>
-        </p:txBody>
-      </p:sp>
-      <p:pic>
-        <p:nvPicPr>
-          <p:cNvPr id="3" name="Picture 2">
-            <a:extLst>
-              <a:ext uri="{FF2B5EF4-FFF2-40B4-BE49-F238E27FC236}">
-                <a16:creationId xmlns:a16="http://schemas.microsoft.com/office/drawing/2014/main" id="{262C0214-9E36-1476-0DF5-D7360105117E}"/>
-              </a:ext>
-            </a:extLst>
-          </p:cNvPr>
-          <p:cNvPicPr>
-            <a:picLocks noChangeAspect="1"/>
-          </p:cNvPicPr>
-          <p:nvPr/>
-        </p:nvPicPr>
-        <p:blipFill>
-          <a:blip r:embed="rId2"/>
-          <a:stretch>
-            <a:fillRect/>
-          </a:stretch>
-        </p:blipFill>
-        <p:spPr>
-          <a:xfrm>
-            <a:off x="3009900" y="867335"/>
-            <a:ext cx="6172200" cy="3429000"/>
-          </a:xfrm>
-          <a:prstGeom prst="rect">
-            <a:avLst/>
-          </a:prstGeom>
-        </p:spPr>
-      </p:pic>
-    </p:spTree>
-    <p:extLst>
-      <p:ext uri="{BB962C8B-B14F-4D97-AF65-F5344CB8AC3E}">
-        <p14:creationId xmlns:p14="http://schemas.microsoft.com/office/powerpoint/2010/main" val="3755412733"/>
-      </p:ext>
-    </p:extLst>
-  </p:cSld>
-  <p:clrMapOvr>
-    <a:masterClrMapping/>
-  </p:clrMapOvr>
-</p:sld>
-</file>
-
-<file path=ppt/slides/slide12.xml><?xml version="1.0" encoding="utf-8"?>
-<p:sld xmlns:a="http://schemas.openxmlformats.org/drawingml/2006/main" xmlns:r="http://schemas.openxmlformats.org/officeDocument/2006/relationships" xmlns:p="http://schemas.openxmlformats.org/presentationml/2006/main">
-  <p:cSld>
-    <p:spTree>
-      <p:nvGrpSpPr>
-        <p:cNvPr id="1" name=""/>
-        <p:cNvGrpSpPr/>
-        <p:nvPr/>
-      </p:nvGrpSpPr>
-      <p:grpSpPr>
-        <a:xfrm>
-          <a:off x="0" y="0"/>
-          <a:ext cx="0" cy="0"/>
-          <a:chOff x="0" y="0"/>
-          <a:chExt cx="0" cy="0"/>
-        </a:xfrm>
-      </p:grpSpPr>
-      <p:sp>
-        <p:nvSpPr>
-          <p:cNvPr id="2" name="TextBox 1">
-            <a:extLst>
-              <a:ext uri="{FF2B5EF4-FFF2-40B4-BE49-F238E27FC236}">
-                <a16:creationId xmlns:a16="http://schemas.microsoft.com/office/drawing/2014/main" id="{6806DC0A-6D6D-CE06-DAEE-5E6C5AB98D9A}"/>
-              </a:ext>
-            </a:extLst>
-          </p:cNvPr>
-          <p:cNvSpPr txBox="1"/>
-          <p:nvPr/>
-        </p:nvSpPr>
-        <p:spPr>
-          <a:xfrm>
-            <a:off x="3926541" y="242046"/>
-            <a:ext cx="6145306" cy="369332"/>
-          </a:xfrm>
-          <a:prstGeom prst="rect">
-            <a:avLst/>
-          </a:prstGeom>
-          <a:noFill/>
-        </p:spPr>
-        <p:txBody>
-          <a:bodyPr wrap="square" rtlCol="0">
-            <a:spAutoFit/>
-          </a:bodyPr>
-          <a:lstStyle/>
-          <a:p>
-            <a:r>
-              <a:rPr lang="en-US" dirty="0"/>
-              <a:t>You can coerce one data type into another</a:t>
-            </a:r>
-          </a:p>
-        </p:txBody>
-      </p:sp>
-      <p:pic>
-        <p:nvPicPr>
-          <p:cNvPr id="4" name="Picture 3">
-            <a:extLst>
-              <a:ext uri="{FF2B5EF4-FFF2-40B4-BE49-F238E27FC236}">
-                <a16:creationId xmlns:a16="http://schemas.microsoft.com/office/drawing/2014/main" id="{0826754C-C8FA-721C-AF71-CF453A0B3E1C}"/>
-              </a:ext>
-            </a:extLst>
-          </p:cNvPr>
-          <p:cNvPicPr>
-            <a:picLocks noChangeAspect="1"/>
-          </p:cNvPicPr>
-          <p:nvPr/>
-        </p:nvPicPr>
-        <p:blipFill>
-          <a:blip r:embed="rId2"/>
-          <a:stretch>
-            <a:fillRect/>
-          </a:stretch>
-        </p:blipFill>
-        <p:spPr>
-          <a:xfrm>
-            <a:off x="2867583" y="1324162"/>
-            <a:ext cx="6626039" cy="3443345"/>
-          </a:xfrm>
-          <a:prstGeom prst="rect">
-            <a:avLst/>
-          </a:prstGeom>
-        </p:spPr>
-      </p:pic>
-      <p:pic>
-        <p:nvPicPr>
-          <p:cNvPr id="10" name="Picture 9">
-            <a:extLst>
-              <a:ext uri="{FF2B5EF4-FFF2-40B4-BE49-F238E27FC236}">
-                <a16:creationId xmlns:a16="http://schemas.microsoft.com/office/drawing/2014/main" id="{3015FBA7-E965-1785-0C3D-8B03CF9B14C4}"/>
-              </a:ext>
-            </a:extLst>
-          </p:cNvPr>
-          <p:cNvPicPr>
-            <a:picLocks noChangeAspect="1"/>
-          </p:cNvPicPr>
-          <p:nvPr/>
-        </p:nvPicPr>
-        <p:blipFill>
-          <a:blip r:embed="rId3"/>
-          <a:stretch>
-            <a:fillRect/>
-          </a:stretch>
-        </p:blipFill>
-        <p:spPr>
-          <a:xfrm>
-            <a:off x="2973852" y="783620"/>
-            <a:ext cx="6413500" cy="368300"/>
-          </a:xfrm>
-          <a:prstGeom prst="rect">
-            <a:avLst/>
-          </a:prstGeom>
-        </p:spPr>
-      </p:pic>
-    </p:spTree>
-    <p:extLst>
-      <p:ext uri="{BB962C8B-B14F-4D97-AF65-F5344CB8AC3E}">
-        <p14:creationId xmlns:p14="http://schemas.microsoft.com/office/powerpoint/2010/main" val="2654115242"/>
-      </p:ext>
-    </p:extLst>
-  </p:cSld>
-  <p:clrMapOvr>
-    <a:masterClrMapping/>
-  </p:clrMapOvr>
-</p:sld>
-</file>
-
-<file path=ppt/slides/slide13.xml><?xml version="1.0" encoding="utf-8"?>
-<p:sld xmlns:a="http://schemas.openxmlformats.org/drawingml/2006/main" xmlns:r="http://schemas.openxmlformats.org/officeDocument/2006/relationships" xmlns:p="http://schemas.openxmlformats.org/presentationml/2006/main">
-  <p:cSld>
-    <p:spTree>
-      <p:nvGrpSpPr>
-        <p:cNvPr id="1" name=""/>
-        <p:cNvGrpSpPr/>
-        <p:nvPr/>
-      </p:nvGrpSpPr>
-      <p:grpSpPr>
-        <a:xfrm>
-          <a:off x="0" y="0"/>
-          <a:ext cx="0" cy="0"/>
-          <a:chOff x="0" y="0"/>
-          <a:chExt cx="0" cy="0"/>
-        </a:xfrm>
-      </p:grpSpPr>
-      <p:sp>
-        <p:nvSpPr>
-          <p:cNvPr id="2" name="TextBox 1">
-            <a:extLst>
-              <a:ext uri="{FF2B5EF4-FFF2-40B4-BE49-F238E27FC236}">
-                <a16:creationId xmlns:a16="http://schemas.microsoft.com/office/drawing/2014/main" id="{81D8D68E-84EE-0BEE-4DD3-1300BD1905CF}"/>
-              </a:ext>
-            </a:extLst>
-          </p:cNvPr>
-          <p:cNvSpPr txBox="1"/>
-          <p:nvPr/>
-        </p:nvSpPr>
-        <p:spPr>
-          <a:xfrm>
-            <a:off x="4356847" y="248770"/>
-            <a:ext cx="4504765" cy="369332"/>
-          </a:xfrm>
-          <a:prstGeom prst="rect">
-            <a:avLst/>
-          </a:prstGeom>
-          <a:noFill/>
-        </p:spPr>
-        <p:txBody>
-          <a:bodyPr wrap="square" rtlCol="0">
-            <a:spAutoFit/>
-          </a:bodyPr>
-          <a:lstStyle/>
-          <a:p>
-            <a:r>
-              <a:rPr lang="en-US" dirty="0"/>
-              <a:t>As long as that make sense</a:t>
-            </a:r>
-          </a:p>
-        </p:txBody>
-      </p:sp>
-      <p:pic>
-        <p:nvPicPr>
-          <p:cNvPr id="3" name="Picture 2">
-            <a:extLst>
-              <a:ext uri="{FF2B5EF4-FFF2-40B4-BE49-F238E27FC236}">
-                <a16:creationId xmlns:a16="http://schemas.microsoft.com/office/drawing/2014/main" id="{2B076658-5273-7C19-41EB-404AAB01700C}"/>
-              </a:ext>
-            </a:extLst>
-          </p:cNvPr>
-          <p:cNvPicPr>
-            <a:picLocks noChangeAspect="1"/>
-          </p:cNvPicPr>
-          <p:nvPr/>
-        </p:nvPicPr>
-        <p:blipFill>
-          <a:blip r:embed="rId2"/>
-          <a:stretch>
-            <a:fillRect/>
-          </a:stretch>
-        </p:blipFill>
-        <p:spPr>
-          <a:xfrm>
-            <a:off x="2870200" y="1727200"/>
-            <a:ext cx="6451600" cy="3403600"/>
-          </a:xfrm>
-          <a:prstGeom prst="rect">
-            <a:avLst/>
-          </a:prstGeom>
-        </p:spPr>
-      </p:pic>
-      <p:cxnSp>
-        <p:nvCxnSpPr>
-          <p:cNvPr id="5" name="Straight Arrow Connector 4">
-            <a:extLst>
-              <a:ext uri="{FF2B5EF4-FFF2-40B4-BE49-F238E27FC236}">
-                <a16:creationId xmlns:a16="http://schemas.microsoft.com/office/drawing/2014/main" id="{DACB697D-95F0-BFF2-6351-72F6A44F2B0E}"/>
-              </a:ext>
-            </a:extLst>
-          </p:cNvPr>
-          <p:cNvCxnSpPr/>
-          <p:nvPr/>
-        </p:nvCxnSpPr>
-        <p:spPr>
-          <a:xfrm flipH="1">
-            <a:off x="9076765" y="2454088"/>
-            <a:ext cx="1351429" cy="773206"/>
-          </a:xfrm>
-          <a:prstGeom prst="straightConnector1">
-            <a:avLst/>
-          </a:prstGeom>
-          <a:ln w="28575">
-            <a:tailEnd type="triangle"/>
-          </a:ln>
-        </p:spPr>
-        <p:style>
-          <a:lnRef idx="1">
-            <a:schemeClr val="accent1"/>
-          </a:lnRef>
-          <a:fillRef idx="0">
-            <a:schemeClr val="accent1"/>
-          </a:fillRef>
-          <a:effectRef idx="0">
-            <a:schemeClr val="accent1"/>
-          </a:effectRef>
-          <a:fontRef idx="minor">
-            <a:schemeClr val="tx1"/>
-          </a:fontRef>
-        </p:style>
-      </p:cxnSp>
-      <p:sp>
-        <p:nvSpPr>
-          <p:cNvPr id="6" name="TextBox 5">
-            <a:extLst>
-              <a:ext uri="{FF2B5EF4-FFF2-40B4-BE49-F238E27FC236}">
-                <a16:creationId xmlns:a16="http://schemas.microsoft.com/office/drawing/2014/main" id="{A509C352-54C4-07C6-1E55-AF5160929DFE}"/>
-              </a:ext>
-            </a:extLst>
-          </p:cNvPr>
-          <p:cNvSpPr txBox="1"/>
-          <p:nvPr/>
-        </p:nvSpPr>
-        <p:spPr>
-          <a:xfrm>
-            <a:off x="10428194" y="1710391"/>
-            <a:ext cx="1667435" cy="2031325"/>
-          </a:xfrm>
-          <a:prstGeom prst="rect">
-            <a:avLst/>
-          </a:prstGeom>
-          <a:noFill/>
-        </p:spPr>
-        <p:txBody>
-          <a:bodyPr wrap="square" rtlCol="0">
-            <a:spAutoFit/>
-          </a:bodyPr>
-          <a:lstStyle/>
-          <a:p>
-            <a:r>
-              <a:rPr lang="en-US" dirty="0"/>
-              <a:t>Now species has been replaced by an integer representing the group (1,2,3)</a:t>
-            </a:r>
-          </a:p>
-        </p:txBody>
-      </p:sp>
-    </p:spTree>
-    <p:extLst>
-      <p:ext uri="{BB962C8B-B14F-4D97-AF65-F5344CB8AC3E}">
-        <p14:creationId xmlns:p14="http://schemas.microsoft.com/office/powerpoint/2010/main" val="1792948456"/>
-      </p:ext>
-    </p:extLst>
-  </p:cSld>
-  <p:clrMapOvr>
-    <a:masterClrMapping/>
-  </p:clrMapOvr>
-</p:sld>
-</file>
-
-<file path=ppt/slides/slide14.xml><?xml version="1.0" encoding="utf-8"?>
-<p:sld xmlns:a="http://schemas.openxmlformats.org/drawingml/2006/main" xmlns:r="http://schemas.openxmlformats.org/officeDocument/2006/relationships" xmlns:p="http://schemas.openxmlformats.org/presentationml/2006/main">
-  <p:cSld>
-    <p:spTree>
-      <p:nvGrpSpPr>
-        <p:cNvPr id="1" name=""/>
-        <p:cNvGrpSpPr/>
-        <p:nvPr/>
-      </p:nvGrpSpPr>
-      <p:grpSpPr>
-        <a:xfrm>
-          <a:off x="0" y="0"/>
-          <a:ext cx="0" cy="0"/>
-          <a:chOff x="0" y="0"/>
-          <a:chExt cx="0" cy="0"/>
-        </a:xfrm>
-      </p:grpSpPr>
-      <p:sp>
-        <p:nvSpPr>
-          <p:cNvPr id="393" name="Functions"/>
-          <p:cNvSpPr txBox="1"/>
-          <p:nvPr/>
-        </p:nvSpPr>
-        <p:spPr>
-          <a:xfrm>
-            <a:off x="5399151" y="177130"/>
-            <a:ext cx="1402500" cy="420628"/>
-          </a:xfrm>
-          <a:prstGeom prst="rect">
-            <a:avLst/>
-          </a:prstGeom>
-          <a:ln w="12700">
-            <a:miter lim="400000"/>
-          </a:ln>
-          <a:extLst>
-            <a:ext uri="{C572A759-6A51-4108-AA02-DFA0A04FC94B}">
-              <ma14:wrappingTextBoxFlag xmlns:ma14="http://schemas.microsoft.com/office/mac/drawingml/2011/main" xmlns:a14="http://schemas.microsoft.com/office/drawing/2010/main" xmlns:m="http://schemas.openxmlformats.org/officeDocument/2006/math" xmlns="" val="1"/>
-            </a:ext>
-          </a:extLst>
-        </p:spPr>
-        <p:txBody>
-          <a:bodyPr wrap="none" lIns="25400" tIns="25400" rIns="25400" bIns="25400" anchor="ctr">
-            <a:spAutoFit/>
-          </a:bodyPr>
-          <a:lstStyle>
-            <a:lvl1pPr>
-              <a:defRPr sz="4800">
-                <a:latin typeface="Avenir Next Regular"/>
-                <a:ea typeface="Avenir Next Regular"/>
-                <a:cs typeface="Avenir Next Regular"/>
-                <a:sym typeface="Avenir Next Regular"/>
-              </a:defRPr>
-            </a:lvl1pPr>
-          </a:lstStyle>
-          <a:p>
-            <a:r>
-              <a:rPr sz="2400"/>
-              <a:t>Functions</a:t>
-            </a:r>
-          </a:p>
-        </p:txBody>
-      </p:sp>
-      <p:sp>
-        <p:nvSpPr>
-          <p:cNvPr id="395" name="-https://r4ds.had.co.nz/functions.html"/>
-          <p:cNvSpPr txBox="1"/>
-          <p:nvPr/>
-        </p:nvSpPr>
-        <p:spPr>
-          <a:xfrm>
-            <a:off x="9674735" y="6181098"/>
-            <a:ext cx="1888337" cy="189796"/>
-          </a:xfrm>
-          <a:prstGeom prst="rect">
-            <a:avLst/>
-          </a:prstGeom>
-          <a:ln w="12700">
-            <a:miter lim="400000"/>
-          </a:ln>
-          <a:extLst>
-            <a:ext uri="{C572A759-6A51-4108-AA02-DFA0A04FC94B}">
-              <ma14:wrappingTextBoxFlag xmlns:ma14="http://schemas.microsoft.com/office/mac/drawingml/2011/main" xmlns:a14="http://schemas.microsoft.com/office/drawing/2010/main" xmlns:m="http://schemas.openxmlformats.org/officeDocument/2006/math" xmlns="" val="1"/>
-            </a:ext>
-          </a:extLst>
-        </p:spPr>
-        <p:txBody>
-          <a:bodyPr wrap="none" lIns="25400" tIns="25400" rIns="25400" bIns="25400" anchor="ctr">
-            <a:spAutoFit/>
-          </a:bodyPr>
-          <a:lstStyle/>
-          <a:p>
-            <a:r>
-              <a:rPr sz="900" dirty="0"/>
-              <a:t> -https://r4ds.had.co.nz/</a:t>
-            </a:r>
-            <a:r>
-              <a:rPr sz="900" dirty="0" err="1"/>
-              <a:t>functions.html</a:t>
-            </a:r>
-            <a:endParaRPr sz="900" dirty="0"/>
-          </a:p>
-        </p:txBody>
-      </p:sp>
-      <p:sp>
-        <p:nvSpPr>
-          <p:cNvPr id="397" name="Any chunk of code you are going to reuse - can be built in or come with a package or user made…"/>
-          <p:cNvSpPr txBox="1"/>
-          <p:nvPr/>
-        </p:nvSpPr>
-        <p:spPr>
-          <a:xfrm>
-            <a:off x="518306" y="1276929"/>
-            <a:ext cx="6631765" cy="1159292"/>
-          </a:xfrm>
-          <a:prstGeom prst="rect">
-            <a:avLst/>
-          </a:prstGeom>
-          <a:ln w="12700">
-            <a:miter lim="400000"/>
-          </a:ln>
-          <a:extLst>
-            <a:ext uri="{C572A759-6A51-4108-AA02-DFA0A04FC94B}">
-              <ma14:wrappingTextBoxFlag xmlns:ma14="http://schemas.microsoft.com/office/mac/drawingml/2011/main" xmlns:a14="http://schemas.microsoft.com/office/drawing/2010/main" xmlns:m="http://schemas.openxmlformats.org/officeDocument/2006/math" xmlns="" val="1"/>
-            </a:ext>
-          </a:extLst>
-        </p:spPr>
-        <p:txBody>
-          <a:bodyPr wrap="square" lIns="25400" tIns="25400" rIns="25400" bIns="25400" anchor="ctr">
-            <a:spAutoFit/>
-          </a:bodyPr>
-          <a:lstStyle/>
-          <a:p>
-            <a:pPr marL="114300" indent="-114300">
-              <a:buSzPct val="100000"/>
-              <a:buChar char="•"/>
-            </a:pPr>
-            <a:r>
-              <a:rPr dirty="0"/>
-              <a:t>Any chunk of code you are going to reuse - can be built in or come with a package or user made</a:t>
-            </a:r>
-          </a:p>
-          <a:p>
-            <a:pPr marL="114300" indent="-114300">
-              <a:buSzPct val="100000"/>
-              <a:buChar char="•"/>
-            </a:pPr>
-            <a:r>
-              <a:rPr dirty="0"/>
-              <a:t>Can take 0 or more arguments</a:t>
-            </a:r>
-          </a:p>
-          <a:p>
-            <a:pPr marL="114300" indent="-114300">
-              <a:buSzPct val="100000"/>
-              <a:buChar char="•"/>
-            </a:pPr>
-            <a:r>
-              <a:rPr dirty="0"/>
-              <a:t>Can return some value(s) or objects</a:t>
-            </a:r>
-          </a:p>
-        </p:txBody>
-      </p:sp>
-      <p:sp>
-        <p:nvSpPr>
-          <p:cNvPr id="398" name="What are functions"/>
-          <p:cNvSpPr txBox="1"/>
-          <p:nvPr/>
-        </p:nvSpPr>
-        <p:spPr>
-          <a:xfrm>
-            <a:off x="518306" y="885933"/>
-            <a:ext cx="2018822" cy="328295"/>
-          </a:xfrm>
-          <a:prstGeom prst="rect">
-            <a:avLst/>
-          </a:prstGeom>
-          <a:ln w="12700">
-            <a:miter lim="400000"/>
-          </a:ln>
-          <a:extLst>
-            <a:ext uri="{C572A759-6A51-4108-AA02-DFA0A04FC94B}">
-              <ma14:wrappingTextBoxFlag xmlns:ma14="http://schemas.microsoft.com/office/mac/drawingml/2011/main" xmlns:a14="http://schemas.microsoft.com/office/drawing/2010/main" xmlns:m="http://schemas.openxmlformats.org/officeDocument/2006/math" xmlns="" val="1"/>
-            </a:ext>
-          </a:extLst>
-        </p:spPr>
-        <p:txBody>
-          <a:bodyPr wrap="none" lIns="25400" tIns="25400" rIns="25400" bIns="25400" anchor="ctr">
-            <a:spAutoFit/>
-          </a:bodyPr>
-          <a:lstStyle>
-            <a:lvl1pPr>
-              <a:defRPr sz="3600">
-                <a:solidFill>
-                  <a:schemeClr val="accent1">
-                    <a:lumOff val="-13575"/>
-                  </a:schemeClr>
-                </a:solidFill>
-                <a:latin typeface="Avenir Next Regular"/>
-                <a:ea typeface="Avenir Next Regular"/>
-                <a:cs typeface="Avenir Next Regular"/>
-                <a:sym typeface="Avenir Next Regular"/>
-              </a:defRPr>
-            </a:lvl1pPr>
-          </a:lstStyle>
-          <a:p>
-            <a:r>
-              <a:rPr sz="1800" dirty="0"/>
-              <a:t>What are functions</a:t>
-            </a:r>
-          </a:p>
-        </p:txBody>
-      </p:sp>
-    </p:spTree>
-  </p:cSld>
-  <p:clrMapOvr>
-    <a:masterClrMapping/>
-  </p:clrMapOvr>
-</p:sld>
-</file>
-
-<file path=ppt/slides/slide15.xml><?xml version="1.0" encoding="utf-8"?>
-<p:sld xmlns:a="http://schemas.openxmlformats.org/drawingml/2006/main" xmlns:r="http://schemas.openxmlformats.org/officeDocument/2006/relationships" xmlns:p="http://schemas.openxmlformats.org/presentationml/2006/main">
-  <p:cSld>
-    <p:spTree>
-      <p:nvGrpSpPr>
-        <p:cNvPr id="1" name=""/>
-        <p:cNvGrpSpPr/>
-        <p:nvPr/>
-      </p:nvGrpSpPr>
-      <p:grpSpPr>
-        <a:xfrm>
-          <a:off x="0" y="0"/>
-          <a:ext cx="0" cy="0"/>
-          <a:chOff x="0" y="0"/>
-          <a:chExt cx="0" cy="0"/>
-        </a:xfrm>
-      </p:grpSpPr>
-      <p:sp>
-        <p:nvSpPr>
-          <p:cNvPr id="393" name="Functions"/>
-          <p:cNvSpPr txBox="1"/>
-          <p:nvPr/>
-        </p:nvSpPr>
-        <p:spPr>
-          <a:xfrm>
-            <a:off x="5399151" y="177130"/>
-            <a:ext cx="1402500" cy="420628"/>
-          </a:xfrm>
-          <a:prstGeom prst="rect">
-            <a:avLst/>
-          </a:prstGeom>
-          <a:ln w="12700">
-            <a:miter lim="400000"/>
-          </a:ln>
-          <a:extLst>
-            <a:ext uri="{C572A759-6A51-4108-AA02-DFA0A04FC94B}">
-              <ma14:wrappingTextBoxFlag xmlns="" xmlns:m="http://schemas.openxmlformats.org/officeDocument/2006/math" xmlns:a14="http://schemas.microsoft.com/office/drawing/2010/main" xmlns:ma14="http://schemas.microsoft.com/office/mac/drawingml/2011/main" val="1"/>
-            </a:ext>
-          </a:extLst>
-        </p:spPr>
-        <p:txBody>
-          <a:bodyPr wrap="none" lIns="25400" tIns="25400" rIns="25400" bIns="25400" anchor="ctr">
-            <a:spAutoFit/>
-          </a:bodyPr>
-          <a:lstStyle>
-            <a:lvl1pPr>
-              <a:defRPr sz="4800">
-                <a:latin typeface="Avenir Next Regular"/>
-                <a:ea typeface="Avenir Next Regular"/>
-                <a:cs typeface="Avenir Next Regular"/>
-                <a:sym typeface="Avenir Next Regular"/>
-              </a:defRPr>
-            </a:lvl1pPr>
-          </a:lstStyle>
-          <a:p>
-            <a:r>
-              <a:rPr sz="2400"/>
-              <a:t>Functions</a:t>
-            </a:r>
-          </a:p>
-        </p:txBody>
-      </p:sp>
-      <p:sp>
-        <p:nvSpPr>
-          <p:cNvPr id="394" name="You can give a function an evocative name that makes your code easier to understand.…"/>
-          <p:cNvSpPr txBox="1"/>
-          <p:nvPr/>
-        </p:nvSpPr>
-        <p:spPr>
-          <a:xfrm>
-            <a:off x="227597" y="4444221"/>
-            <a:ext cx="9495292" cy="1867178"/>
-          </a:xfrm>
-          <a:prstGeom prst="rect">
-            <a:avLst/>
-          </a:prstGeom>
-          <a:ln w="12700">
-            <a:miter lim="400000"/>
-          </a:ln>
-          <a:extLst>
-            <a:ext uri="{C572A759-6A51-4108-AA02-DFA0A04FC94B}">
-              <ma14:wrappingTextBoxFlag xmlns="" xmlns:m="http://schemas.openxmlformats.org/officeDocument/2006/math" xmlns:a14="http://schemas.microsoft.com/office/drawing/2010/main" xmlns:ma14="http://schemas.microsoft.com/office/mac/drawingml/2011/main" val="1"/>
-            </a:ext>
-          </a:extLst>
-        </p:spPr>
-        <p:txBody>
-          <a:bodyPr wrap="none" lIns="25400" tIns="25400" rIns="25400" bIns="25400" anchor="ctr">
-            <a:spAutoFit/>
-          </a:bodyPr>
-          <a:lstStyle/>
-          <a:p>
-            <a:pPr marL="355600" indent="-285750" defTabSz="228600">
-              <a:spcBef>
-                <a:spcPts val="300"/>
-              </a:spcBef>
-              <a:buClr>
-                <a:srgbClr val="212529"/>
-              </a:buClr>
-              <a:buSzPct val="100000"/>
-              <a:buFont typeface="Arial" panose="020B0604020202020204" pitchFamily="34" charset="0"/>
-              <a:buChar char="•"/>
-              <a:defRPr>
-                <a:solidFill>
-                  <a:srgbClr val="212529"/>
-                </a:solidFill>
-                <a:latin typeface="Avenir Next Regular"/>
-                <a:ea typeface="Avenir Next Regular"/>
-                <a:cs typeface="Avenir Next Regular"/>
-                <a:sym typeface="Avenir Next Regular"/>
-              </a:defRPr>
-            </a:pPr>
-            <a:r>
-              <a:rPr lang="en-US" dirty="0"/>
-              <a:t>Time savings</a:t>
-            </a:r>
-          </a:p>
-          <a:p>
-            <a:pPr marL="355600" indent="-285750" defTabSz="228600">
-              <a:spcBef>
-                <a:spcPts val="300"/>
-              </a:spcBef>
-              <a:buClr>
-                <a:srgbClr val="212529"/>
-              </a:buClr>
-              <a:buSzPct val="100000"/>
-              <a:buFont typeface="Arial" panose="020B0604020202020204" pitchFamily="34" charset="0"/>
-              <a:buChar char="•"/>
-              <a:defRPr>
-                <a:solidFill>
-                  <a:srgbClr val="212529"/>
-                </a:solidFill>
-                <a:latin typeface="Avenir Next Regular"/>
-                <a:ea typeface="Avenir Next Regular"/>
-                <a:cs typeface="Avenir Next Regular"/>
-                <a:sym typeface="Avenir Next Regular"/>
-              </a:defRPr>
-            </a:pPr>
-            <a:r>
-              <a:rPr dirty="0"/>
-              <a:t>You can give a functi</a:t>
-            </a:r>
-            <a:r>
-              <a:rPr lang="en-US" dirty="0"/>
-              <a:t>o</a:t>
-            </a:r>
-            <a:r>
-              <a:rPr dirty="0"/>
-              <a:t>n a </a:t>
-            </a:r>
-            <a:r>
-              <a:rPr lang="en-US" dirty="0"/>
-              <a:t>descriptive</a:t>
-            </a:r>
-            <a:r>
-              <a:rPr dirty="0"/>
-              <a:t> name that makes your code easier to understand.</a:t>
-            </a:r>
-          </a:p>
-          <a:p>
-            <a:pPr marL="355600" indent="-285750" defTabSz="228600">
-              <a:spcBef>
-                <a:spcPts val="300"/>
-              </a:spcBef>
-              <a:buClr>
-                <a:srgbClr val="212529"/>
-              </a:buClr>
-              <a:buSzPct val="100000"/>
-              <a:buFont typeface="Arial" panose="020B0604020202020204" pitchFamily="34" charset="0"/>
-              <a:buChar char="•"/>
-              <a:defRPr>
-                <a:solidFill>
-                  <a:srgbClr val="212529"/>
-                </a:solidFill>
-                <a:latin typeface="Avenir Next Regular"/>
-                <a:ea typeface="Avenir Next Regular"/>
-                <a:cs typeface="Avenir Next Regular"/>
-                <a:sym typeface="Avenir Next Regular"/>
-              </a:defRPr>
-            </a:pPr>
-            <a:r>
-              <a:rPr dirty="0"/>
-              <a:t>As requirements change, you only n</a:t>
-            </a:r>
-            <a:r>
-              <a:rPr lang="en-US" dirty="0"/>
-              <a:t>e</a:t>
-            </a:r>
-            <a:r>
-              <a:rPr dirty="0"/>
-              <a:t>ed to update code in one place, instead of many.</a:t>
-            </a:r>
-          </a:p>
-          <a:p>
-            <a:pPr marL="355600" indent="-285750" defTabSz="228600">
-              <a:spcBef>
-                <a:spcPts val="300"/>
-              </a:spcBef>
-              <a:buClr>
-                <a:srgbClr val="212529"/>
-              </a:buClr>
-              <a:buSzPct val="100000"/>
-              <a:buFont typeface="Arial" panose="020B0604020202020204" pitchFamily="34" charset="0"/>
-              <a:buChar char="•"/>
-              <a:defRPr>
-                <a:solidFill>
-                  <a:srgbClr val="212529"/>
-                </a:solidFill>
-                <a:latin typeface="Avenir Next Regular"/>
-                <a:ea typeface="Avenir Next Regular"/>
-                <a:cs typeface="Avenir Next Regular"/>
-                <a:sym typeface="Avenir Next Regular"/>
-              </a:defRPr>
-            </a:pPr>
-            <a:r>
-              <a:rPr dirty="0"/>
-              <a:t>You eliminate the chance of making incidental mistakes when you copy and paste </a:t>
-            </a:r>
-            <a:endParaRPr lang="en-US" dirty="0"/>
-          </a:p>
-          <a:p>
-            <a:pPr marL="527050" lvl="1" defTabSz="228600">
-              <a:spcBef>
-                <a:spcPts val="300"/>
-              </a:spcBef>
-              <a:buClr>
-                <a:srgbClr val="212529"/>
-              </a:buClr>
-              <a:buSzPct val="100000"/>
-              <a:defRPr>
-                <a:solidFill>
-                  <a:srgbClr val="212529"/>
-                </a:solidFill>
-                <a:latin typeface="Avenir Next Regular"/>
-                <a:ea typeface="Avenir Next Regular"/>
-                <a:cs typeface="Avenir Next Regular"/>
-                <a:sym typeface="Avenir Next Regular"/>
-              </a:defRPr>
-            </a:pPr>
-            <a:r>
-              <a:rPr dirty="0"/>
-              <a:t>(i.e. updating a variable name in one place, but not in another).</a:t>
-            </a:r>
-            <a:br>
-              <a:rPr dirty="0"/>
-            </a:br>
-            <a:endParaRPr dirty="0"/>
-          </a:p>
-        </p:txBody>
-      </p:sp>
-      <p:sp>
-        <p:nvSpPr>
-          <p:cNvPr id="395" name="-https://r4ds.had.co.nz/functions.html"/>
-          <p:cNvSpPr txBox="1"/>
-          <p:nvPr/>
-        </p:nvSpPr>
-        <p:spPr>
-          <a:xfrm>
-            <a:off x="9674735" y="6181098"/>
-            <a:ext cx="1888337" cy="189796"/>
-          </a:xfrm>
-          <a:prstGeom prst="rect">
-            <a:avLst/>
-          </a:prstGeom>
-          <a:ln w="12700">
-            <a:miter lim="400000"/>
-          </a:ln>
-          <a:extLst>
-            <a:ext uri="{C572A759-6A51-4108-AA02-DFA0A04FC94B}">
-              <ma14:wrappingTextBoxFlag xmlns="" xmlns:m="http://schemas.openxmlformats.org/officeDocument/2006/math" xmlns:a14="http://schemas.microsoft.com/office/drawing/2010/main" xmlns:ma14="http://schemas.microsoft.com/office/mac/drawingml/2011/main" val="1"/>
-            </a:ext>
-          </a:extLst>
-        </p:spPr>
-        <p:txBody>
-          <a:bodyPr wrap="none" lIns="25400" tIns="25400" rIns="25400" bIns="25400" anchor="ctr">
-            <a:spAutoFit/>
-          </a:bodyPr>
-          <a:lstStyle/>
-          <a:p>
-            <a:r>
-              <a:rPr sz="900" dirty="0"/>
-              <a:t> -https://r4ds.had.co.nz/</a:t>
-            </a:r>
-            <a:r>
-              <a:rPr sz="900" dirty="0" err="1"/>
-              <a:t>functions.html</a:t>
-            </a:r>
-            <a:endParaRPr sz="900" dirty="0"/>
-          </a:p>
-        </p:txBody>
-      </p:sp>
-      <p:sp>
-        <p:nvSpPr>
-          <p:cNvPr id="396" name="Reasons to make a new function"/>
-          <p:cNvSpPr txBox="1"/>
-          <p:nvPr/>
-        </p:nvSpPr>
-        <p:spPr>
-          <a:xfrm>
-            <a:off x="417099" y="4093485"/>
-            <a:ext cx="3417089" cy="328295"/>
-          </a:xfrm>
-          <a:prstGeom prst="rect">
-            <a:avLst/>
-          </a:prstGeom>
-          <a:ln w="12700">
-            <a:miter lim="400000"/>
-          </a:ln>
-          <a:extLst>
-            <a:ext uri="{C572A759-6A51-4108-AA02-DFA0A04FC94B}">
-              <ma14:wrappingTextBoxFlag xmlns="" xmlns:m="http://schemas.openxmlformats.org/officeDocument/2006/math" xmlns:a14="http://schemas.microsoft.com/office/drawing/2010/main" xmlns:ma14="http://schemas.microsoft.com/office/mac/drawingml/2011/main" val="1"/>
-            </a:ext>
-          </a:extLst>
-        </p:spPr>
-        <p:txBody>
-          <a:bodyPr wrap="none" lIns="25400" tIns="25400" rIns="25400" bIns="25400" anchor="ctr">
-            <a:spAutoFit/>
-          </a:bodyPr>
-          <a:lstStyle>
-            <a:lvl1pPr>
-              <a:defRPr sz="3600">
-                <a:solidFill>
-                  <a:schemeClr val="accent1">
-                    <a:lumOff val="-13575"/>
-                  </a:schemeClr>
-                </a:solidFill>
-                <a:latin typeface="Avenir Next Regular"/>
-                <a:ea typeface="Avenir Next Regular"/>
-                <a:cs typeface="Avenir Next Regular"/>
-                <a:sym typeface="Avenir Next Regular"/>
-              </a:defRPr>
-            </a:lvl1pPr>
-          </a:lstStyle>
-          <a:p>
-            <a:r>
-              <a:rPr sz="1800" dirty="0"/>
-              <a:t>Reasons to make a new function</a:t>
-            </a:r>
-          </a:p>
-        </p:txBody>
-      </p:sp>
-      <p:sp>
-        <p:nvSpPr>
-          <p:cNvPr id="397" name="Any chunk of code you are going to reuse - can be built in or come with a package or user made…"/>
-          <p:cNvSpPr txBox="1"/>
-          <p:nvPr/>
-        </p:nvSpPr>
-        <p:spPr>
-          <a:xfrm>
-            <a:off x="518306" y="1276929"/>
-            <a:ext cx="6631765" cy="1159292"/>
-          </a:xfrm>
-          <a:prstGeom prst="rect">
-            <a:avLst/>
-          </a:prstGeom>
-          <a:ln w="12700">
-            <a:miter lim="400000"/>
-          </a:ln>
-          <a:extLst>
-            <a:ext uri="{C572A759-6A51-4108-AA02-DFA0A04FC94B}">
-              <ma14:wrappingTextBoxFlag xmlns="" xmlns:m="http://schemas.openxmlformats.org/officeDocument/2006/math" xmlns:a14="http://schemas.microsoft.com/office/drawing/2010/main" xmlns:ma14="http://schemas.microsoft.com/office/mac/drawingml/2011/main" val="1"/>
-            </a:ext>
-          </a:extLst>
-        </p:spPr>
-        <p:txBody>
-          <a:bodyPr wrap="square" lIns="25400" tIns="25400" rIns="25400" bIns="25400" anchor="ctr">
-            <a:spAutoFit/>
-          </a:bodyPr>
-          <a:lstStyle/>
-          <a:p>
-            <a:pPr marL="114300" indent="-114300">
-              <a:buSzPct val="100000"/>
-              <a:buChar char="•"/>
-            </a:pPr>
-            <a:r>
-              <a:rPr dirty="0"/>
-              <a:t>Any chunk of code you are going to reuse - can be built in or come with a package or user made</a:t>
-            </a:r>
-          </a:p>
-          <a:p>
-            <a:pPr marL="114300" indent="-114300">
-              <a:buSzPct val="100000"/>
-              <a:buChar char="•"/>
-            </a:pPr>
-            <a:r>
-              <a:rPr dirty="0"/>
-              <a:t>Can take 0 or more arguments</a:t>
-            </a:r>
-          </a:p>
-          <a:p>
-            <a:pPr marL="114300" indent="-114300">
-              <a:buSzPct val="100000"/>
-              <a:buChar char="•"/>
-            </a:pPr>
-            <a:r>
-              <a:rPr dirty="0"/>
-              <a:t>Can return some value(s) or objects</a:t>
-            </a:r>
-          </a:p>
-        </p:txBody>
-      </p:sp>
-      <p:sp>
-        <p:nvSpPr>
-          <p:cNvPr id="398" name="What are functions"/>
-          <p:cNvSpPr txBox="1"/>
-          <p:nvPr/>
-        </p:nvSpPr>
-        <p:spPr>
-          <a:xfrm>
-            <a:off x="518306" y="885933"/>
-            <a:ext cx="2018822" cy="328295"/>
-          </a:xfrm>
-          <a:prstGeom prst="rect">
-            <a:avLst/>
-          </a:prstGeom>
-          <a:ln w="12700">
-            <a:miter lim="400000"/>
-          </a:ln>
-          <a:extLst>
-            <a:ext uri="{C572A759-6A51-4108-AA02-DFA0A04FC94B}">
-              <ma14:wrappingTextBoxFlag xmlns="" xmlns:m="http://schemas.openxmlformats.org/officeDocument/2006/math" xmlns:a14="http://schemas.microsoft.com/office/drawing/2010/main" xmlns:ma14="http://schemas.microsoft.com/office/mac/drawingml/2011/main" val="1"/>
-            </a:ext>
-          </a:extLst>
-        </p:spPr>
-        <p:txBody>
-          <a:bodyPr wrap="none" lIns="25400" tIns="25400" rIns="25400" bIns="25400" anchor="ctr">
-            <a:spAutoFit/>
-          </a:bodyPr>
-          <a:lstStyle>
-            <a:lvl1pPr>
-              <a:defRPr sz="3600">
-                <a:solidFill>
-                  <a:schemeClr val="accent1">
-                    <a:lumOff val="-13575"/>
-                  </a:schemeClr>
-                </a:solidFill>
-                <a:latin typeface="Avenir Next Regular"/>
-                <a:ea typeface="Avenir Next Regular"/>
-                <a:cs typeface="Avenir Next Regular"/>
-                <a:sym typeface="Avenir Next Regular"/>
-              </a:defRPr>
-            </a:lvl1pPr>
-          </a:lstStyle>
-          <a:p>
-            <a:r>
-              <a:rPr sz="1800" dirty="0"/>
-              <a:t>What are functions</a:t>
-            </a:r>
-          </a:p>
-        </p:txBody>
-      </p:sp>
-      <p:pic>
-        <p:nvPicPr>
-          <p:cNvPr id="2" name="Picture 1">
-            <a:extLst>
-              <a:ext uri="{FF2B5EF4-FFF2-40B4-BE49-F238E27FC236}">
-                <a16:creationId xmlns:a16="http://schemas.microsoft.com/office/drawing/2014/main" id="{FB7A7431-E88C-E9CF-C22F-AC7EF771DCDB}"/>
-              </a:ext>
-            </a:extLst>
-          </p:cNvPr>
-          <p:cNvPicPr>
-            <a:picLocks noChangeAspect="1"/>
-          </p:cNvPicPr>
-          <p:nvPr/>
-        </p:nvPicPr>
-        <p:blipFill>
-          <a:blip r:embed="rId2"/>
-          <a:stretch>
-            <a:fillRect/>
-          </a:stretch>
-        </p:blipFill>
-        <p:spPr>
-          <a:xfrm>
-            <a:off x="6801651" y="597758"/>
-            <a:ext cx="4655016" cy="3689762"/>
-          </a:xfrm>
-          <a:prstGeom prst="rect">
-            <a:avLst/>
-          </a:prstGeom>
-        </p:spPr>
-      </p:pic>
-      <p:sp>
-        <p:nvSpPr>
-          <p:cNvPr id="4" name="TextBox 3">
-            <a:extLst>
-              <a:ext uri="{FF2B5EF4-FFF2-40B4-BE49-F238E27FC236}">
-                <a16:creationId xmlns:a16="http://schemas.microsoft.com/office/drawing/2014/main" id="{F451805A-0E44-C150-4134-EB8DE67D9954}"/>
-              </a:ext>
-            </a:extLst>
-          </p:cNvPr>
-          <p:cNvSpPr txBox="1"/>
-          <p:nvPr/>
-        </p:nvSpPr>
-        <p:spPr>
-          <a:xfrm>
-            <a:off x="9428480" y="5811766"/>
-            <a:ext cx="6096000" cy="369332"/>
-          </a:xfrm>
-          <a:prstGeom prst="rect">
-            <a:avLst/>
-          </a:prstGeom>
-          <a:noFill/>
-        </p:spPr>
-        <p:txBody>
-          <a:bodyPr wrap="square">
-            <a:spAutoFit/>
-          </a:bodyPr>
-          <a:lstStyle/>
-          <a:p>
-            <a:r>
-              <a:rPr lang="en-US" dirty="0"/>
-              <a:t>https://</a:t>
-            </a:r>
-            <a:r>
-              <a:rPr lang="en-US" dirty="0" err="1"/>
-              <a:t>xkcd.com</a:t>
-            </a:r>
-            <a:r>
-              <a:rPr lang="en-US" dirty="0"/>
-              <a:t>/1205/</a:t>
-            </a:r>
-          </a:p>
-        </p:txBody>
-      </p:sp>
-    </p:spTree>
-    <p:extLst>
-      <p:ext uri="{BB962C8B-B14F-4D97-AF65-F5344CB8AC3E}">
-        <p14:creationId xmlns:p14="http://schemas.microsoft.com/office/powerpoint/2010/main" val="1996646748"/>
-      </p:ext>
-    </p:extLst>
-  </p:cSld>
-  <p:clrMapOvr>
-    <a:masterClrMapping/>
-  </p:clrMapOvr>
-</p:sld>
-</file>
-
-<file path=ppt/slides/slide16.xml><?xml version="1.0" encoding="utf-8"?>
-<p:sld xmlns:a="http://schemas.openxmlformats.org/drawingml/2006/main" xmlns:r="http://schemas.openxmlformats.org/officeDocument/2006/relationships" xmlns:p="http://schemas.openxmlformats.org/presentationml/2006/main">
-  <p:cSld>
-    <p:spTree>
-      <p:nvGrpSpPr>
-        <p:cNvPr id="1" name=""/>
-        <p:cNvGrpSpPr/>
-        <p:nvPr/>
-      </p:nvGrpSpPr>
-      <p:grpSpPr>
-        <a:xfrm>
-          <a:off x="0" y="0"/>
-          <a:ext cx="0" cy="0"/>
-          <a:chOff x="0" y="0"/>
-          <a:chExt cx="0" cy="0"/>
-        </a:xfrm>
-      </p:grpSpPr>
-      <p:sp>
-        <p:nvSpPr>
-          <p:cNvPr id="5" name="TextBox 4">
-            <a:extLst>
-              <a:ext uri="{FF2B5EF4-FFF2-40B4-BE49-F238E27FC236}">
-                <a16:creationId xmlns:a16="http://schemas.microsoft.com/office/drawing/2014/main" id="{329A493F-FCD9-7CA9-DCC5-2EC6A8A29730}"/>
-              </a:ext>
-            </a:extLst>
-          </p:cNvPr>
-          <p:cNvSpPr txBox="1"/>
-          <p:nvPr/>
-        </p:nvSpPr>
-        <p:spPr>
-          <a:xfrm>
-            <a:off x="4991463" y="137433"/>
-            <a:ext cx="1534394" cy="369332"/>
-          </a:xfrm>
-          <a:prstGeom prst="rect">
-            <a:avLst/>
-          </a:prstGeom>
-          <a:noFill/>
-        </p:spPr>
-        <p:txBody>
-          <a:bodyPr wrap="none" rtlCol="0">
-            <a:spAutoFit/>
-          </a:bodyPr>
-          <a:lstStyle/>
-          <a:p>
-            <a:r>
-              <a:rPr lang="en-US" dirty="0"/>
-              <a:t>Basic Function</a:t>
-            </a:r>
-          </a:p>
-        </p:txBody>
-      </p:sp>
-      <p:pic>
-        <p:nvPicPr>
-          <p:cNvPr id="6" name="Picture 5">
-            <a:extLst>
-              <a:ext uri="{FF2B5EF4-FFF2-40B4-BE49-F238E27FC236}">
-                <a16:creationId xmlns:a16="http://schemas.microsoft.com/office/drawing/2014/main" id="{72066490-4A50-1E52-4903-99915B0533A6}"/>
-              </a:ext>
-            </a:extLst>
-          </p:cNvPr>
-          <p:cNvPicPr>
-            <a:picLocks noChangeAspect="1"/>
-          </p:cNvPicPr>
-          <p:nvPr/>
-        </p:nvPicPr>
-        <p:blipFill>
-          <a:blip r:embed="rId2"/>
-          <a:stretch>
-            <a:fillRect/>
-          </a:stretch>
-        </p:blipFill>
-        <p:spPr>
-          <a:xfrm>
-            <a:off x="6449540" y="3094264"/>
-            <a:ext cx="2400300" cy="520700"/>
-          </a:xfrm>
-          <a:prstGeom prst="rect">
-            <a:avLst/>
-          </a:prstGeom>
-        </p:spPr>
-      </p:pic>
-      <p:pic>
-        <p:nvPicPr>
-          <p:cNvPr id="7" name="Picture 6">
-            <a:extLst>
-              <a:ext uri="{FF2B5EF4-FFF2-40B4-BE49-F238E27FC236}">
-                <a16:creationId xmlns:a16="http://schemas.microsoft.com/office/drawing/2014/main" id="{77D80E2F-BE9F-BAFB-09A6-37EFF5A5775C}"/>
-              </a:ext>
-            </a:extLst>
-          </p:cNvPr>
-          <p:cNvPicPr>
-            <a:picLocks noChangeAspect="1"/>
-          </p:cNvPicPr>
-          <p:nvPr/>
-        </p:nvPicPr>
-        <p:blipFill>
-          <a:blip r:embed="rId3"/>
-          <a:stretch>
-            <a:fillRect/>
-          </a:stretch>
-        </p:blipFill>
-        <p:spPr>
-          <a:xfrm>
-            <a:off x="6454983" y="1670112"/>
-            <a:ext cx="4216400" cy="1054100"/>
-          </a:xfrm>
-          <a:prstGeom prst="rect">
-            <a:avLst/>
-          </a:prstGeom>
-        </p:spPr>
-      </p:pic>
-      <p:sp>
-        <p:nvSpPr>
-          <p:cNvPr id="8" name="TextBox 7">
-            <a:extLst>
-              <a:ext uri="{FF2B5EF4-FFF2-40B4-BE49-F238E27FC236}">
-                <a16:creationId xmlns:a16="http://schemas.microsoft.com/office/drawing/2014/main" id="{1ECB1FD7-0E59-94FC-00CA-3CD30F0175C1}"/>
-              </a:ext>
-            </a:extLst>
-          </p:cNvPr>
-          <p:cNvSpPr txBox="1"/>
-          <p:nvPr/>
-        </p:nvSpPr>
-        <p:spPr>
-          <a:xfrm>
-            <a:off x="5622646" y="1123043"/>
-            <a:ext cx="1590500" cy="369332"/>
-          </a:xfrm>
-          <a:prstGeom prst="rect">
-            <a:avLst/>
-          </a:prstGeom>
-          <a:noFill/>
-        </p:spPr>
-        <p:txBody>
-          <a:bodyPr wrap="none" rtlCol="0">
-            <a:spAutoFit/>
-          </a:bodyPr>
-          <a:lstStyle/>
-          <a:p>
-            <a:r>
-              <a:rPr lang="en-US" dirty="0"/>
-              <a:t>Function name</a:t>
-            </a:r>
-          </a:p>
-        </p:txBody>
-      </p:sp>
-      <p:cxnSp>
-        <p:nvCxnSpPr>
-          <p:cNvPr id="10" name="Straight Arrow Connector 9">
-            <a:extLst>
-              <a:ext uri="{FF2B5EF4-FFF2-40B4-BE49-F238E27FC236}">
-                <a16:creationId xmlns:a16="http://schemas.microsoft.com/office/drawing/2014/main" id="{E77025EA-9293-FFED-DFFF-DB02D893C57E}"/>
-              </a:ext>
-            </a:extLst>
-          </p:cNvPr>
-          <p:cNvCxnSpPr/>
-          <p:nvPr/>
-        </p:nvCxnSpPr>
-        <p:spPr>
-          <a:xfrm>
-            <a:off x="7135586" y="1335377"/>
-            <a:ext cx="155121" cy="334735"/>
-          </a:xfrm>
-          <a:prstGeom prst="straightConnector1">
-            <a:avLst/>
-          </a:prstGeom>
-          <a:ln>
-            <a:tailEnd type="triangle"/>
-          </a:ln>
-        </p:spPr>
-        <p:style>
-          <a:lnRef idx="1">
-            <a:schemeClr val="accent1"/>
-          </a:lnRef>
-          <a:fillRef idx="0">
-            <a:schemeClr val="accent1"/>
-          </a:fillRef>
-          <a:effectRef idx="0">
-            <a:schemeClr val="accent1"/>
-          </a:effectRef>
-          <a:fontRef idx="minor">
-            <a:schemeClr val="tx1"/>
-          </a:fontRef>
-        </p:style>
-      </p:cxnSp>
-      <p:sp>
-        <p:nvSpPr>
-          <p:cNvPr id="12" name="TextBox 11">
-            <a:extLst>
-              <a:ext uri="{FF2B5EF4-FFF2-40B4-BE49-F238E27FC236}">
-                <a16:creationId xmlns:a16="http://schemas.microsoft.com/office/drawing/2014/main" id="{01F89C21-4F61-5000-93C2-1B637C820693}"/>
-              </a:ext>
-            </a:extLst>
-          </p:cNvPr>
-          <p:cNvSpPr txBox="1"/>
-          <p:nvPr/>
-        </p:nvSpPr>
-        <p:spPr>
-          <a:xfrm>
-            <a:off x="4856479" y="1785487"/>
-            <a:ext cx="1964267" cy="646331"/>
-          </a:xfrm>
-          <a:prstGeom prst="rect">
-            <a:avLst/>
-          </a:prstGeom>
-          <a:noFill/>
-        </p:spPr>
-        <p:txBody>
-          <a:bodyPr wrap="square" rtlCol="0">
-            <a:spAutoFit/>
-          </a:bodyPr>
-          <a:lstStyle/>
-          <a:p>
-            <a:r>
-              <a:rPr lang="en-US" dirty="0"/>
-              <a:t>Function</a:t>
-            </a:r>
-          </a:p>
-          <a:p>
-            <a:r>
-              <a:rPr lang="en-US" dirty="0"/>
-              <a:t>body</a:t>
-            </a:r>
-          </a:p>
-        </p:txBody>
-      </p:sp>
-      <p:cxnSp>
-        <p:nvCxnSpPr>
-          <p:cNvPr id="14" name="Straight Arrow Connector 13">
-            <a:extLst>
-              <a:ext uri="{FF2B5EF4-FFF2-40B4-BE49-F238E27FC236}">
-                <a16:creationId xmlns:a16="http://schemas.microsoft.com/office/drawing/2014/main" id="{F74A8A2B-E66D-8ACA-A6B1-D0B88A91536C}"/>
-              </a:ext>
-            </a:extLst>
-          </p:cNvPr>
-          <p:cNvCxnSpPr>
-            <a:endCxn id="12" idx="3"/>
-          </p:cNvCxnSpPr>
-          <p:nvPr/>
-        </p:nvCxnSpPr>
-        <p:spPr>
-          <a:xfrm>
-            <a:off x="5960533" y="2108653"/>
-            <a:ext cx="860213" cy="0"/>
-          </a:xfrm>
-          <a:prstGeom prst="straightConnector1">
-            <a:avLst/>
-          </a:prstGeom>
-          <a:ln>
-            <a:tailEnd type="triangle"/>
-          </a:ln>
-        </p:spPr>
-        <p:style>
-          <a:lnRef idx="1">
-            <a:schemeClr val="accent1"/>
-          </a:lnRef>
-          <a:fillRef idx="0">
-            <a:schemeClr val="accent1"/>
-          </a:fillRef>
-          <a:effectRef idx="0">
-            <a:schemeClr val="accent1"/>
-          </a:effectRef>
-          <a:fontRef idx="minor">
-            <a:schemeClr val="tx1"/>
-          </a:fontRef>
-        </p:style>
-      </p:cxnSp>
-      <p:sp>
-        <p:nvSpPr>
-          <p:cNvPr id="15" name="TextBox 14">
-            <a:extLst>
-              <a:ext uri="{FF2B5EF4-FFF2-40B4-BE49-F238E27FC236}">
-                <a16:creationId xmlns:a16="http://schemas.microsoft.com/office/drawing/2014/main" id="{ECD6190A-089B-853B-4654-D77B6212B547}"/>
-              </a:ext>
-            </a:extLst>
-          </p:cNvPr>
-          <p:cNvSpPr txBox="1"/>
-          <p:nvPr/>
-        </p:nvSpPr>
-        <p:spPr>
-          <a:xfrm>
-            <a:off x="4585477" y="2909598"/>
-            <a:ext cx="1375056" cy="369332"/>
-          </a:xfrm>
-          <a:prstGeom prst="rect">
-            <a:avLst/>
-          </a:prstGeom>
-          <a:noFill/>
-        </p:spPr>
-        <p:txBody>
-          <a:bodyPr wrap="none" rtlCol="0">
-            <a:spAutoFit/>
-          </a:bodyPr>
-          <a:lstStyle/>
-          <a:p>
-            <a:r>
-              <a:rPr lang="en-US" dirty="0"/>
-              <a:t>Return value</a:t>
-            </a:r>
-          </a:p>
-        </p:txBody>
-      </p:sp>
-      <p:cxnSp>
-        <p:nvCxnSpPr>
-          <p:cNvPr id="17" name="Straight Arrow Connector 16">
-            <a:extLst>
-              <a:ext uri="{FF2B5EF4-FFF2-40B4-BE49-F238E27FC236}">
-                <a16:creationId xmlns:a16="http://schemas.microsoft.com/office/drawing/2014/main" id="{6C47EBB0-D2A2-36D7-89CF-8F98575913CE}"/>
-              </a:ext>
-            </a:extLst>
-          </p:cNvPr>
-          <p:cNvCxnSpPr/>
-          <p:nvPr/>
-        </p:nvCxnSpPr>
-        <p:spPr>
-          <a:xfrm flipV="1">
-            <a:off x="6190827" y="2431818"/>
-            <a:ext cx="799253" cy="575542"/>
-          </a:xfrm>
-          <a:prstGeom prst="straightConnector1">
-            <a:avLst/>
-          </a:prstGeom>
-          <a:ln>
-            <a:tailEnd type="triangle"/>
-          </a:ln>
-        </p:spPr>
-        <p:style>
-          <a:lnRef idx="1">
-            <a:schemeClr val="accent1"/>
-          </a:lnRef>
-          <a:fillRef idx="0">
-            <a:schemeClr val="accent1"/>
-          </a:fillRef>
-          <a:effectRef idx="0">
-            <a:schemeClr val="accent1"/>
-          </a:effectRef>
-          <a:fontRef idx="minor">
-            <a:schemeClr val="tx1"/>
-          </a:fontRef>
-        </p:style>
-      </p:cxnSp>
-      <p:sp>
-        <p:nvSpPr>
-          <p:cNvPr id="18" name="TextBox 17">
-            <a:extLst>
-              <a:ext uri="{FF2B5EF4-FFF2-40B4-BE49-F238E27FC236}">
-                <a16:creationId xmlns:a16="http://schemas.microsoft.com/office/drawing/2014/main" id="{8CB50C4E-F271-6DE9-7873-AAA41844FCFC}"/>
-              </a:ext>
-            </a:extLst>
-          </p:cNvPr>
-          <p:cNvSpPr txBox="1"/>
-          <p:nvPr/>
-        </p:nvSpPr>
-        <p:spPr>
-          <a:xfrm>
-            <a:off x="9482083" y="642136"/>
-            <a:ext cx="1189300" cy="369332"/>
-          </a:xfrm>
-          <a:prstGeom prst="rect">
-            <a:avLst/>
-          </a:prstGeom>
-          <a:noFill/>
-        </p:spPr>
-        <p:txBody>
-          <a:bodyPr wrap="none" rtlCol="0">
-            <a:spAutoFit/>
-          </a:bodyPr>
-          <a:lstStyle/>
-          <a:p>
-            <a:r>
-              <a:rPr lang="en-US" dirty="0"/>
-              <a:t>arguments</a:t>
-            </a:r>
-          </a:p>
-        </p:txBody>
-      </p:sp>
-      <p:cxnSp>
-        <p:nvCxnSpPr>
-          <p:cNvPr id="20" name="Straight Arrow Connector 19">
-            <a:extLst>
-              <a:ext uri="{FF2B5EF4-FFF2-40B4-BE49-F238E27FC236}">
-                <a16:creationId xmlns:a16="http://schemas.microsoft.com/office/drawing/2014/main" id="{41F52DD0-7175-D640-E972-5CA407C0D27B}"/>
-              </a:ext>
-            </a:extLst>
-          </p:cNvPr>
-          <p:cNvCxnSpPr/>
-          <p:nvPr/>
-        </p:nvCxnSpPr>
-        <p:spPr>
-          <a:xfrm flipH="1">
-            <a:off x="9821333" y="1123043"/>
-            <a:ext cx="115147" cy="495784"/>
-          </a:xfrm>
-          <a:prstGeom prst="straightConnector1">
-            <a:avLst/>
-          </a:prstGeom>
-          <a:ln>
-            <a:tailEnd type="triangle"/>
-          </a:ln>
-        </p:spPr>
-        <p:style>
-          <a:lnRef idx="1">
-            <a:schemeClr val="accent1"/>
-          </a:lnRef>
-          <a:fillRef idx="0">
-            <a:schemeClr val="accent1"/>
-          </a:fillRef>
-          <a:effectRef idx="0">
-            <a:schemeClr val="accent1"/>
-          </a:effectRef>
-          <a:fontRef idx="minor">
-            <a:schemeClr val="tx1"/>
-          </a:fontRef>
-        </p:style>
-      </p:cxnSp>
-      <p:pic>
-        <p:nvPicPr>
-          <p:cNvPr id="22" name="Picture 21">
-            <a:extLst>
-              <a:ext uri="{FF2B5EF4-FFF2-40B4-BE49-F238E27FC236}">
-                <a16:creationId xmlns:a16="http://schemas.microsoft.com/office/drawing/2014/main" id="{E72C0EBA-2156-DC5A-1B3C-788BA2C2091C}"/>
-              </a:ext>
-            </a:extLst>
-          </p:cNvPr>
-          <p:cNvPicPr>
-            <a:picLocks noChangeAspect="1"/>
-          </p:cNvPicPr>
-          <p:nvPr/>
-        </p:nvPicPr>
-        <p:blipFill>
-          <a:blip r:embed="rId4"/>
-          <a:stretch>
-            <a:fillRect/>
-          </a:stretch>
-        </p:blipFill>
-        <p:spPr>
-          <a:xfrm>
-            <a:off x="287189" y="1171756"/>
-            <a:ext cx="3909561" cy="3845016"/>
-          </a:xfrm>
-          <a:prstGeom prst="rect">
-            <a:avLst/>
-          </a:prstGeom>
-        </p:spPr>
-      </p:pic>
-      <p:sp>
-        <p:nvSpPr>
-          <p:cNvPr id="24" name="TextBox 23">
-            <a:extLst>
-              <a:ext uri="{FF2B5EF4-FFF2-40B4-BE49-F238E27FC236}">
-                <a16:creationId xmlns:a16="http://schemas.microsoft.com/office/drawing/2014/main" id="{B02EAA19-E40B-4019-5A5C-8D693759B186}"/>
-              </a:ext>
-            </a:extLst>
-          </p:cNvPr>
-          <p:cNvSpPr txBox="1"/>
-          <p:nvPr/>
-        </p:nvSpPr>
-        <p:spPr>
-          <a:xfrm>
-            <a:off x="389147" y="4973680"/>
-            <a:ext cx="6096000" cy="369332"/>
-          </a:xfrm>
-          <a:prstGeom prst="rect">
-            <a:avLst/>
-          </a:prstGeom>
-          <a:noFill/>
-        </p:spPr>
-        <p:txBody>
-          <a:bodyPr wrap="square">
-            <a:spAutoFit/>
-          </a:bodyPr>
-          <a:lstStyle/>
-          <a:p>
-            <a:r>
-              <a:rPr lang="en-US" dirty="0"/>
-              <a:t>https://</a:t>
-            </a:r>
-            <a:r>
-              <a:rPr lang="en-US" dirty="0" err="1"/>
-              <a:t>xkcd.com</a:t>
-            </a:r>
-            <a:r>
-              <a:rPr lang="en-US" dirty="0"/>
-              <a:t>/1319/</a:t>
-            </a:r>
-          </a:p>
-        </p:txBody>
-      </p:sp>
-    </p:spTree>
-    <p:extLst>
-      <p:ext uri="{BB962C8B-B14F-4D97-AF65-F5344CB8AC3E}">
-        <p14:creationId xmlns:p14="http://schemas.microsoft.com/office/powerpoint/2010/main" val="3179177417"/>
-      </p:ext>
-    </p:extLst>
-  </p:cSld>
-  <p:clrMapOvr>
-    <a:masterClrMapping/>
-  </p:clrMapOvr>
-</p:sld>
-</file>
-
-<file path=ppt/slides/slide17.xml><?xml version="1.0" encoding="utf-8"?>
-<p:sld xmlns:a="http://schemas.openxmlformats.org/drawingml/2006/main" xmlns:r="http://schemas.openxmlformats.org/officeDocument/2006/relationships" xmlns:p="http://schemas.openxmlformats.org/presentationml/2006/main">
-  <p:cSld>
-    <p:spTree>
-      <p:nvGrpSpPr>
-        <p:cNvPr id="1" name=""/>
-        <p:cNvGrpSpPr/>
-        <p:nvPr/>
-      </p:nvGrpSpPr>
-      <p:grpSpPr>
-        <a:xfrm>
-          <a:off x="0" y="0"/>
-          <a:ext cx="0" cy="0"/>
-          <a:chOff x="0" y="0"/>
-          <a:chExt cx="0" cy="0"/>
-        </a:xfrm>
-      </p:grpSpPr>
-      <p:sp>
-        <p:nvSpPr>
-          <p:cNvPr id="2" name="TextBox 1">
-            <a:extLst>
-              <a:ext uri="{FF2B5EF4-FFF2-40B4-BE49-F238E27FC236}">
-                <a16:creationId xmlns:a16="http://schemas.microsoft.com/office/drawing/2014/main" id="{9D9A0DC5-96D6-AC76-09C9-5C35E3822F89}"/>
-              </a:ext>
-            </a:extLst>
-          </p:cNvPr>
-          <p:cNvSpPr txBox="1"/>
-          <p:nvPr/>
-        </p:nvSpPr>
-        <p:spPr>
-          <a:xfrm>
-            <a:off x="3239510" y="217808"/>
-            <a:ext cx="7354671" cy="369332"/>
-          </a:xfrm>
-          <a:prstGeom prst="rect">
-            <a:avLst/>
-          </a:prstGeom>
-          <a:noFill/>
-        </p:spPr>
-        <p:txBody>
-          <a:bodyPr wrap="square" rtlCol="0">
-            <a:spAutoFit/>
-          </a:bodyPr>
-          <a:lstStyle/>
-          <a:p>
-            <a:r>
-              <a:rPr lang="en-US" dirty="0"/>
-              <a:t>Loops (or performing the same operation on many things)</a:t>
-            </a:r>
-          </a:p>
-        </p:txBody>
-      </p:sp>
-      <p:pic>
-        <p:nvPicPr>
-          <p:cNvPr id="3" name="Picture 2">
-            <a:extLst>
-              <a:ext uri="{FF2B5EF4-FFF2-40B4-BE49-F238E27FC236}">
-                <a16:creationId xmlns:a16="http://schemas.microsoft.com/office/drawing/2014/main" id="{3D89E326-CBC1-B343-AC5F-DB5EF52F9679}"/>
-              </a:ext>
-            </a:extLst>
-          </p:cNvPr>
-          <p:cNvPicPr>
-            <a:picLocks noChangeAspect="1"/>
-          </p:cNvPicPr>
-          <p:nvPr/>
-        </p:nvPicPr>
-        <p:blipFill>
-          <a:blip r:embed="rId2"/>
-          <a:stretch>
-            <a:fillRect/>
-          </a:stretch>
-        </p:blipFill>
-        <p:spPr>
-          <a:xfrm>
-            <a:off x="1156347" y="1200714"/>
-            <a:ext cx="3329684" cy="657715"/>
-          </a:xfrm>
-          <a:prstGeom prst="rect">
-            <a:avLst/>
-          </a:prstGeom>
-        </p:spPr>
-      </p:pic>
-      <p:pic>
-        <p:nvPicPr>
-          <p:cNvPr id="4" name="Picture 3">
-            <a:extLst>
-              <a:ext uri="{FF2B5EF4-FFF2-40B4-BE49-F238E27FC236}">
-                <a16:creationId xmlns:a16="http://schemas.microsoft.com/office/drawing/2014/main" id="{A06AB6A5-131B-1B94-1BE1-975CE2DF3AA1}"/>
-              </a:ext>
-            </a:extLst>
-          </p:cNvPr>
-          <p:cNvPicPr>
-            <a:picLocks noChangeAspect="1"/>
-          </p:cNvPicPr>
-          <p:nvPr/>
-        </p:nvPicPr>
-        <p:blipFill>
-          <a:blip r:embed="rId3"/>
-          <a:stretch>
-            <a:fillRect/>
-          </a:stretch>
-        </p:blipFill>
-        <p:spPr>
-          <a:xfrm>
-            <a:off x="1156347" y="2054491"/>
-            <a:ext cx="3594100" cy="520700"/>
-          </a:xfrm>
-          <a:prstGeom prst="rect">
-            <a:avLst/>
-          </a:prstGeom>
-        </p:spPr>
-      </p:pic>
-      <p:pic>
-        <p:nvPicPr>
-          <p:cNvPr id="5" name="Picture 4">
-            <a:extLst>
-              <a:ext uri="{FF2B5EF4-FFF2-40B4-BE49-F238E27FC236}">
-                <a16:creationId xmlns:a16="http://schemas.microsoft.com/office/drawing/2014/main" id="{4E4B3A31-4713-10F1-264E-753EE869728F}"/>
-              </a:ext>
-            </a:extLst>
-          </p:cNvPr>
-          <p:cNvPicPr>
-            <a:picLocks noChangeAspect="1"/>
-          </p:cNvPicPr>
-          <p:nvPr/>
-        </p:nvPicPr>
-        <p:blipFill>
-          <a:blip r:embed="rId4"/>
-          <a:stretch>
-            <a:fillRect/>
-          </a:stretch>
-        </p:blipFill>
-        <p:spPr>
-          <a:xfrm>
-            <a:off x="5405327" y="1529571"/>
-            <a:ext cx="5630326" cy="1207767"/>
-          </a:xfrm>
-          <a:prstGeom prst="rect">
-            <a:avLst/>
-          </a:prstGeom>
-        </p:spPr>
-      </p:pic>
-      <p:pic>
-        <p:nvPicPr>
-          <p:cNvPr id="6" name="Picture 5">
-            <a:extLst>
-              <a:ext uri="{FF2B5EF4-FFF2-40B4-BE49-F238E27FC236}">
-                <a16:creationId xmlns:a16="http://schemas.microsoft.com/office/drawing/2014/main" id="{13B6F9A7-E702-6C17-D8C5-F7823C8D690E}"/>
-              </a:ext>
-            </a:extLst>
-          </p:cNvPr>
-          <p:cNvPicPr>
-            <a:picLocks noChangeAspect="1"/>
-          </p:cNvPicPr>
-          <p:nvPr/>
-        </p:nvPicPr>
-        <p:blipFill>
-          <a:blip r:embed="rId5"/>
-          <a:stretch>
-            <a:fillRect/>
-          </a:stretch>
-        </p:blipFill>
-        <p:spPr>
-          <a:xfrm>
-            <a:off x="5405327" y="3003550"/>
-            <a:ext cx="2722684" cy="2794334"/>
-          </a:xfrm>
-          <a:prstGeom prst="rect">
-            <a:avLst/>
-          </a:prstGeom>
-        </p:spPr>
-      </p:pic>
-    </p:spTree>
-    <p:extLst>
-      <p:ext uri="{BB962C8B-B14F-4D97-AF65-F5344CB8AC3E}">
-        <p14:creationId xmlns:p14="http://schemas.microsoft.com/office/powerpoint/2010/main" val="2694943225"/>
-      </p:ext>
-    </p:extLst>
-  </p:cSld>
-  <p:clrMapOvr>
-    <a:masterClrMapping/>
-  </p:clrMapOvr>
-</p:sld>
-</file>
-
-<file path=ppt/slides/slide18.xml><?xml version="1.0" encoding="utf-8"?>
-<p:sld xmlns:a="http://schemas.openxmlformats.org/drawingml/2006/main" xmlns:r="http://schemas.openxmlformats.org/officeDocument/2006/relationships" xmlns:p="http://schemas.openxmlformats.org/presentationml/2006/main">
-  <p:cSld>
-    <p:spTree>
-      <p:nvGrpSpPr>
-        <p:cNvPr id="1" name=""/>
-        <p:cNvGrpSpPr/>
-        <p:nvPr/>
-      </p:nvGrpSpPr>
-      <p:grpSpPr>
-        <a:xfrm>
-          <a:off x="0" y="0"/>
-          <a:ext cx="0" cy="0"/>
-          <a:chOff x="0" y="0"/>
-          <a:chExt cx="0" cy="0"/>
-        </a:xfrm>
-      </p:grpSpPr>
-      <p:sp>
-        <p:nvSpPr>
-          <p:cNvPr id="2" name="TextBox 1">
-            <a:extLst>
-              <a:ext uri="{FF2B5EF4-FFF2-40B4-BE49-F238E27FC236}">
-                <a16:creationId xmlns:a16="http://schemas.microsoft.com/office/drawing/2014/main" id="{9D9A0DC5-96D6-AC76-09C9-5C35E3822F89}"/>
-              </a:ext>
-            </a:extLst>
-          </p:cNvPr>
-          <p:cNvSpPr txBox="1"/>
-          <p:nvPr/>
-        </p:nvSpPr>
-        <p:spPr>
-          <a:xfrm>
-            <a:off x="2703729" y="374970"/>
-            <a:ext cx="7354671" cy="369332"/>
-          </a:xfrm>
-          <a:prstGeom prst="rect">
-            <a:avLst/>
-          </a:prstGeom>
-          <a:noFill/>
-        </p:spPr>
-        <p:txBody>
-          <a:bodyPr wrap="square" rtlCol="0">
-            <a:spAutoFit/>
-          </a:bodyPr>
-          <a:lstStyle/>
-          <a:p>
-            <a:r>
-              <a:rPr lang="en-US" dirty="0"/>
-              <a:t>Loops (or performing the same operation on many things)</a:t>
-            </a:r>
-          </a:p>
-        </p:txBody>
-      </p:sp>
-      <p:pic>
-        <p:nvPicPr>
-          <p:cNvPr id="3" name="Picture 2">
-            <a:extLst>
-              <a:ext uri="{FF2B5EF4-FFF2-40B4-BE49-F238E27FC236}">
-                <a16:creationId xmlns:a16="http://schemas.microsoft.com/office/drawing/2014/main" id="{3D89E326-CBC1-B343-AC5F-DB5EF52F9679}"/>
-              </a:ext>
-            </a:extLst>
-          </p:cNvPr>
-          <p:cNvPicPr>
-            <a:picLocks noChangeAspect="1"/>
-          </p:cNvPicPr>
-          <p:nvPr/>
-        </p:nvPicPr>
-        <p:blipFill>
-          <a:blip r:embed="rId2"/>
-          <a:stretch>
-            <a:fillRect/>
-          </a:stretch>
-        </p:blipFill>
-        <p:spPr>
-          <a:xfrm>
-            <a:off x="1156347" y="1200714"/>
-            <a:ext cx="3329684" cy="657715"/>
-          </a:xfrm>
-          <a:prstGeom prst="rect">
-            <a:avLst/>
-          </a:prstGeom>
-        </p:spPr>
-      </p:pic>
-      <p:pic>
-        <p:nvPicPr>
-          <p:cNvPr id="7" name="Picture 6">
-            <a:extLst>
-              <a:ext uri="{FF2B5EF4-FFF2-40B4-BE49-F238E27FC236}">
-                <a16:creationId xmlns:a16="http://schemas.microsoft.com/office/drawing/2014/main" id="{3D2D61EF-8C35-B3B2-CDA4-DF4E46313892}"/>
-              </a:ext>
-            </a:extLst>
-          </p:cNvPr>
-          <p:cNvPicPr>
-            <a:picLocks noChangeAspect="1"/>
-          </p:cNvPicPr>
-          <p:nvPr/>
-        </p:nvPicPr>
-        <p:blipFill>
-          <a:blip r:embed="rId3"/>
-          <a:stretch>
-            <a:fillRect/>
-          </a:stretch>
-        </p:blipFill>
-        <p:spPr>
-          <a:xfrm>
-            <a:off x="1156347" y="2314841"/>
-            <a:ext cx="4584700" cy="1016000"/>
-          </a:xfrm>
-          <a:prstGeom prst="rect">
-            <a:avLst/>
-          </a:prstGeom>
-        </p:spPr>
-      </p:pic>
-      <p:sp>
-        <p:nvSpPr>
-          <p:cNvPr id="8" name="TextBox 7">
-            <a:extLst>
-              <a:ext uri="{FF2B5EF4-FFF2-40B4-BE49-F238E27FC236}">
-                <a16:creationId xmlns:a16="http://schemas.microsoft.com/office/drawing/2014/main" id="{7FC5C157-B92B-1D93-7E74-7ECBDB0F38AF}"/>
-              </a:ext>
-            </a:extLst>
-          </p:cNvPr>
-          <p:cNvSpPr txBox="1"/>
-          <p:nvPr/>
-        </p:nvSpPr>
-        <p:spPr>
-          <a:xfrm>
-            <a:off x="6291385" y="2407138"/>
-            <a:ext cx="4501489" cy="646331"/>
-          </a:xfrm>
-          <a:prstGeom prst="rect">
-            <a:avLst/>
-          </a:prstGeom>
-          <a:noFill/>
-        </p:spPr>
-        <p:txBody>
-          <a:bodyPr wrap="none" rtlCol="0">
-            <a:spAutoFit/>
-          </a:bodyPr>
-          <a:lstStyle/>
-          <a:p>
-            <a:r>
-              <a:rPr lang="en-US" dirty="0"/>
-              <a:t>Function that takes a number and prints it out</a:t>
-            </a:r>
-          </a:p>
-          <a:p>
-            <a:r>
-              <a:rPr lang="en-US" dirty="0"/>
-              <a:t>Just like the loop on the last slide</a:t>
-            </a:r>
-          </a:p>
-        </p:txBody>
-      </p:sp>
-      <p:pic>
-        <p:nvPicPr>
-          <p:cNvPr id="9" name="Picture 8">
-            <a:extLst>
-              <a:ext uri="{FF2B5EF4-FFF2-40B4-BE49-F238E27FC236}">
-                <a16:creationId xmlns:a16="http://schemas.microsoft.com/office/drawing/2014/main" id="{2921F36A-7BDA-359D-95B7-2D2256B4DA1D}"/>
-              </a:ext>
-            </a:extLst>
-          </p:cNvPr>
-          <p:cNvPicPr>
-            <a:picLocks noChangeAspect="1"/>
-          </p:cNvPicPr>
-          <p:nvPr/>
-        </p:nvPicPr>
-        <p:blipFill>
-          <a:blip r:embed="rId4"/>
-          <a:stretch>
-            <a:fillRect/>
-          </a:stretch>
-        </p:blipFill>
-        <p:spPr>
-          <a:xfrm>
-            <a:off x="1156347" y="3804532"/>
-            <a:ext cx="5932395" cy="646331"/>
-          </a:xfrm>
-          <a:prstGeom prst="rect">
-            <a:avLst/>
-          </a:prstGeom>
-        </p:spPr>
-      </p:pic>
-      <p:sp>
-        <p:nvSpPr>
-          <p:cNvPr id="10" name="TextBox 9">
-            <a:extLst>
-              <a:ext uri="{FF2B5EF4-FFF2-40B4-BE49-F238E27FC236}">
-                <a16:creationId xmlns:a16="http://schemas.microsoft.com/office/drawing/2014/main" id="{9EE0BFA8-DE07-6A7B-16C2-23979434500E}"/>
-              </a:ext>
-            </a:extLst>
-          </p:cNvPr>
-          <p:cNvSpPr txBox="1"/>
-          <p:nvPr/>
-        </p:nvSpPr>
-        <p:spPr>
-          <a:xfrm>
-            <a:off x="7088742" y="3216842"/>
-            <a:ext cx="4501488" cy="923330"/>
-          </a:xfrm>
-          <a:prstGeom prst="rect">
-            <a:avLst/>
-          </a:prstGeom>
-          <a:noFill/>
-        </p:spPr>
-        <p:txBody>
-          <a:bodyPr wrap="square" rtlCol="0">
-            <a:spAutoFit/>
-          </a:bodyPr>
-          <a:lstStyle/>
-          <a:p>
-            <a:r>
-              <a:rPr lang="en-US" dirty="0" err="1"/>
-              <a:t>lapply</a:t>
-            </a:r>
-            <a:r>
-              <a:rPr lang="en-US" dirty="0"/>
-              <a:t> is a function that takes a list </a:t>
-            </a:r>
-          </a:p>
-          <a:p>
-            <a:r>
-              <a:rPr lang="en-US" dirty="0"/>
-              <a:t>and applies a function to each element </a:t>
-            </a:r>
-          </a:p>
-          <a:p>
-            <a:r>
-              <a:rPr lang="en-US" dirty="0"/>
-              <a:t>of the list</a:t>
-            </a:r>
-          </a:p>
-        </p:txBody>
-      </p:sp>
-      <p:sp>
-        <p:nvSpPr>
-          <p:cNvPr id="11" name="TextBox 10">
-            <a:extLst>
-              <a:ext uri="{FF2B5EF4-FFF2-40B4-BE49-F238E27FC236}">
-                <a16:creationId xmlns:a16="http://schemas.microsoft.com/office/drawing/2014/main" id="{86C96972-673F-8D53-E968-9747091D5A36}"/>
-              </a:ext>
-            </a:extLst>
-          </p:cNvPr>
-          <p:cNvSpPr txBox="1"/>
-          <p:nvPr/>
-        </p:nvSpPr>
-        <p:spPr>
-          <a:xfrm>
-            <a:off x="3071446" y="5201926"/>
-            <a:ext cx="454612" cy="369332"/>
-          </a:xfrm>
-          <a:prstGeom prst="rect">
-            <a:avLst/>
-          </a:prstGeom>
-          <a:noFill/>
-        </p:spPr>
-        <p:txBody>
-          <a:bodyPr wrap="none" rtlCol="0">
-            <a:spAutoFit/>
-          </a:bodyPr>
-          <a:lstStyle/>
-          <a:p>
-            <a:r>
-              <a:rPr lang="en-US" dirty="0"/>
-              <a:t>list</a:t>
-            </a:r>
-          </a:p>
-        </p:txBody>
-      </p:sp>
-      <p:sp>
-        <p:nvSpPr>
-          <p:cNvPr id="12" name="TextBox 11">
-            <a:extLst>
-              <a:ext uri="{FF2B5EF4-FFF2-40B4-BE49-F238E27FC236}">
-                <a16:creationId xmlns:a16="http://schemas.microsoft.com/office/drawing/2014/main" id="{DD178951-A62F-62D4-2C21-1423AA34FABB}"/>
-              </a:ext>
-            </a:extLst>
-          </p:cNvPr>
-          <p:cNvSpPr txBox="1"/>
-          <p:nvPr/>
-        </p:nvSpPr>
-        <p:spPr>
-          <a:xfrm>
-            <a:off x="5410927" y="5201926"/>
-            <a:ext cx="970137" cy="369332"/>
-          </a:xfrm>
-          <a:prstGeom prst="rect">
-            <a:avLst/>
-          </a:prstGeom>
-          <a:noFill/>
-        </p:spPr>
-        <p:txBody>
-          <a:bodyPr wrap="none" rtlCol="0">
-            <a:spAutoFit/>
-          </a:bodyPr>
-          <a:lstStyle/>
-          <a:p>
-            <a:r>
-              <a:rPr lang="en-US" dirty="0"/>
-              <a:t>function</a:t>
-            </a:r>
-          </a:p>
-        </p:txBody>
-      </p:sp>
-      <p:cxnSp>
-        <p:nvCxnSpPr>
-          <p:cNvPr id="14" name="Straight Arrow Connector 13">
-            <a:extLst>
-              <a:ext uri="{FF2B5EF4-FFF2-40B4-BE49-F238E27FC236}">
-                <a16:creationId xmlns:a16="http://schemas.microsoft.com/office/drawing/2014/main" id="{541959FF-6E83-BDB1-4533-8F80CF45848C}"/>
-              </a:ext>
-            </a:extLst>
-          </p:cNvPr>
-          <p:cNvCxnSpPr/>
-          <p:nvPr/>
-        </p:nvCxnSpPr>
-        <p:spPr>
-          <a:xfrm flipV="1">
-            <a:off x="3298752" y="4509477"/>
-            <a:ext cx="0" cy="554892"/>
-          </a:xfrm>
-          <a:prstGeom prst="straightConnector1">
-            <a:avLst/>
-          </a:prstGeom>
-          <a:ln w="41275">
-            <a:tailEnd type="triangle"/>
-          </a:ln>
-        </p:spPr>
-        <p:style>
-          <a:lnRef idx="1">
-            <a:schemeClr val="accent1"/>
-          </a:lnRef>
-          <a:fillRef idx="0">
-            <a:schemeClr val="accent1"/>
-          </a:fillRef>
-          <a:effectRef idx="0">
-            <a:schemeClr val="accent1"/>
-          </a:effectRef>
-          <a:fontRef idx="minor">
-            <a:schemeClr val="tx1"/>
-          </a:fontRef>
-        </p:style>
-      </p:cxnSp>
-      <p:cxnSp>
-        <p:nvCxnSpPr>
-          <p:cNvPr id="15" name="Straight Arrow Connector 14">
-            <a:extLst>
-              <a:ext uri="{FF2B5EF4-FFF2-40B4-BE49-F238E27FC236}">
-                <a16:creationId xmlns:a16="http://schemas.microsoft.com/office/drawing/2014/main" id="{C4E6C7C4-0F6F-89A5-8C9E-FF80DDED5D6E}"/>
-              </a:ext>
-            </a:extLst>
-          </p:cNvPr>
-          <p:cNvCxnSpPr/>
-          <p:nvPr/>
-        </p:nvCxnSpPr>
-        <p:spPr>
-          <a:xfrm flipV="1">
-            <a:off x="5895995" y="4589362"/>
-            <a:ext cx="0" cy="554892"/>
-          </a:xfrm>
-          <a:prstGeom prst="straightConnector1">
-            <a:avLst/>
-          </a:prstGeom>
-          <a:ln w="41275">
-            <a:tailEnd type="triangle"/>
-          </a:ln>
-        </p:spPr>
-        <p:style>
-          <a:lnRef idx="1">
-            <a:schemeClr val="accent1"/>
-          </a:lnRef>
-          <a:fillRef idx="0">
-            <a:schemeClr val="accent1"/>
-          </a:fillRef>
-          <a:effectRef idx="0">
-            <a:schemeClr val="accent1"/>
-          </a:effectRef>
-          <a:fontRef idx="minor">
-            <a:schemeClr val="tx1"/>
-          </a:fontRef>
-        </p:style>
-      </p:cxnSp>
-      <p:pic>
-        <p:nvPicPr>
-          <p:cNvPr id="16" name="Picture 15">
-            <a:extLst>
-              <a:ext uri="{FF2B5EF4-FFF2-40B4-BE49-F238E27FC236}">
-                <a16:creationId xmlns:a16="http://schemas.microsoft.com/office/drawing/2014/main" id="{32D5DA46-7ACF-58D5-7AD7-23973A4959D0}"/>
-              </a:ext>
-            </a:extLst>
-          </p:cNvPr>
-          <p:cNvPicPr>
-            <a:picLocks noChangeAspect="1"/>
-          </p:cNvPicPr>
-          <p:nvPr/>
-        </p:nvPicPr>
-        <p:blipFill>
-          <a:blip r:embed="rId5"/>
-          <a:stretch>
-            <a:fillRect/>
-          </a:stretch>
-        </p:blipFill>
-        <p:spPr>
-          <a:xfrm>
-            <a:off x="9857614" y="3804532"/>
-            <a:ext cx="1128633" cy="2897841"/>
-          </a:xfrm>
-          <a:prstGeom prst="rect">
-            <a:avLst/>
-          </a:prstGeom>
-        </p:spPr>
-      </p:pic>
-    </p:spTree>
-    <p:extLst>
-      <p:ext uri="{BB962C8B-B14F-4D97-AF65-F5344CB8AC3E}">
-        <p14:creationId xmlns:p14="http://schemas.microsoft.com/office/powerpoint/2010/main" val="2484998749"/>
-      </p:ext>
-    </p:extLst>
-  </p:cSld>
-  <p:clrMapOvr>
-    <a:masterClrMapping/>
-  </p:clrMapOvr>
-</p:sld>
-</file>
-
-<file path=ppt/slides/slide19.xml><?xml version="1.0" encoding="utf-8"?>
-<p:sld xmlns:a="http://schemas.openxmlformats.org/drawingml/2006/main" xmlns:r="http://schemas.openxmlformats.org/officeDocument/2006/relationships" xmlns:p="http://schemas.openxmlformats.org/presentationml/2006/main">
-  <p:cSld>
-    <p:spTree>
-      <p:nvGrpSpPr>
-        <p:cNvPr id="1" name=""/>
-        <p:cNvGrpSpPr/>
-        <p:nvPr/>
-      </p:nvGrpSpPr>
-      <p:grpSpPr>
-        <a:xfrm>
-          <a:off x="0" y="0"/>
-          <a:ext cx="0" cy="0"/>
-          <a:chOff x="0" y="0"/>
-          <a:chExt cx="0" cy="0"/>
-        </a:xfrm>
-      </p:grpSpPr>
-      <p:sp>
-        <p:nvSpPr>
-          <p:cNvPr id="2" name="TextBox 1">
-            <a:extLst>
-              <a:ext uri="{FF2B5EF4-FFF2-40B4-BE49-F238E27FC236}">
-                <a16:creationId xmlns:a16="http://schemas.microsoft.com/office/drawing/2014/main" id="{9D9A0DC5-96D6-AC76-09C9-5C35E3822F89}"/>
-              </a:ext>
-            </a:extLst>
-          </p:cNvPr>
-          <p:cNvSpPr txBox="1"/>
-          <p:nvPr/>
-        </p:nvSpPr>
-        <p:spPr>
-          <a:xfrm>
-            <a:off x="2703729" y="374970"/>
-            <a:ext cx="7354671" cy="369332"/>
-          </a:xfrm>
-          <a:prstGeom prst="rect">
-            <a:avLst/>
-          </a:prstGeom>
-          <a:noFill/>
-        </p:spPr>
-        <p:txBody>
-          <a:bodyPr wrap="square" rtlCol="0">
-            <a:spAutoFit/>
-          </a:bodyPr>
-          <a:lstStyle/>
-          <a:p>
-            <a:r>
-              <a:rPr lang="en-US" dirty="0"/>
-              <a:t>Loops (or performing the same operation on many things)</a:t>
-            </a:r>
-          </a:p>
-        </p:txBody>
-      </p:sp>
-      <p:pic>
-        <p:nvPicPr>
-          <p:cNvPr id="3" name="Picture 2">
-            <a:extLst>
-              <a:ext uri="{FF2B5EF4-FFF2-40B4-BE49-F238E27FC236}">
-                <a16:creationId xmlns:a16="http://schemas.microsoft.com/office/drawing/2014/main" id="{3D89E326-CBC1-B343-AC5F-DB5EF52F9679}"/>
-              </a:ext>
-            </a:extLst>
-          </p:cNvPr>
-          <p:cNvPicPr>
-            <a:picLocks noChangeAspect="1"/>
-          </p:cNvPicPr>
-          <p:nvPr/>
-        </p:nvPicPr>
-        <p:blipFill>
-          <a:blip r:embed="rId2"/>
-          <a:stretch>
-            <a:fillRect/>
-          </a:stretch>
-        </p:blipFill>
-        <p:spPr>
-          <a:xfrm>
-            <a:off x="1156347" y="1200714"/>
-            <a:ext cx="3329684" cy="657715"/>
-          </a:xfrm>
-          <a:prstGeom prst="rect">
-            <a:avLst/>
-          </a:prstGeom>
-        </p:spPr>
-      </p:pic>
-      <p:sp>
-        <p:nvSpPr>
-          <p:cNvPr id="11" name="TextBox 10">
-            <a:extLst>
-              <a:ext uri="{FF2B5EF4-FFF2-40B4-BE49-F238E27FC236}">
-                <a16:creationId xmlns:a16="http://schemas.microsoft.com/office/drawing/2014/main" id="{86C96972-673F-8D53-E968-9747091D5A36}"/>
-              </a:ext>
-            </a:extLst>
-          </p:cNvPr>
-          <p:cNvSpPr txBox="1"/>
-          <p:nvPr/>
-        </p:nvSpPr>
-        <p:spPr>
-          <a:xfrm>
-            <a:off x="1639334" y="4479432"/>
-            <a:ext cx="454612" cy="369332"/>
-          </a:xfrm>
-          <a:prstGeom prst="rect">
-            <a:avLst/>
-          </a:prstGeom>
-          <a:noFill/>
-        </p:spPr>
-        <p:txBody>
-          <a:bodyPr wrap="none" rtlCol="0">
-            <a:spAutoFit/>
-          </a:bodyPr>
-          <a:lstStyle/>
-          <a:p>
-            <a:r>
-              <a:rPr lang="en-US" dirty="0"/>
-              <a:t>list</a:t>
-            </a:r>
-          </a:p>
-        </p:txBody>
-      </p:sp>
-      <p:sp>
-        <p:nvSpPr>
-          <p:cNvPr id="12" name="TextBox 11">
-            <a:extLst>
-              <a:ext uri="{FF2B5EF4-FFF2-40B4-BE49-F238E27FC236}">
-                <a16:creationId xmlns:a16="http://schemas.microsoft.com/office/drawing/2014/main" id="{DD178951-A62F-62D4-2C21-1423AA34FABB}"/>
-              </a:ext>
-            </a:extLst>
-          </p:cNvPr>
-          <p:cNvSpPr txBox="1"/>
-          <p:nvPr/>
-        </p:nvSpPr>
-        <p:spPr>
-          <a:xfrm>
-            <a:off x="4826375" y="5173277"/>
-            <a:ext cx="2139240" cy="369332"/>
-          </a:xfrm>
-          <a:prstGeom prst="rect">
-            <a:avLst/>
-          </a:prstGeom>
-          <a:noFill/>
-        </p:spPr>
-        <p:txBody>
-          <a:bodyPr wrap="none" rtlCol="0">
-            <a:spAutoFit/>
-          </a:bodyPr>
-          <a:lstStyle/>
-          <a:p>
-            <a:r>
-              <a:rPr lang="en-US" dirty="0"/>
-              <a:t>Anonymous function</a:t>
-            </a:r>
-          </a:p>
-        </p:txBody>
-      </p:sp>
-      <p:cxnSp>
-        <p:nvCxnSpPr>
-          <p:cNvPr id="14" name="Straight Arrow Connector 13">
-            <a:extLst>
-              <a:ext uri="{FF2B5EF4-FFF2-40B4-BE49-F238E27FC236}">
-                <a16:creationId xmlns:a16="http://schemas.microsoft.com/office/drawing/2014/main" id="{541959FF-6E83-BDB1-4533-8F80CF45848C}"/>
-              </a:ext>
-            </a:extLst>
-          </p:cNvPr>
-          <p:cNvCxnSpPr/>
-          <p:nvPr/>
-        </p:nvCxnSpPr>
-        <p:spPr>
-          <a:xfrm flipV="1">
-            <a:off x="1866640" y="3837124"/>
-            <a:ext cx="0" cy="554892"/>
-          </a:xfrm>
-          <a:prstGeom prst="straightConnector1">
-            <a:avLst/>
-          </a:prstGeom>
-          <a:ln w="41275">
-            <a:tailEnd type="triangle"/>
-          </a:ln>
-        </p:spPr>
-        <p:style>
-          <a:lnRef idx="1">
-            <a:schemeClr val="accent1"/>
-          </a:lnRef>
-          <a:fillRef idx="0">
-            <a:schemeClr val="accent1"/>
-          </a:fillRef>
-          <a:effectRef idx="0">
-            <a:schemeClr val="accent1"/>
-          </a:effectRef>
-          <a:fontRef idx="minor">
-            <a:schemeClr val="tx1"/>
-          </a:fontRef>
-        </p:style>
-      </p:cxnSp>
-      <p:cxnSp>
-        <p:nvCxnSpPr>
-          <p:cNvPr id="15" name="Straight Arrow Connector 14">
-            <a:extLst>
-              <a:ext uri="{FF2B5EF4-FFF2-40B4-BE49-F238E27FC236}">
-                <a16:creationId xmlns:a16="http://schemas.microsoft.com/office/drawing/2014/main" id="{C4E6C7C4-0F6F-89A5-8C9E-FF80DDED5D6E}"/>
-              </a:ext>
-            </a:extLst>
-          </p:cNvPr>
-          <p:cNvCxnSpPr>
-            <a:cxnSpLocks/>
-          </p:cNvCxnSpPr>
-          <p:nvPr/>
-        </p:nvCxnSpPr>
-        <p:spPr>
-          <a:xfrm flipH="1" flipV="1">
-            <a:off x="5311588" y="3966882"/>
-            <a:ext cx="584407" cy="1177372"/>
-          </a:xfrm>
-          <a:prstGeom prst="straightConnector1">
-            <a:avLst/>
-          </a:prstGeom>
-          <a:ln w="41275">
-            <a:tailEnd type="triangle"/>
-          </a:ln>
-        </p:spPr>
-        <p:style>
-          <a:lnRef idx="1">
-            <a:schemeClr val="accent1"/>
-          </a:lnRef>
-          <a:fillRef idx="0">
-            <a:schemeClr val="accent1"/>
-          </a:fillRef>
-          <a:effectRef idx="0">
-            <a:schemeClr val="accent1"/>
-          </a:effectRef>
-          <a:fontRef idx="minor">
-            <a:schemeClr val="tx1"/>
-          </a:fontRef>
-        </p:style>
-      </p:cxnSp>
-      <p:sp>
-        <p:nvSpPr>
-          <p:cNvPr id="4" name="TextBox 3">
-            <a:extLst>
-              <a:ext uri="{FF2B5EF4-FFF2-40B4-BE49-F238E27FC236}">
-                <a16:creationId xmlns:a16="http://schemas.microsoft.com/office/drawing/2014/main" id="{9E108EBC-2ACB-C669-1CC0-01016B4C1C5C}"/>
-              </a:ext>
-            </a:extLst>
-          </p:cNvPr>
-          <p:cNvSpPr txBox="1"/>
-          <p:nvPr/>
-        </p:nvSpPr>
-        <p:spPr>
-          <a:xfrm>
-            <a:off x="3915915" y="2569393"/>
-            <a:ext cx="3960159" cy="646331"/>
-          </a:xfrm>
-          <a:prstGeom prst="rect">
-            <a:avLst/>
-          </a:prstGeom>
-          <a:noFill/>
-        </p:spPr>
-        <p:txBody>
-          <a:bodyPr wrap="square" rtlCol="0">
-            <a:spAutoFit/>
-          </a:bodyPr>
-          <a:lstStyle/>
-          <a:p>
-            <a:r>
-              <a:rPr lang="en-US" dirty="0"/>
-              <a:t>Function doesn’t have to be have already been made</a:t>
-            </a:r>
-          </a:p>
-        </p:txBody>
-      </p:sp>
-      <p:pic>
-        <p:nvPicPr>
-          <p:cNvPr id="5" name="Picture 4">
-            <a:extLst>
-              <a:ext uri="{FF2B5EF4-FFF2-40B4-BE49-F238E27FC236}">
-                <a16:creationId xmlns:a16="http://schemas.microsoft.com/office/drawing/2014/main" id="{C6324D14-3976-5568-B66E-72973C39A74C}"/>
-              </a:ext>
-            </a:extLst>
-          </p:cNvPr>
-          <p:cNvPicPr>
-            <a:picLocks noChangeAspect="1"/>
-          </p:cNvPicPr>
-          <p:nvPr/>
-        </p:nvPicPr>
-        <p:blipFill>
-          <a:blip r:embed="rId3"/>
-          <a:stretch>
-            <a:fillRect/>
-          </a:stretch>
-        </p:blipFill>
-        <p:spPr>
-          <a:xfrm>
-            <a:off x="569633" y="3312733"/>
-            <a:ext cx="6642100" cy="444500"/>
-          </a:xfrm>
-          <a:prstGeom prst="rect">
-            <a:avLst/>
-          </a:prstGeom>
-        </p:spPr>
-      </p:pic>
-      <p:cxnSp>
-        <p:nvCxnSpPr>
-          <p:cNvPr id="17" name="Straight Connector 16">
-            <a:extLst>
-              <a:ext uri="{FF2B5EF4-FFF2-40B4-BE49-F238E27FC236}">
-                <a16:creationId xmlns:a16="http://schemas.microsoft.com/office/drawing/2014/main" id="{B3C5300D-4C89-2514-E380-A4707B2BC2C0}"/>
-              </a:ext>
-            </a:extLst>
-          </p:cNvPr>
-          <p:cNvCxnSpPr/>
-          <p:nvPr/>
-        </p:nvCxnSpPr>
-        <p:spPr>
-          <a:xfrm>
-            <a:off x="2703729" y="3906371"/>
-            <a:ext cx="4342530" cy="0"/>
-          </a:xfrm>
-          <a:prstGeom prst="line">
-            <a:avLst/>
-          </a:prstGeom>
-          <a:ln w="34925"/>
-        </p:spPr>
-        <p:style>
-          <a:lnRef idx="1">
-            <a:schemeClr val="accent1"/>
-          </a:lnRef>
-          <a:fillRef idx="0">
-            <a:schemeClr val="accent1"/>
-          </a:fillRef>
-          <a:effectRef idx="0">
-            <a:schemeClr val="accent1"/>
-          </a:effectRef>
-          <a:fontRef idx="minor">
-            <a:schemeClr val="tx1"/>
-          </a:fontRef>
-        </p:style>
-      </p:cxnSp>
-    </p:spTree>
-    <p:extLst>
-      <p:ext uri="{BB962C8B-B14F-4D97-AF65-F5344CB8AC3E}">
-        <p14:creationId xmlns:p14="http://schemas.microsoft.com/office/powerpoint/2010/main" val="3187267927"/>
-      </p:ext>
-    </p:extLst>
-  </p:cSld>
-  <p:clrMapOvr>
-    <a:masterClrMapping/>
-  </p:clrMapOvr>
-</p:sld>
-</file>
-
-<file path=ppt/slides/slide2.xml><?xml version="1.0" encoding="utf-8"?>
-<p:sld xmlns:a="http://schemas.openxmlformats.org/drawingml/2006/main" xmlns:r="http://schemas.openxmlformats.org/officeDocument/2006/relationships" xmlns:p="http://schemas.openxmlformats.org/presentationml/2006/main">
-  <p:cSld>
-    <p:spTree>
-      <p:nvGrpSpPr>
-        <p:cNvPr id="1" name=""/>
-        <p:cNvGrpSpPr/>
-        <p:nvPr/>
-      </p:nvGrpSpPr>
-      <p:grpSpPr>
-        <a:xfrm>
-          <a:off x="0" y="0"/>
-          <a:ext cx="0" cy="0"/>
-          <a:chOff x="0" y="0"/>
-          <a:chExt cx="0" cy="0"/>
-        </a:xfrm>
-      </p:grpSpPr>
-      <p:sp>
-        <p:nvSpPr>
-          <p:cNvPr id="2" name="Title 1">
-            <a:extLst>
-              <a:ext uri="{FF2B5EF4-FFF2-40B4-BE49-F238E27FC236}">
-                <a16:creationId xmlns:a16="http://schemas.microsoft.com/office/drawing/2014/main" id="{B4EB949B-90AB-DC09-FBC4-4B96BF4EB896}"/>
-              </a:ext>
-            </a:extLst>
-          </p:cNvPr>
-          <p:cNvSpPr>
-            <a:spLocks noGrp="1"/>
-          </p:cNvSpPr>
-          <p:nvPr>
-            <p:ph type="title"/>
-          </p:nvPr>
-        </p:nvSpPr>
-        <p:spPr/>
-        <p:txBody>
-          <a:bodyPr/>
-          <a:lstStyle/>
-          <a:p>
-            <a:r>
-              <a:rPr lang="en-US" dirty="0"/>
-              <a:t>Recap from last time</a:t>
-            </a:r>
-          </a:p>
-        </p:txBody>
-      </p:sp>
-      <p:sp>
-        <p:nvSpPr>
-          <p:cNvPr id="3" name="Content Placeholder 2">
-            <a:extLst>
-              <a:ext uri="{FF2B5EF4-FFF2-40B4-BE49-F238E27FC236}">
-                <a16:creationId xmlns:a16="http://schemas.microsoft.com/office/drawing/2014/main" id="{EA800592-07B8-8124-CD74-D900599B8C4F}"/>
-              </a:ext>
-            </a:extLst>
-          </p:cNvPr>
-          <p:cNvSpPr>
-            <a:spLocks noGrp="1"/>
-          </p:cNvSpPr>
-          <p:nvPr>
-            <p:ph idx="1"/>
-          </p:nvPr>
-        </p:nvSpPr>
-        <p:spPr>
-          <a:xfrm>
-            <a:off x="730322" y="1887877"/>
-            <a:ext cx="10515600" cy="4351338"/>
-          </a:xfrm>
-        </p:spPr>
-        <p:txBody>
-          <a:bodyPr/>
-          <a:lstStyle/>
-          <a:p>
-            <a:pPr marL="342900" indent="-342900">
-              <a:buAutoNum type="arabicPeriod"/>
-            </a:pPr>
-            <a:r>
-              <a:rPr lang="en-US" dirty="0"/>
-              <a:t>Tidy Data (wide vs long format of data)</a:t>
-            </a:r>
-          </a:p>
-          <a:p>
-            <a:pPr marL="342900" indent="-342900">
-              <a:buAutoNum type="arabicPeriod"/>
-            </a:pPr>
-            <a:r>
-              <a:rPr lang="en-US" dirty="0"/>
-              <a:t>Plotting</a:t>
-            </a:r>
-          </a:p>
-          <a:p>
-            <a:pPr marL="342900" indent="-342900">
-              <a:buAutoNum type="arabicPeriod"/>
-            </a:pPr>
-            <a:r>
-              <a:rPr lang="en-US" dirty="0"/>
-              <a:t>Merging and joining (relational data)</a:t>
-            </a:r>
-          </a:p>
-          <a:p>
-            <a:endParaRPr lang="en-US" dirty="0"/>
-          </a:p>
-        </p:txBody>
-      </p:sp>
-      <p:sp>
-        <p:nvSpPr>
-          <p:cNvPr id="5" name="TextBox 4">
-            <a:extLst>
-              <a:ext uri="{FF2B5EF4-FFF2-40B4-BE49-F238E27FC236}">
-                <a16:creationId xmlns:a16="http://schemas.microsoft.com/office/drawing/2014/main" id="{AA3547BD-2FEA-61ED-BFCF-BE9424EC3D86}"/>
-              </a:ext>
-            </a:extLst>
-          </p:cNvPr>
-          <p:cNvSpPr txBox="1"/>
-          <p:nvPr/>
-        </p:nvSpPr>
-        <p:spPr>
-          <a:xfrm>
-            <a:off x="9405992" y="781595"/>
-            <a:ext cx="2208618" cy="369332"/>
-          </a:xfrm>
-          <a:prstGeom prst="rect">
-            <a:avLst/>
-          </a:prstGeom>
-          <a:noFill/>
-        </p:spPr>
-        <p:txBody>
-          <a:bodyPr wrap="none" rtlCol="0">
-            <a:spAutoFit/>
-          </a:bodyPr>
-          <a:lstStyle/>
-          <a:p>
-            <a:r>
-              <a:rPr lang="en-US" dirty="0"/>
-              <a:t>Access to class </a:t>
-            </a:r>
-            <a:r>
-              <a:rPr lang="en-US" dirty="0" err="1"/>
-              <a:t>github</a:t>
-            </a:r>
-            <a:endParaRPr lang="en-US" dirty="0"/>
-          </a:p>
-        </p:txBody>
-      </p:sp>
-    </p:spTree>
-    <p:extLst>
-      <p:ext uri="{BB962C8B-B14F-4D97-AF65-F5344CB8AC3E}">
-        <p14:creationId xmlns:p14="http://schemas.microsoft.com/office/powerpoint/2010/main" val="3446459360"/>
-      </p:ext>
-    </p:extLst>
-  </p:cSld>
-  <p:clrMapOvr>
-    <a:masterClrMapping/>
-  </p:clrMapOvr>
-</p:sld>
-</file>
-
-<file path=ppt/slides/slide20.xml><?xml version="1.0" encoding="utf-8"?>
-<p:sld xmlns:a="http://schemas.openxmlformats.org/drawingml/2006/main" xmlns:r="http://schemas.openxmlformats.org/officeDocument/2006/relationships" xmlns:p="http://schemas.openxmlformats.org/presentationml/2006/main">
-  <p:cSld>
-    <p:spTree>
-      <p:nvGrpSpPr>
-        <p:cNvPr id="1" name=""/>
-        <p:cNvGrpSpPr/>
-        <p:nvPr/>
-      </p:nvGrpSpPr>
-      <p:grpSpPr>
-        <a:xfrm>
-          <a:off x="0" y="0"/>
-          <a:ext cx="0" cy="0"/>
-          <a:chOff x="0" y="0"/>
-          <a:chExt cx="0" cy="0"/>
-        </a:xfrm>
-      </p:grpSpPr>
       <p:pic>
         <p:nvPicPr>
           <p:cNvPr id="2" name="Picture 1">
@@ -7164,7 +3966,7 @@
 </p:sld>
 </file>
 
-<file path=ppt/slides/slide21.xml><?xml version="1.0" encoding="utf-8"?>
+<file path=ppt/slides/slide11.xml><?xml version="1.0" encoding="utf-8"?>
 <p:sld xmlns:a="http://schemas.openxmlformats.org/drawingml/2006/main" xmlns:r="http://schemas.openxmlformats.org/officeDocument/2006/relationships" xmlns:p="http://schemas.openxmlformats.org/presentationml/2006/main">
   <p:cSld>
     <p:spTree>
@@ -7227,7 +4029,7 @@
           </a:ln>
           <a:extLst>
             <a:ext uri="{C572A759-6A51-4108-AA02-DFA0A04FC94B}">
-              <ma14:wrappingTextBoxFlag xmlns="" xmlns:m="http://schemas.openxmlformats.org/officeDocument/2006/math" xmlns:a14="http://schemas.microsoft.com/office/drawing/2010/main" xmlns:ma14="http://schemas.microsoft.com/office/mac/drawingml/2011/main" val="1"/>
+              <ma14:wrappingTextBoxFlag xmlns:ma14="http://schemas.microsoft.com/office/mac/drawingml/2011/main" xmlns:a14="http://schemas.microsoft.com/office/drawing/2010/main" xmlns:m="http://schemas.openxmlformats.org/officeDocument/2006/math" xmlns="" val="1"/>
             </a:ext>
           </a:extLst>
         </p:spPr>
@@ -7263,7 +4065,7 @@
           </a:ln>
           <a:extLst>
             <a:ext uri="{C572A759-6A51-4108-AA02-DFA0A04FC94B}">
-              <ma14:wrappingTextBoxFlag xmlns="" xmlns:m="http://schemas.openxmlformats.org/officeDocument/2006/math" xmlns:a14="http://schemas.microsoft.com/office/drawing/2010/main" xmlns:ma14="http://schemas.microsoft.com/office/mac/drawingml/2011/main" val="1"/>
+              <ma14:wrappingTextBoxFlag xmlns:ma14="http://schemas.microsoft.com/office/mac/drawingml/2011/main" xmlns:a14="http://schemas.microsoft.com/office/drawing/2010/main" xmlns:m="http://schemas.openxmlformats.org/officeDocument/2006/math" xmlns="" val="1"/>
             </a:ext>
           </a:extLst>
         </p:spPr>
@@ -7337,7 +4139,7 @@
           </a:ln>
           <a:extLst>
             <a:ext uri="{C572A759-6A51-4108-AA02-DFA0A04FC94B}">
-              <ma14:wrappingTextBoxFlag xmlns="" xmlns:m="http://schemas.openxmlformats.org/officeDocument/2006/math" xmlns:a14="http://schemas.microsoft.com/office/drawing/2010/main" xmlns:ma14="http://schemas.microsoft.com/office/mac/drawingml/2011/main" val="1"/>
+              <ma14:wrappingTextBoxFlag xmlns:ma14="http://schemas.microsoft.com/office/mac/drawingml/2011/main" xmlns:a14="http://schemas.microsoft.com/office/drawing/2010/main" xmlns:m="http://schemas.openxmlformats.org/officeDocument/2006/math" xmlns="" val="1"/>
             </a:ext>
           </a:extLst>
         </p:spPr>
@@ -7427,7 +4229,7 @@
           </a:ln>
           <a:extLst>
             <a:ext uri="{C572A759-6A51-4108-AA02-DFA0A04FC94B}">
-              <ma14:wrappingTextBoxFlag xmlns="" xmlns:m="http://schemas.openxmlformats.org/officeDocument/2006/math" xmlns:a14="http://schemas.microsoft.com/office/drawing/2010/main" xmlns:ma14="http://schemas.microsoft.com/office/mac/drawingml/2011/main" val="1"/>
+              <ma14:wrappingTextBoxFlag xmlns:ma14="http://schemas.microsoft.com/office/mac/drawingml/2011/main" xmlns:a14="http://schemas.microsoft.com/office/drawing/2010/main" xmlns:m="http://schemas.openxmlformats.org/officeDocument/2006/math" xmlns="" val="1"/>
             </a:ext>
           </a:extLst>
         </p:spPr>
@@ -7524,7 +4326,7 @@
             <a:effectLst/>
             <a:extLst>
               <a:ext uri="{C572A759-6A51-4108-AA02-DFA0A04FC94B}">
-                <ma14:wrappingTextBoxFlag xmlns="" xmlns:m="http://schemas.openxmlformats.org/officeDocument/2006/math" xmlns:a14="http://schemas.microsoft.com/office/drawing/2010/main" xmlns:ma14="http://schemas.microsoft.com/office/mac/drawingml/2011/main" val="1"/>
+                <ma14:wrappingTextBoxFlag xmlns:ma14="http://schemas.microsoft.com/office/mac/drawingml/2011/main" xmlns:a14="http://schemas.microsoft.com/office/drawing/2010/main" xmlns:m="http://schemas.openxmlformats.org/officeDocument/2006/math" xmlns="" val="1"/>
               </a:ext>
             </a:extLst>
           </p:spPr>
@@ -7598,7 +4400,7 @@
 </p:sld>
 </file>
 
-<file path=ppt/slides/slide22.xml><?xml version="1.0" encoding="utf-8"?>
+<file path=ppt/slides/slide12.xml><?xml version="1.0" encoding="utf-8"?>
 <p:sld xmlns:a="http://schemas.openxmlformats.org/drawingml/2006/main" xmlns:r="http://schemas.openxmlformats.org/officeDocument/2006/relationships" xmlns:p="http://schemas.openxmlformats.org/presentationml/2006/main">
   <p:cSld>
     <p:spTree>
@@ -7737,7 +4539,7 @@
 </p:sld>
 </file>
 
-<file path=ppt/slides/slide23.xml><?xml version="1.0" encoding="utf-8"?>
+<file path=ppt/slides/slide13.xml><?xml version="1.0" encoding="utf-8"?>
 <p:sld xmlns:a="http://schemas.openxmlformats.org/drawingml/2006/main" xmlns:r="http://schemas.openxmlformats.org/officeDocument/2006/relationships" xmlns:p="http://schemas.openxmlformats.org/presentationml/2006/main">
   <p:cSld>
     <p:spTree>
@@ -7906,7 +4708,7 @@
 </p:sld>
 </file>
 
-<file path=ppt/slides/slide24.xml><?xml version="1.0" encoding="utf-8"?>
+<file path=ppt/slides/slide14.xml><?xml version="1.0" encoding="utf-8"?>
 <p:sld xmlns:a="http://schemas.openxmlformats.org/drawingml/2006/main" xmlns:r="http://schemas.openxmlformats.org/officeDocument/2006/relationships" xmlns:p="http://schemas.openxmlformats.org/presentationml/2006/main">
   <p:cSld>
     <p:spTree>
@@ -8277,7 +5079,7 @@
 </p:sld>
 </file>
 
-<file path=ppt/slides/slide25.xml><?xml version="1.0" encoding="utf-8"?>
+<file path=ppt/slides/slide15.xml><?xml version="1.0" encoding="utf-8"?>
 <p:sld xmlns:a="http://schemas.openxmlformats.org/drawingml/2006/main" xmlns:r="http://schemas.openxmlformats.org/officeDocument/2006/relationships" xmlns:p="http://schemas.openxmlformats.org/presentationml/2006/main">
   <p:cSld>
     <p:spTree>
@@ -8402,7 +5204,7 @@
 </p:sld>
 </file>
 
-<file path=ppt/slides/slide26.xml><?xml version="1.0" encoding="utf-8"?>
+<file path=ppt/slides/slide16.xml><?xml version="1.0" encoding="utf-8"?>
 <p:sld xmlns:a="http://schemas.openxmlformats.org/drawingml/2006/main" xmlns:r="http://schemas.openxmlformats.org/officeDocument/2006/relationships" xmlns:p="http://schemas.openxmlformats.org/presentationml/2006/main">
   <p:cSld>
     <p:spTree>
@@ -8645,7 +5447,7 @@
 </p:sld>
 </file>
 
-<file path=ppt/slides/slide27.xml><?xml version="1.0" encoding="utf-8"?>
+<file path=ppt/slides/slide17.xml><?xml version="1.0" encoding="utf-8"?>
 <p:sld xmlns:a="http://schemas.openxmlformats.org/drawingml/2006/main" xmlns:r="http://schemas.openxmlformats.org/officeDocument/2006/relationships" xmlns:p="http://schemas.openxmlformats.org/presentationml/2006/main">
   <p:cSld>
     <p:spTree>
@@ -8729,6 +5531,161 @@
     <p:extLst>
       <p:ext uri="{BB962C8B-B14F-4D97-AF65-F5344CB8AC3E}">
         <p14:creationId xmlns:p14="http://schemas.microsoft.com/office/powerpoint/2010/main" val="598731948"/>
+      </p:ext>
+    </p:extLst>
+  </p:cSld>
+  <p:clrMapOvr>
+    <a:masterClrMapping/>
+  </p:clrMapOvr>
+</p:sld>
+</file>
+
+<file path=ppt/slides/slide2.xml><?xml version="1.0" encoding="utf-8"?>
+<p:sld xmlns:a="http://schemas.openxmlformats.org/drawingml/2006/main" xmlns:r="http://schemas.openxmlformats.org/officeDocument/2006/relationships" xmlns:p="http://schemas.openxmlformats.org/presentationml/2006/main">
+  <p:cSld>
+    <p:spTree>
+      <p:nvGrpSpPr>
+        <p:cNvPr id="1" name=""/>
+        <p:cNvGrpSpPr/>
+        <p:nvPr/>
+      </p:nvGrpSpPr>
+      <p:grpSpPr>
+        <a:xfrm>
+          <a:off x="0" y="0"/>
+          <a:ext cx="0" cy="0"/>
+          <a:chOff x="0" y="0"/>
+          <a:chExt cx="0" cy="0"/>
+        </a:xfrm>
+      </p:grpSpPr>
+      <p:sp>
+        <p:nvSpPr>
+          <p:cNvPr id="2" name="Title 1">
+            <a:extLst>
+              <a:ext uri="{FF2B5EF4-FFF2-40B4-BE49-F238E27FC236}">
+                <a16:creationId xmlns:a16="http://schemas.microsoft.com/office/drawing/2014/main" id="{B4EB949B-90AB-DC09-FBC4-4B96BF4EB896}"/>
+              </a:ext>
+            </a:extLst>
+          </p:cNvPr>
+          <p:cNvSpPr>
+            <a:spLocks noGrp="1"/>
+          </p:cNvSpPr>
+          <p:nvPr>
+            <p:ph type="title"/>
+          </p:nvPr>
+        </p:nvSpPr>
+        <p:spPr/>
+        <p:txBody>
+          <a:bodyPr/>
+          <a:lstStyle/>
+          <a:p>
+            <a:r>
+              <a:rPr lang="en-US" dirty="0"/>
+              <a:t>Recap from last time</a:t>
+            </a:r>
+          </a:p>
+        </p:txBody>
+      </p:sp>
+      <p:sp>
+        <p:nvSpPr>
+          <p:cNvPr id="3" name="Content Placeholder 2">
+            <a:extLst>
+              <a:ext uri="{FF2B5EF4-FFF2-40B4-BE49-F238E27FC236}">
+                <a16:creationId xmlns:a16="http://schemas.microsoft.com/office/drawing/2014/main" id="{EA800592-07B8-8124-CD74-D900599B8C4F}"/>
+              </a:ext>
+            </a:extLst>
+          </p:cNvPr>
+          <p:cNvSpPr>
+            <a:spLocks noGrp="1"/>
+          </p:cNvSpPr>
+          <p:nvPr>
+            <p:ph idx="1"/>
+          </p:nvPr>
+        </p:nvSpPr>
+        <p:spPr>
+          <a:xfrm>
+            <a:off x="730322" y="1887877"/>
+            <a:ext cx="10515600" cy="4351338"/>
+          </a:xfrm>
+        </p:spPr>
+        <p:txBody>
+          <a:bodyPr/>
+          <a:lstStyle/>
+          <a:p>
+            <a:pPr marL="342900" indent="-342900">
+              <a:buAutoNum type="arabicPeriod"/>
+            </a:pPr>
+            <a:r>
+              <a:rPr lang="en-US" dirty="0"/>
+              <a:t>Tidy Data (wide vs long format of data)</a:t>
+            </a:r>
+          </a:p>
+          <a:p>
+            <a:pPr marL="342900" indent="-342900">
+              <a:buAutoNum type="arabicPeriod"/>
+            </a:pPr>
+            <a:r>
+              <a:rPr lang="en-US" dirty="0"/>
+              <a:t>Plotting</a:t>
+            </a:r>
+          </a:p>
+          <a:p>
+            <a:pPr marL="342900" indent="-342900">
+              <a:buAutoNum type="arabicPeriod"/>
+            </a:pPr>
+            <a:r>
+              <a:rPr lang="en-US" dirty="0"/>
+              <a:t>Merging and joining (relational data)</a:t>
+            </a:r>
+          </a:p>
+          <a:p>
+            <a:endParaRPr lang="en-US" dirty="0"/>
+          </a:p>
+        </p:txBody>
+      </p:sp>
+      <p:sp>
+        <p:nvSpPr>
+          <p:cNvPr id="5" name="TextBox 4">
+            <a:extLst>
+              <a:ext uri="{FF2B5EF4-FFF2-40B4-BE49-F238E27FC236}">
+                <a16:creationId xmlns:a16="http://schemas.microsoft.com/office/drawing/2014/main" id="{AA3547BD-2FEA-61ED-BFCF-BE9424EC3D86}"/>
+              </a:ext>
+            </a:extLst>
+          </p:cNvPr>
+          <p:cNvSpPr txBox="1"/>
+          <p:nvPr/>
+        </p:nvSpPr>
+        <p:spPr>
+          <a:xfrm>
+            <a:off x="9405992" y="781595"/>
+            <a:ext cx="2208618" cy="369332"/>
+          </a:xfrm>
+          <a:prstGeom prst="rect">
+            <a:avLst/>
+          </a:prstGeom>
+          <a:noFill/>
+        </p:spPr>
+        <p:txBody>
+          <a:bodyPr wrap="none" rtlCol="0">
+            <a:spAutoFit/>
+          </a:bodyPr>
+          <a:lstStyle/>
+          <a:p>
+            <a:r>
+              <a:rPr lang="en-US" dirty="0"/>
+              <a:t>Access to class </a:t>
+            </a:r>
+            <a:r>
+              <a:rPr lang="en-US" dirty="0" err="1"/>
+              <a:t>github</a:t>
+            </a:r>
+            <a:endParaRPr lang="en-US" dirty="0"/>
+          </a:p>
+        </p:txBody>
+      </p:sp>
+    </p:spTree>
+    <p:extLst>
+      <p:ext uri="{BB962C8B-B14F-4D97-AF65-F5344CB8AC3E}">
+        <p14:creationId xmlns:p14="http://schemas.microsoft.com/office/powerpoint/2010/main" val="3446459360"/>
       </p:ext>
     </p:extLst>
   </p:cSld>
@@ -8757,10 +5714,10 @@
       </p:grpSpPr>
       <p:sp>
         <p:nvSpPr>
-          <p:cNvPr id="4" name="TextBox 3">
-            <a:extLst>
-              <a:ext uri="{FF2B5EF4-FFF2-40B4-BE49-F238E27FC236}">
-                <a16:creationId xmlns:a16="http://schemas.microsoft.com/office/drawing/2014/main" id="{37920EDF-7F3F-976E-0B84-4F089F4D345F}"/>
+          <p:cNvPr id="2" name="TextBox 1">
+            <a:extLst>
+              <a:ext uri="{FF2B5EF4-FFF2-40B4-BE49-F238E27FC236}">
+                <a16:creationId xmlns:a16="http://schemas.microsoft.com/office/drawing/2014/main" id="{69686441-1642-EEE4-7FB0-599CD21B8029}"/>
               </a:ext>
             </a:extLst>
           </p:cNvPr>
@@ -8769,8 +5726,8 @@
         </p:nvSpPr>
         <p:spPr>
           <a:xfrm>
-            <a:off x="2873576" y="1294611"/>
-            <a:ext cx="5578867" cy="646331"/>
+            <a:off x="3434080" y="880533"/>
+            <a:ext cx="6035040" cy="369332"/>
           </a:xfrm>
           <a:prstGeom prst="rect">
             <a:avLst/>
@@ -8785,17 +5742,17 @@
           <a:p>
             <a:r>
               <a:rPr lang="en-US" dirty="0"/>
-              <a:t>Additional fun data set in honor of Taylor Swift album release day</a:t>
-            </a:r>
-          </a:p>
-        </p:txBody>
-      </p:sp>
-      <p:sp>
-        <p:nvSpPr>
-          <p:cNvPr id="5" name="TextBox 4">
-            <a:extLst>
-              <a:ext uri="{FF2B5EF4-FFF2-40B4-BE49-F238E27FC236}">
-                <a16:creationId xmlns:a16="http://schemas.microsoft.com/office/drawing/2014/main" id="{EA22F3BC-18E6-491F-9A68-5063F382670C}"/>
+              <a:t>Today’s Goals</a:t>
+            </a:r>
+          </a:p>
+        </p:txBody>
+      </p:sp>
+      <p:sp>
+        <p:nvSpPr>
+          <p:cNvPr id="3" name="TextBox 2">
+            <a:extLst>
+              <a:ext uri="{FF2B5EF4-FFF2-40B4-BE49-F238E27FC236}">
+                <a16:creationId xmlns:a16="http://schemas.microsoft.com/office/drawing/2014/main" id="{7C1CF691-BC8E-3FA6-A643-D01141636EDE}"/>
               </a:ext>
             </a:extLst>
           </p:cNvPr>
@@ -8804,75 +5761,8 @@
         </p:nvSpPr>
         <p:spPr>
           <a:xfrm>
-            <a:off x="2953407" y="1950351"/>
-            <a:ext cx="7370159" cy="369332"/>
-          </a:xfrm>
-          <a:prstGeom prst="rect">
-            <a:avLst/>
-          </a:prstGeom>
-          <a:noFill/>
-        </p:spPr>
-        <p:txBody>
-          <a:bodyPr wrap="none" rtlCol="0">
-            <a:spAutoFit/>
-          </a:bodyPr>
-          <a:lstStyle/>
-          <a:p>
-            <a:r>
-              <a:rPr lang="en-US" dirty="0"/>
-              <a:t>https://</a:t>
-            </a:r>
-            <a:r>
-              <a:rPr lang="en-US" dirty="0" err="1"/>
-              <a:t>www.kaggle.com</a:t>
-            </a:r>
-            <a:r>
-              <a:rPr lang="en-US" dirty="0"/>
-              <a:t>/datasets/</a:t>
-            </a:r>
-            <a:r>
-              <a:rPr lang="en-US" dirty="0" err="1"/>
-              <a:t>jarredpriester</a:t>
-            </a:r>
-            <a:r>
-              <a:rPr lang="en-US" dirty="0"/>
-              <a:t>/</a:t>
-            </a:r>
-            <a:r>
-              <a:rPr lang="en-US" dirty="0" err="1"/>
-              <a:t>taylor</a:t>
-            </a:r>
-            <a:r>
-              <a:rPr lang="en-US" dirty="0"/>
-              <a:t>-swift-</a:t>
-            </a:r>
-            <a:r>
-              <a:rPr lang="en-US" dirty="0" err="1"/>
-              <a:t>spotify</a:t>
-            </a:r>
-            <a:r>
-              <a:rPr lang="en-US" dirty="0"/>
-              <a:t>-dataset</a:t>
-            </a:r>
-          </a:p>
-        </p:txBody>
-      </p:sp>
-      <p:sp>
-        <p:nvSpPr>
-          <p:cNvPr id="6" name="TextBox 5">
-            <a:extLst>
-              <a:ext uri="{FF2B5EF4-FFF2-40B4-BE49-F238E27FC236}">
-                <a16:creationId xmlns:a16="http://schemas.microsoft.com/office/drawing/2014/main" id="{B7462C5C-6DC7-0E9E-2D5F-5E91FE2A5BDA}"/>
-              </a:ext>
-            </a:extLst>
-          </p:cNvPr>
-          <p:cNvSpPr txBox="1"/>
-          <p:nvPr/>
-        </p:nvSpPr>
-        <p:spPr>
-          <a:xfrm>
-            <a:off x="2953407" y="546538"/>
-            <a:ext cx="7704083" cy="369332"/>
+            <a:off x="3522133" y="1842347"/>
+            <a:ext cx="5730240" cy="3139321"/>
           </a:xfrm>
           <a:prstGeom prst="rect">
             <a:avLst/>
@@ -8885,63 +5775,100 @@
           </a:bodyPr>
           <a:lstStyle/>
           <a:p>
-            <a:r>
-              <a:rPr lang="en-US" dirty="0"/>
-              <a:t>Practice Time!</a:t>
-            </a:r>
-          </a:p>
-        </p:txBody>
-      </p:sp>
-      <p:sp>
-        <p:nvSpPr>
-          <p:cNvPr id="7" name="TextBox 6">
-            <a:extLst>
-              <a:ext uri="{FF2B5EF4-FFF2-40B4-BE49-F238E27FC236}">
-                <a16:creationId xmlns:a16="http://schemas.microsoft.com/office/drawing/2014/main" id="{4B1892A7-783E-E147-423E-58F7C5240868}"/>
-              </a:ext>
-            </a:extLst>
-          </p:cNvPr>
-          <p:cNvSpPr txBox="1"/>
-          <p:nvPr/>
-        </p:nvSpPr>
-        <p:spPr>
-          <a:xfrm>
-            <a:off x="1524000" y="3563008"/>
-            <a:ext cx="9461629" cy="646331"/>
-          </a:xfrm>
-          <a:prstGeom prst="rect">
-            <a:avLst/>
-          </a:prstGeom>
-          <a:noFill/>
-        </p:spPr>
-        <p:txBody>
-          <a:bodyPr wrap="none" rtlCol="0">
-            <a:spAutoFit/>
-          </a:bodyPr>
-          <a:lstStyle/>
-          <a:p>
-            <a:r>
-              <a:rPr lang="en-US" dirty="0"/>
-              <a:t>Open practice/</a:t>
-            </a:r>
-            <a:r>
-              <a:rPr lang="en-US" dirty="0" err="1"/>
-              <a:t>taylor_questions.R</a:t>
-            </a:r>
+            <a:pPr marL="342900" indent="-342900">
+              <a:buAutoNum type="arabicPeriod"/>
+            </a:pPr>
             <a:endParaRPr lang="en-US" dirty="0"/>
           </a:p>
           <a:p>
-            <a:r>
-              <a:rPr lang="en-US" dirty="0"/>
-              <a:t>Save as a new file name -&gt; this will hopefully avoid issues with pulling new files from the git account</a:t>
-            </a:r>
+            <a:pPr marL="342900" indent="-342900">
+              <a:buAutoNum type="arabicPeriod"/>
+            </a:pPr>
+            <a:r>
+              <a:rPr lang="en-US" dirty="0"/>
+              <a:t>Additional Plotting</a:t>
+            </a:r>
+          </a:p>
+          <a:p>
+            <a:pPr marL="342900" indent="-342900">
+              <a:buAutoNum type="arabicPeriod"/>
+            </a:pPr>
+            <a:r>
+              <a:rPr lang="en-US" dirty="0"/>
+              <a:t>Factors </a:t>
+            </a:r>
+          </a:p>
+          <a:p>
+            <a:pPr marL="342900" indent="-342900">
+              <a:buAutoNum type="arabicPeriod"/>
+            </a:pPr>
+            <a:r>
+              <a:rPr lang="en-US" dirty="0"/>
+              <a:t>Functions</a:t>
+            </a:r>
+          </a:p>
+          <a:p>
+            <a:pPr marL="342900" indent="-342900">
+              <a:buAutoNum type="arabicPeriod"/>
+            </a:pPr>
+            <a:r>
+              <a:rPr lang="en-US" dirty="0"/>
+              <a:t>Loops</a:t>
+            </a:r>
+          </a:p>
+          <a:p>
+            <a:pPr marL="342900" indent="-342900">
+              <a:buAutoNum type="arabicPeriod"/>
+            </a:pPr>
+            <a:r>
+              <a:rPr lang="en-US" dirty="0"/>
+              <a:t>Summarized experiment</a:t>
+            </a:r>
+          </a:p>
+          <a:p>
+            <a:pPr marL="342900" indent="-342900">
+              <a:buAutoNum type="arabicPeriod"/>
+            </a:pPr>
+            <a:r>
+              <a:rPr lang="en-US" dirty="0"/>
+              <a:t>Best practices</a:t>
+            </a:r>
+          </a:p>
+          <a:p>
+            <a:pPr marL="342900" indent="-342900">
+              <a:buFontTx/>
+              <a:buAutoNum type="arabicPeriod"/>
+            </a:pPr>
+            <a:r>
+              <a:rPr lang="en-US" dirty="0"/>
+              <a:t>Practice</a:t>
+            </a:r>
+          </a:p>
+          <a:p>
+            <a:pPr marL="342900" indent="-342900">
+              <a:buFontTx/>
+              <a:buAutoNum type="arabicPeriod"/>
+            </a:pPr>
+            <a:endParaRPr lang="en-US" dirty="0"/>
+          </a:p>
+          <a:p>
+            <a:pPr marL="342900" indent="-342900">
+              <a:buAutoNum type="arabicPeriod"/>
+            </a:pPr>
+            <a:endParaRPr lang="en-US" dirty="0"/>
+          </a:p>
+          <a:p>
+            <a:pPr marL="342900" indent="-342900">
+              <a:buAutoNum type="arabicPeriod"/>
+            </a:pPr>
+            <a:endParaRPr lang="en-US" dirty="0"/>
           </a:p>
         </p:txBody>
       </p:sp>
     </p:spTree>
     <p:extLst>
       <p:ext uri="{BB962C8B-B14F-4D97-AF65-F5344CB8AC3E}">
-        <p14:creationId xmlns:p14="http://schemas.microsoft.com/office/powerpoint/2010/main" val="6999025"/>
+        <p14:creationId xmlns:p14="http://schemas.microsoft.com/office/powerpoint/2010/main" val="1735636872"/>
       </p:ext>
     </p:extLst>
   </p:cSld>
@@ -8970,163 +5897,201 @@
       </p:grpSpPr>
       <p:sp>
         <p:nvSpPr>
-          <p:cNvPr id="2" name="TextBox 1">
-            <a:extLst>
-              <a:ext uri="{FF2B5EF4-FFF2-40B4-BE49-F238E27FC236}">
-                <a16:creationId xmlns:a16="http://schemas.microsoft.com/office/drawing/2014/main" id="{69686441-1642-EEE4-7FB0-599CD21B8029}"/>
-              </a:ext>
-            </a:extLst>
-          </p:cNvPr>
+          <p:cNvPr id="393" name="Functions"/>
           <p:cNvSpPr txBox="1"/>
           <p:nvPr/>
         </p:nvSpPr>
         <p:spPr>
           <a:xfrm>
-            <a:off x="3434080" y="880533"/>
-            <a:ext cx="6035040" cy="369332"/>
+            <a:off x="5399151" y="177130"/>
+            <a:ext cx="1402500" cy="420628"/>
           </a:xfrm>
           <a:prstGeom prst="rect">
             <a:avLst/>
           </a:prstGeom>
-          <a:noFill/>
-        </p:spPr>
-        <p:txBody>
-          <a:bodyPr wrap="square" rtlCol="0">
+          <a:ln w="12700">
+            <a:miter lim="400000"/>
+          </a:ln>
+          <a:extLst>
+            <a:ext uri="{C572A759-6A51-4108-AA02-DFA0A04FC94B}">
+              <ma14:wrappingTextBoxFlag xmlns="" xmlns:m="http://schemas.openxmlformats.org/officeDocument/2006/math" xmlns:a14="http://schemas.microsoft.com/office/drawing/2010/main" xmlns:ma14="http://schemas.microsoft.com/office/mac/drawingml/2011/main" val="1"/>
+            </a:ext>
+          </a:extLst>
+        </p:spPr>
+        <p:txBody>
+          <a:bodyPr wrap="none" lIns="25400" tIns="25400" rIns="25400" bIns="25400" anchor="ctr">
             <a:spAutoFit/>
           </a:bodyPr>
-          <a:lstStyle/>
-          <a:p>
-            <a:r>
-              <a:rPr lang="en-US" dirty="0"/>
-              <a:t>Today’s Goals</a:t>
-            </a:r>
-          </a:p>
-        </p:txBody>
-      </p:sp>
-      <p:sp>
-        <p:nvSpPr>
-          <p:cNvPr id="3" name="TextBox 2">
-            <a:extLst>
-              <a:ext uri="{FF2B5EF4-FFF2-40B4-BE49-F238E27FC236}">
-                <a16:creationId xmlns:a16="http://schemas.microsoft.com/office/drawing/2014/main" id="{7C1CF691-BC8E-3FA6-A643-D01141636EDE}"/>
-              </a:ext>
-            </a:extLst>
-          </p:cNvPr>
+          <a:lstStyle>
+            <a:lvl1pPr>
+              <a:defRPr sz="4800">
+                <a:latin typeface="Avenir Next Regular"/>
+                <a:ea typeface="Avenir Next Regular"/>
+                <a:cs typeface="Avenir Next Regular"/>
+                <a:sym typeface="Avenir Next Regular"/>
+              </a:defRPr>
+            </a:lvl1pPr>
+          </a:lstStyle>
+          <a:p>
+            <a:r>
+              <a:rPr sz="2400"/>
+              <a:t>Functions</a:t>
+            </a:r>
+          </a:p>
+        </p:txBody>
+      </p:sp>
+      <p:sp>
+        <p:nvSpPr>
+          <p:cNvPr id="395" name="-https://r4ds.had.co.nz/functions.html"/>
           <p:cNvSpPr txBox="1"/>
           <p:nvPr/>
         </p:nvSpPr>
         <p:spPr>
           <a:xfrm>
-            <a:off x="3522133" y="1842347"/>
-            <a:ext cx="5730240" cy="3139321"/>
+            <a:off x="9674735" y="6181098"/>
+            <a:ext cx="1888337" cy="189796"/>
           </a:xfrm>
           <a:prstGeom prst="rect">
             <a:avLst/>
           </a:prstGeom>
-          <a:noFill/>
-        </p:spPr>
-        <p:txBody>
-          <a:bodyPr wrap="square" rtlCol="0">
+          <a:ln w="12700">
+            <a:miter lim="400000"/>
+          </a:ln>
+          <a:extLst>
+            <a:ext uri="{C572A759-6A51-4108-AA02-DFA0A04FC94B}">
+              <ma14:wrappingTextBoxFlag xmlns="" xmlns:m="http://schemas.openxmlformats.org/officeDocument/2006/math" xmlns:a14="http://schemas.microsoft.com/office/drawing/2010/main" xmlns:ma14="http://schemas.microsoft.com/office/mac/drawingml/2011/main" val="1"/>
+            </a:ext>
+          </a:extLst>
+        </p:spPr>
+        <p:txBody>
+          <a:bodyPr wrap="none" lIns="25400" tIns="25400" rIns="25400" bIns="25400" anchor="ctr">
             <a:spAutoFit/>
           </a:bodyPr>
           <a:lstStyle/>
           <a:p>
-            <a:pPr marL="342900" indent="-342900">
-              <a:buAutoNum type="arabicPeriod"/>
+            <a:r>
+              <a:rPr sz="900" dirty="0"/>
+              <a:t> -https://r4ds.had.co.nz/</a:t>
+            </a:r>
+            <a:r>
+              <a:rPr sz="900" dirty="0" err="1"/>
+              <a:t>functions.html</a:t>
+            </a:r>
+            <a:endParaRPr sz="900" dirty="0"/>
+          </a:p>
+        </p:txBody>
+      </p:sp>
+      <p:sp>
+        <p:nvSpPr>
+          <p:cNvPr id="397" name="Any chunk of code you are going to reuse - can be built in or come with a package or user made…"/>
+          <p:cNvSpPr txBox="1"/>
+          <p:nvPr/>
+        </p:nvSpPr>
+        <p:spPr>
+          <a:xfrm>
+            <a:off x="518306" y="1276929"/>
+            <a:ext cx="6631765" cy="1159292"/>
+          </a:xfrm>
+          <a:prstGeom prst="rect">
+            <a:avLst/>
+          </a:prstGeom>
+          <a:ln w="12700">
+            <a:miter lim="400000"/>
+          </a:ln>
+          <a:extLst>
+            <a:ext uri="{C572A759-6A51-4108-AA02-DFA0A04FC94B}">
+              <ma14:wrappingTextBoxFlag xmlns="" xmlns:m="http://schemas.openxmlformats.org/officeDocument/2006/math" xmlns:a14="http://schemas.microsoft.com/office/drawing/2010/main" xmlns:ma14="http://schemas.microsoft.com/office/mac/drawingml/2011/main" val="1"/>
+            </a:ext>
+          </a:extLst>
+        </p:spPr>
+        <p:txBody>
+          <a:bodyPr wrap="square" lIns="25400" tIns="25400" rIns="25400" bIns="25400" anchor="ctr">
+            <a:spAutoFit/>
+          </a:bodyPr>
+          <a:lstStyle/>
+          <a:p>
+            <a:pPr marL="114300" indent="-114300">
+              <a:buSzPct val="100000"/>
+              <a:buChar char="•"/>
             </a:pPr>
-            <a:endParaRPr lang="en-US" dirty="0"/>
-          </a:p>
-          <a:p>
-            <a:pPr marL="342900" indent="-342900">
-              <a:buAutoNum type="arabicPeriod"/>
+            <a:r>
+              <a:rPr dirty="0"/>
+              <a:t>Any chunk of code you are going to reuse - can be built in or come with a package or user made</a:t>
+            </a:r>
+          </a:p>
+          <a:p>
+            <a:pPr marL="114300" indent="-114300">
+              <a:buSzPct val="100000"/>
+              <a:buChar char="•"/>
             </a:pPr>
             <a:r>
-              <a:rPr lang="en-US" dirty="0"/>
-              <a:t>Additional Plotting</a:t>
-            </a:r>
-          </a:p>
-          <a:p>
-            <a:pPr marL="342900" indent="-342900">
-              <a:buAutoNum type="arabicPeriod"/>
+              <a:rPr dirty="0"/>
+              <a:t>Can take 0 or more arguments</a:t>
+            </a:r>
+          </a:p>
+          <a:p>
+            <a:pPr marL="114300" indent="-114300">
+              <a:buSzPct val="100000"/>
+              <a:buChar char="•"/>
             </a:pPr>
             <a:r>
-              <a:rPr lang="en-US" dirty="0"/>
-              <a:t>Factors </a:t>
-            </a:r>
-          </a:p>
-          <a:p>
-            <a:pPr marL="342900" indent="-342900">
-              <a:buAutoNum type="arabicPeriod"/>
-            </a:pPr>
-            <a:r>
-              <a:rPr lang="en-US" dirty="0"/>
-              <a:t>Functions</a:t>
-            </a:r>
-          </a:p>
-          <a:p>
-            <a:pPr marL="342900" indent="-342900">
-              <a:buAutoNum type="arabicPeriod"/>
-            </a:pPr>
-            <a:r>
-              <a:rPr lang="en-US" dirty="0"/>
-              <a:t>Loops</a:t>
-            </a:r>
-          </a:p>
-          <a:p>
-            <a:pPr marL="342900" indent="-342900">
-              <a:buAutoNum type="arabicPeriod"/>
-            </a:pPr>
-            <a:r>
-              <a:rPr lang="en-US" dirty="0"/>
-              <a:t>Summarized experiment</a:t>
-            </a:r>
-          </a:p>
-          <a:p>
-            <a:pPr marL="342900" indent="-342900">
-              <a:buAutoNum type="arabicPeriod"/>
-            </a:pPr>
-            <a:r>
-              <a:rPr lang="en-US" dirty="0"/>
-              <a:t>Best practices</a:t>
-            </a:r>
-          </a:p>
-          <a:p>
-            <a:pPr marL="342900" indent="-342900">
-              <a:buFontTx/>
-              <a:buAutoNum type="arabicPeriod"/>
-            </a:pPr>
-            <a:r>
-              <a:rPr lang="en-US" dirty="0"/>
-              <a:t>Practice</a:t>
-            </a:r>
-          </a:p>
-          <a:p>
-            <a:pPr marL="342900" indent="-342900">
-              <a:buFontTx/>
-              <a:buAutoNum type="arabicPeriod"/>
-            </a:pPr>
-            <a:endParaRPr lang="en-US" dirty="0"/>
-          </a:p>
-          <a:p>
-            <a:pPr marL="342900" indent="-342900">
-              <a:buAutoNum type="arabicPeriod"/>
-            </a:pPr>
-            <a:endParaRPr lang="en-US" dirty="0"/>
-          </a:p>
-          <a:p>
-            <a:pPr marL="342900" indent="-342900">
-              <a:buAutoNum type="arabicPeriod"/>
-            </a:pPr>
-            <a:endParaRPr lang="en-US" dirty="0"/>
+              <a:rPr dirty="0"/>
+              <a:t>Can return some value(s) or objects</a:t>
+            </a:r>
+          </a:p>
+        </p:txBody>
+      </p:sp>
+      <p:sp>
+        <p:nvSpPr>
+          <p:cNvPr id="398" name="What are functions"/>
+          <p:cNvSpPr txBox="1"/>
+          <p:nvPr/>
+        </p:nvSpPr>
+        <p:spPr>
+          <a:xfrm>
+            <a:off x="518306" y="885933"/>
+            <a:ext cx="2018822" cy="328295"/>
+          </a:xfrm>
+          <a:prstGeom prst="rect">
+            <a:avLst/>
+          </a:prstGeom>
+          <a:ln w="12700">
+            <a:miter lim="400000"/>
+          </a:ln>
+          <a:extLst>
+            <a:ext uri="{C572A759-6A51-4108-AA02-DFA0A04FC94B}">
+              <ma14:wrappingTextBoxFlag xmlns="" xmlns:m="http://schemas.openxmlformats.org/officeDocument/2006/math" xmlns:a14="http://schemas.microsoft.com/office/drawing/2010/main" xmlns:ma14="http://schemas.microsoft.com/office/mac/drawingml/2011/main" val="1"/>
+            </a:ext>
+          </a:extLst>
+        </p:spPr>
+        <p:txBody>
+          <a:bodyPr wrap="none" lIns="25400" tIns="25400" rIns="25400" bIns="25400" anchor="ctr">
+            <a:spAutoFit/>
+          </a:bodyPr>
+          <a:lstStyle>
+            <a:lvl1pPr>
+              <a:defRPr sz="3600">
+                <a:solidFill>
+                  <a:schemeClr val="accent1">
+                    <a:lumOff val="-13575"/>
+                  </a:schemeClr>
+                </a:solidFill>
+                <a:latin typeface="Avenir Next Regular"/>
+                <a:ea typeface="Avenir Next Regular"/>
+                <a:cs typeface="Avenir Next Regular"/>
+                <a:sym typeface="Avenir Next Regular"/>
+              </a:defRPr>
+            </a:lvl1pPr>
+          </a:lstStyle>
+          <a:p>
+            <a:r>
+              <a:rPr sz="1800" dirty="0"/>
+              <a:t>What are functions</a:t>
+            </a:r>
           </a:p>
         </p:txBody>
       </p:sp>
     </p:spTree>
-    <p:extLst>
-      <p:ext uri="{BB962C8B-B14F-4D97-AF65-F5344CB8AC3E}">
-        <p14:creationId xmlns:p14="http://schemas.microsoft.com/office/powerpoint/2010/main" val="1735636872"/>
-      </p:ext>
-    </p:extLst>
   </p:cSld>
   <p:clrMapOvr>
     <a:masterClrMapping/>
@@ -9153,45 +6118,443 @@
       </p:grpSpPr>
       <p:sp>
         <p:nvSpPr>
-          <p:cNvPr id="2" name="TextBox 1">
-            <a:extLst>
-              <a:ext uri="{FF2B5EF4-FFF2-40B4-BE49-F238E27FC236}">
-                <a16:creationId xmlns:a16="http://schemas.microsoft.com/office/drawing/2014/main" id="{9B58B4FA-F21A-26DC-43DB-D2B51031D171}"/>
-              </a:ext>
-            </a:extLst>
-          </p:cNvPr>
+          <p:cNvPr id="393" name="Functions"/>
           <p:cNvSpPr txBox="1"/>
           <p:nvPr/>
         </p:nvSpPr>
         <p:spPr>
           <a:xfrm>
-            <a:off x="5392669" y="121871"/>
-            <a:ext cx="4775200" cy="369332"/>
+            <a:off x="5399151" y="177130"/>
+            <a:ext cx="1402500" cy="420628"/>
           </a:xfrm>
           <a:prstGeom prst="rect">
             <a:avLst/>
           </a:prstGeom>
-          <a:noFill/>
-        </p:spPr>
-        <p:txBody>
-          <a:bodyPr wrap="square" rtlCol="0">
+          <a:ln w="12700">
+            <a:miter lim="400000"/>
+          </a:ln>
+          <a:extLst>
+            <a:ext uri="{C572A759-6A51-4108-AA02-DFA0A04FC94B}">
+              <ma14:wrappingTextBoxFlag xmlns:ma14="http://schemas.microsoft.com/office/mac/drawingml/2011/main" xmlns:a14="http://schemas.microsoft.com/office/drawing/2010/main" xmlns:m="http://schemas.openxmlformats.org/officeDocument/2006/math" xmlns="" val="1"/>
+            </a:ext>
+          </a:extLst>
+        </p:spPr>
+        <p:txBody>
+          <a:bodyPr wrap="none" lIns="25400" tIns="25400" rIns="25400" bIns="25400" anchor="ctr">
             <a:spAutoFit/>
           </a:bodyPr>
-          <a:lstStyle/>
-          <a:p>
-            <a:r>
-              <a:rPr lang="en-US" dirty="0"/>
-              <a:t>Faceting</a:t>
+          <a:lstStyle>
+            <a:lvl1pPr>
+              <a:defRPr sz="4800">
+                <a:latin typeface="Avenir Next Regular"/>
+                <a:ea typeface="Avenir Next Regular"/>
+                <a:cs typeface="Avenir Next Regular"/>
+                <a:sym typeface="Avenir Next Regular"/>
+              </a:defRPr>
+            </a:lvl1pPr>
+          </a:lstStyle>
+          <a:p>
+            <a:r>
+              <a:rPr sz="2400"/>
+              <a:t>Functions</a:t>
+            </a:r>
+          </a:p>
+        </p:txBody>
+      </p:sp>
+      <p:sp>
+        <p:nvSpPr>
+          <p:cNvPr id="394" name="You can give a function an evocative name that makes your code easier to understand.…"/>
+          <p:cNvSpPr txBox="1"/>
+          <p:nvPr/>
+        </p:nvSpPr>
+        <p:spPr>
+          <a:xfrm>
+            <a:off x="227597" y="4444221"/>
+            <a:ext cx="9495292" cy="1867178"/>
+          </a:xfrm>
+          <a:prstGeom prst="rect">
+            <a:avLst/>
+          </a:prstGeom>
+          <a:ln w="12700">
+            <a:miter lim="400000"/>
+          </a:ln>
+          <a:extLst>
+            <a:ext uri="{C572A759-6A51-4108-AA02-DFA0A04FC94B}">
+              <ma14:wrappingTextBoxFlag xmlns:ma14="http://schemas.microsoft.com/office/mac/drawingml/2011/main" xmlns:a14="http://schemas.microsoft.com/office/drawing/2010/main" xmlns:m="http://schemas.openxmlformats.org/officeDocument/2006/math" xmlns="" val="1"/>
+            </a:ext>
+          </a:extLst>
+        </p:spPr>
+        <p:txBody>
+          <a:bodyPr wrap="none" lIns="25400" tIns="25400" rIns="25400" bIns="25400" anchor="ctr">
+            <a:spAutoFit/>
+          </a:bodyPr>
+          <a:lstStyle/>
+          <a:p>
+            <a:pPr marL="355600" indent="-285750" defTabSz="228600">
+              <a:spcBef>
+                <a:spcPts val="300"/>
+              </a:spcBef>
+              <a:buClr>
+                <a:srgbClr val="212529"/>
+              </a:buClr>
+              <a:buSzPct val="100000"/>
+              <a:buFont typeface="Arial" panose="020B0604020202020204" pitchFamily="34" charset="0"/>
+              <a:buChar char="•"/>
+              <a:defRPr>
+                <a:solidFill>
+                  <a:srgbClr val="212529"/>
+                </a:solidFill>
+                <a:latin typeface="Avenir Next Regular"/>
+                <a:ea typeface="Avenir Next Regular"/>
+                <a:cs typeface="Avenir Next Regular"/>
+                <a:sym typeface="Avenir Next Regular"/>
+              </a:defRPr>
+            </a:pPr>
+            <a:r>
+              <a:rPr lang="en-US" dirty="0"/>
+              <a:t>Time savings</a:t>
+            </a:r>
+          </a:p>
+          <a:p>
+            <a:pPr marL="355600" indent="-285750" defTabSz="228600">
+              <a:spcBef>
+                <a:spcPts val="300"/>
+              </a:spcBef>
+              <a:buClr>
+                <a:srgbClr val="212529"/>
+              </a:buClr>
+              <a:buSzPct val="100000"/>
+              <a:buFont typeface="Arial" panose="020B0604020202020204" pitchFamily="34" charset="0"/>
+              <a:buChar char="•"/>
+              <a:defRPr>
+                <a:solidFill>
+                  <a:srgbClr val="212529"/>
+                </a:solidFill>
+                <a:latin typeface="Avenir Next Regular"/>
+                <a:ea typeface="Avenir Next Regular"/>
+                <a:cs typeface="Avenir Next Regular"/>
+                <a:sym typeface="Avenir Next Regular"/>
+              </a:defRPr>
+            </a:pPr>
+            <a:r>
+              <a:rPr dirty="0"/>
+              <a:t>You can give a functi</a:t>
+            </a:r>
+            <a:r>
+              <a:rPr lang="en-US" dirty="0"/>
+              <a:t>o</a:t>
+            </a:r>
+            <a:r>
+              <a:rPr dirty="0"/>
+              <a:t>n a </a:t>
+            </a:r>
+            <a:r>
+              <a:rPr lang="en-US" dirty="0"/>
+              <a:t>descriptive</a:t>
+            </a:r>
+            <a:r>
+              <a:rPr dirty="0"/>
+              <a:t> name that makes your code easier to understand.</a:t>
+            </a:r>
+          </a:p>
+          <a:p>
+            <a:pPr marL="355600" indent="-285750" defTabSz="228600">
+              <a:spcBef>
+                <a:spcPts val="300"/>
+              </a:spcBef>
+              <a:buClr>
+                <a:srgbClr val="212529"/>
+              </a:buClr>
+              <a:buSzPct val="100000"/>
+              <a:buFont typeface="Arial" panose="020B0604020202020204" pitchFamily="34" charset="0"/>
+              <a:buChar char="•"/>
+              <a:defRPr>
+                <a:solidFill>
+                  <a:srgbClr val="212529"/>
+                </a:solidFill>
+                <a:latin typeface="Avenir Next Regular"/>
+                <a:ea typeface="Avenir Next Regular"/>
+                <a:cs typeface="Avenir Next Regular"/>
+                <a:sym typeface="Avenir Next Regular"/>
+              </a:defRPr>
+            </a:pPr>
+            <a:r>
+              <a:rPr dirty="0"/>
+              <a:t>As requirements change, you only n</a:t>
+            </a:r>
+            <a:r>
+              <a:rPr lang="en-US" dirty="0"/>
+              <a:t>e</a:t>
+            </a:r>
+            <a:r>
+              <a:rPr dirty="0"/>
+              <a:t>ed to update code in one place, instead of many.</a:t>
+            </a:r>
+          </a:p>
+          <a:p>
+            <a:pPr marL="355600" indent="-285750" defTabSz="228600">
+              <a:spcBef>
+                <a:spcPts val="300"/>
+              </a:spcBef>
+              <a:buClr>
+                <a:srgbClr val="212529"/>
+              </a:buClr>
+              <a:buSzPct val="100000"/>
+              <a:buFont typeface="Arial" panose="020B0604020202020204" pitchFamily="34" charset="0"/>
+              <a:buChar char="•"/>
+              <a:defRPr>
+                <a:solidFill>
+                  <a:srgbClr val="212529"/>
+                </a:solidFill>
+                <a:latin typeface="Avenir Next Regular"/>
+                <a:ea typeface="Avenir Next Regular"/>
+                <a:cs typeface="Avenir Next Regular"/>
+                <a:sym typeface="Avenir Next Regular"/>
+              </a:defRPr>
+            </a:pPr>
+            <a:r>
+              <a:rPr dirty="0"/>
+              <a:t>You eliminate the chance of making incidental mistakes when you copy and paste </a:t>
+            </a:r>
+            <a:endParaRPr lang="en-US" dirty="0"/>
+          </a:p>
+          <a:p>
+            <a:pPr marL="527050" lvl="1" defTabSz="228600">
+              <a:spcBef>
+                <a:spcPts val="300"/>
+              </a:spcBef>
+              <a:buClr>
+                <a:srgbClr val="212529"/>
+              </a:buClr>
+              <a:buSzPct val="100000"/>
+              <a:defRPr>
+                <a:solidFill>
+                  <a:srgbClr val="212529"/>
+                </a:solidFill>
+                <a:latin typeface="Avenir Next Regular"/>
+                <a:ea typeface="Avenir Next Regular"/>
+                <a:cs typeface="Avenir Next Regular"/>
+                <a:sym typeface="Avenir Next Regular"/>
+              </a:defRPr>
+            </a:pPr>
+            <a:r>
+              <a:rPr dirty="0"/>
+              <a:t>(i.e. updating a variable name in one place, but not in another).</a:t>
+            </a:r>
+            <a:br>
+              <a:rPr dirty="0"/>
+            </a:br>
+            <a:endParaRPr dirty="0"/>
+          </a:p>
+        </p:txBody>
+      </p:sp>
+      <p:sp>
+        <p:nvSpPr>
+          <p:cNvPr id="395" name="-https://r4ds.had.co.nz/functions.html"/>
+          <p:cNvSpPr txBox="1"/>
+          <p:nvPr/>
+        </p:nvSpPr>
+        <p:spPr>
+          <a:xfrm>
+            <a:off x="9674735" y="6181098"/>
+            <a:ext cx="1888337" cy="189796"/>
+          </a:xfrm>
+          <a:prstGeom prst="rect">
+            <a:avLst/>
+          </a:prstGeom>
+          <a:ln w="12700">
+            <a:miter lim="400000"/>
+          </a:ln>
+          <a:extLst>
+            <a:ext uri="{C572A759-6A51-4108-AA02-DFA0A04FC94B}">
+              <ma14:wrappingTextBoxFlag xmlns:ma14="http://schemas.microsoft.com/office/mac/drawingml/2011/main" xmlns:a14="http://schemas.microsoft.com/office/drawing/2010/main" xmlns:m="http://schemas.openxmlformats.org/officeDocument/2006/math" xmlns="" val="1"/>
+            </a:ext>
+          </a:extLst>
+        </p:spPr>
+        <p:txBody>
+          <a:bodyPr wrap="none" lIns="25400" tIns="25400" rIns="25400" bIns="25400" anchor="ctr">
+            <a:spAutoFit/>
+          </a:bodyPr>
+          <a:lstStyle/>
+          <a:p>
+            <a:r>
+              <a:rPr sz="900" dirty="0"/>
+              <a:t> -https://r4ds.had.co.nz/</a:t>
+            </a:r>
+            <a:r>
+              <a:rPr sz="900" dirty="0" err="1"/>
+              <a:t>functions.html</a:t>
+            </a:r>
+            <a:endParaRPr sz="900" dirty="0"/>
+          </a:p>
+        </p:txBody>
+      </p:sp>
+      <p:sp>
+        <p:nvSpPr>
+          <p:cNvPr id="396" name="Reasons to make a new function"/>
+          <p:cNvSpPr txBox="1"/>
+          <p:nvPr/>
+        </p:nvSpPr>
+        <p:spPr>
+          <a:xfrm>
+            <a:off x="417099" y="4093485"/>
+            <a:ext cx="3417089" cy="328295"/>
+          </a:xfrm>
+          <a:prstGeom prst="rect">
+            <a:avLst/>
+          </a:prstGeom>
+          <a:ln w="12700">
+            <a:miter lim="400000"/>
+          </a:ln>
+          <a:extLst>
+            <a:ext uri="{C572A759-6A51-4108-AA02-DFA0A04FC94B}">
+              <ma14:wrappingTextBoxFlag xmlns:ma14="http://schemas.microsoft.com/office/mac/drawingml/2011/main" xmlns:a14="http://schemas.microsoft.com/office/drawing/2010/main" xmlns:m="http://schemas.openxmlformats.org/officeDocument/2006/math" xmlns="" val="1"/>
+            </a:ext>
+          </a:extLst>
+        </p:spPr>
+        <p:txBody>
+          <a:bodyPr wrap="none" lIns="25400" tIns="25400" rIns="25400" bIns="25400" anchor="ctr">
+            <a:spAutoFit/>
+          </a:bodyPr>
+          <a:lstStyle>
+            <a:lvl1pPr>
+              <a:defRPr sz="3600">
+                <a:solidFill>
+                  <a:schemeClr val="accent1">
+                    <a:lumOff val="-13575"/>
+                  </a:schemeClr>
+                </a:solidFill>
+                <a:latin typeface="Avenir Next Regular"/>
+                <a:ea typeface="Avenir Next Regular"/>
+                <a:cs typeface="Avenir Next Regular"/>
+                <a:sym typeface="Avenir Next Regular"/>
+              </a:defRPr>
+            </a:lvl1pPr>
+          </a:lstStyle>
+          <a:p>
+            <a:r>
+              <a:rPr sz="1800" dirty="0"/>
+              <a:t>Reasons to make a new function</a:t>
+            </a:r>
+          </a:p>
+        </p:txBody>
+      </p:sp>
+      <p:sp>
+        <p:nvSpPr>
+          <p:cNvPr id="397" name="Any chunk of code you are going to reuse - can be built in or come with a package or user made…"/>
+          <p:cNvSpPr txBox="1"/>
+          <p:nvPr/>
+        </p:nvSpPr>
+        <p:spPr>
+          <a:xfrm>
+            <a:off x="518306" y="1276929"/>
+            <a:ext cx="6631765" cy="1159292"/>
+          </a:xfrm>
+          <a:prstGeom prst="rect">
+            <a:avLst/>
+          </a:prstGeom>
+          <a:ln w="12700">
+            <a:miter lim="400000"/>
+          </a:ln>
+          <a:extLst>
+            <a:ext uri="{C572A759-6A51-4108-AA02-DFA0A04FC94B}">
+              <ma14:wrappingTextBoxFlag xmlns:ma14="http://schemas.microsoft.com/office/mac/drawingml/2011/main" xmlns:a14="http://schemas.microsoft.com/office/drawing/2010/main" xmlns:m="http://schemas.openxmlformats.org/officeDocument/2006/math" xmlns="" val="1"/>
+            </a:ext>
+          </a:extLst>
+        </p:spPr>
+        <p:txBody>
+          <a:bodyPr wrap="square" lIns="25400" tIns="25400" rIns="25400" bIns="25400" anchor="ctr">
+            <a:spAutoFit/>
+          </a:bodyPr>
+          <a:lstStyle/>
+          <a:p>
+            <a:pPr marL="114300" indent="-114300">
+              <a:buSzPct val="100000"/>
+              <a:buChar char="•"/>
+            </a:pPr>
+            <a:r>
+              <a:rPr dirty="0"/>
+              <a:t>Any chunk of code you are going to reuse - can be built in or come with a package or user made</a:t>
+            </a:r>
+          </a:p>
+          <a:p>
+            <a:pPr marL="114300" indent="-114300">
+              <a:buSzPct val="100000"/>
+              <a:buChar char="•"/>
+            </a:pPr>
+            <a:r>
+              <a:rPr dirty="0"/>
+              <a:t>Can take 0 or more arguments</a:t>
+            </a:r>
+          </a:p>
+          <a:p>
+            <a:pPr marL="114300" indent="-114300">
+              <a:buSzPct val="100000"/>
+              <a:buChar char="•"/>
+            </a:pPr>
+            <a:r>
+              <a:rPr dirty="0"/>
+              <a:t>Can return some value(s) or objects</a:t>
+            </a:r>
+          </a:p>
+        </p:txBody>
+      </p:sp>
+      <p:sp>
+        <p:nvSpPr>
+          <p:cNvPr id="398" name="What are functions"/>
+          <p:cNvSpPr txBox="1"/>
+          <p:nvPr/>
+        </p:nvSpPr>
+        <p:spPr>
+          <a:xfrm>
+            <a:off x="518306" y="885933"/>
+            <a:ext cx="2018822" cy="328295"/>
+          </a:xfrm>
+          <a:prstGeom prst="rect">
+            <a:avLst/>
+          </a:prstGeom>
+          <a:ln w="12700">
+            <a:miter lim="400000"/>
+          </a:ln>
+          <a:extLst>
+            <a:ext uri="{C572A759-6A51-4108-AA02-DFA0A04FC94B}">
+              <ma14:wrappingTextBoxFlag xmlns:ma14="http://schemas.microsoft.com/office/mac/drawingml/2011/main" xmlns:a14="http://schemas.microsoft.com/office/drawing/2010/main" xmlns:m="http://schemas.openxmlformats.org/officeDocument/2006/math" xmlns="" val="1"/>
+            </a:ext>
+          </a:extLst>
+        </p:spPr>
+        <p:txBody>
+          <a:bodyPr wrap="none" lIns="25400" tIns="25400" rIns="25400" bIns="25400" anchor="ctr">
+            <a:spAutoFit/>
+          </a:bodyPr>
+          <a:lstStyle>
+            <a:lvl1pPr>
+              <a:defRPr sz="3600">
+                <a:solidFill>
+                  <a:schemeClr val="accent1">
+                    <a:lumOff val="-13575"/>
+                  </a:schemeClr>
+                </a:solidFill>
+                <a:latin typeface="Avenir Next Regular"/>
+                <a:ea typeface="Avenir Next Regular"/>
+                <a:cs typeface="Avenir Next Regular"/>
+                <a:sym typeface="Avenir Next Regular"/>
+              </a:defRPr>
+            </a:lvl1pPr>
+          </a:lstStyle>
+          <a:p>
+            <a:r>
+              <a:rPr sz="1800" dirty="0"/>
+              <a:t>What are functions</a:t>
             </a:r>
           </a:p>
         </p:txBody>
       </p:sp>
       <p:pic>
         <p:nvPicPr>
-          <p:cNvPr id="3" name="Picture 2">
-            <a:extLst>
-              <a:ext uri="{FF2B5EF4-FFF2-40B4-BE49-F238E27FC236}">
-                <a16:creationId xmlns:a16="http://schemas.microsoft.com/office/drawing/2014/main" id="{675017DA-2B89-B380-F3EF-DFFBD7477383}"/>
+          <p:cNvPr id="2" name="Picture 1">
+            <a:extLst>
+              <a:ext uri="{FF2B5EF4-FFF2-40B4-BE49-F238E27FC236}">
+                <a16:creationId xmlns:a16="http://schemas.microsoft.com/office/drawing/2014/main" id="{FB7A7431-E88C-E9CF-C22F-AC7EF771DCDB}"/>
               </a:ext>
             </a:extLst>
           </p:cNvPr>
@@ -9208,48 +6571,61 @@
         </p:blipFill>
         <p:spPr>
           <a:xfrm>
-            <a:off x="1079500" y="789268"/>
-            <a:ext cx="6832600" cy="774700"/>
+            <a:off x="6801651" y="597758"/>
+            <a:ext cx="4655016" cy="3689762"/>
           </a:xfrm>
           <a:prstGeom prst="rect">
             <a:avLst/>
           </a:prstGeom>
         </p:spPr>
       </p:pic>
-      <p:pic>
-        <p:nvPicPr>
-          <p:cNvPr id="4" name="Picture 3">
-            <a:extLst>
-              <a:ext uri="{FF2B5EF4-FFF2-40B4-BE49-F238E27FC236}">
-                <a16:creationId xmlns:a16="http://schemas.microsoft.com/office/drawing/2014/main" id="{8B6C2513-0F52-F1ED-7FC1-80E8C7083692}"/>
-              </a:ext>
-            </a:extLst>
-          </p:cNvPr>
-          <p:cNvPicPr>
-            <a:picLocks noChangeAspect="1"/>
-          </p:cNvPicPr>
+      <p:sp>
+        <p:nvSpPr>
+          <p:cNvPr id="4" name="TextBox 3">
+            <a:extLst>
+              <a:ext uri="{FF2B5EF4-FFF2-40B4-BE49-F238E27FC236}">
+                <a16:creationId xmlns:a16="http://schemas.microsoft.com/office/drawing/2014/main" id="{F451805A-0E44-C150-4134-EB8DE67D9954}"/>
+              </a:ext>
+            </a:extLst>
+          </p:cNvPr>
+          <p:cNvSpPr txBox="1"/>
           <p:nvPr/>
-        </p:nvPicPr>
-        <p:blipFill>
-          <a:blip r:embed="rId3"/>
-          <a:stretch>
-            <a:fillRect/>
-          </a:stretch>
-        </p:blipFill>
-        <p:spPr>
-          <a:xfrm>
-            <a:off x="1986429" y="1806014"/>
-            <a:ext cx="5312145" cy="4262718"/>
+        </p:nvSpPr>
+        <p:spPr>
+          <a:xfrm>
+            <a:off x="9428480" y="5811766"/>
+            <a:ext cx="6096000" cy="369332"/>
           </a:xfrm>
           <a:prstGeom prst="rect">
             <a:avLst/>
           </a:prstGeom>
-        </p:spPr>
-      </p:pic>
+          <a:noFill/>
+        </p:spPr>
+        <p:txBody>
+          <a:bodyPr wrap="square">
+            <a:spAutoFit/>
+          </a:bodyPr>
+          <a:lstStyle/>
+          <a:p>
+            <a:r>
+              <a:rPr lang="en-US" dirty="0"/>
+              <a:t>https://</a:t>
+            </a:r>
+            <a:r>
+              <a:rPr lang="en-US" dirty="0" err="1"/>
+              <a:t>xkcd.com</a:t>
+            </a:r>
+            <a:r>
+              <a:rPr lang="en-US" dirty="0"/>
+              <a:t>/1205/</a:t>
+            </a:r>
+          </a:p>
+        </p:txBody>
+      </p:sp>
     </p:spTree>
     <p:extLst>
       <p:ext uri="{BB962C8B-B14F-4D97-AF65-F5344CB8AC3E}">
-        <p14:creationId xmlns:p14="http://schemas.microsoft.com/office/powerpoint/2010/main" val="3034421642"/>
+        <p14:creationId xmlns:p14="http://schemas.microsoft.com/office/powerpoint/2010/main" val="1996646748"/>
       </p:ext>
     </p:extLst>
   </p:cSld>
@@ -9278,10 +6654,10 @@
       </p:grpSpPr>
       <p:sp>
         <p:nvSpPr>
-          <p:cNvPr id="2" name="TextBox 1">
-            <a:extLst>
-              <a:ext uri="{FF2B5EF4-FFF2-40B4-BE49-F238E27FC236}">
-                <a16:creationId xmlns:a16="http://schemas.microsoft.com/office/drawing/2014/main" id="{9B58B4FA-F21A-26DC-43DB-D2B51031D171}"/>
+          <p:cNvPr id="5" name="TextBox 4">
+            <a:extLst>
+              <a:ext uri="{FF2B5EF4-FFF2-40B4-BE49-F238E27FC236}">
+                <a16:creationId xmlns:a16="http://schemas.microsoft.com/office/drawing/2014/main" id="{329A493F-FCD9-7CA9-DCC5-2EC6A8A29730}"/>
               </a:ext>
             </a:extLst>
           </p:cNvPr>
@@ -9290,8 +6666,8 @@
         </p:nvSpPr>
         <p:spPr>
           <a:xfrm>
-            <a:off x="5392669" y="121871"/>
-            <a:ext cx="4775200" cy="369332"/>
+            <a:off x="4991463" y="137433"/>
+            <a:ext cx="1534394" cy="369332"/>
           </a:xfrm>
           <a:prstGeom prst="rect">
             <a:avLst/>
@@ -9299,24 +6675,24 @@
           <a:noFill/>
         </p:spPr>
         <p:txBody>
-          <a:bodyPr wrap="square" rtlCol="0">
+          <a:bodyPr wrap="none" rtlCol="0">
             <a:spAutoFit/>
           </a:bodyPr>
           <a:lstStyle/>
           <a:p>
             <a:r>
               <a:rPr lang="en-US" dirty="0"/>
-              <a:t>Faceting</a:t>
+              <a:t>Basic Function</a:t>
             </a:r>
           </a:p>
         </p:txBody>
       </p:sp>
       <p:pic>
         <p:nvPicPr>
-          <p:cNvPr id="5" name="Picture 4">
-            <a:extLst>
-              <a:ext uri="{FF2B5EF4-FFF2-40B4-BE49-F238E27FC236}">
-                <a16:creationId xmlns:a16="http://schemas.microsoft.com/office/drawing/2014/main" id="{683F8D41-DD4F-3B81-84AD-F50EF091FF6D}"/>
+          <p:cNvPr id="6" name="Picture 5">
+            <a:extLst>
+              <a:ext uri="{FF2B5EF4-FFF2-40B4-BE49-F238E27FC236}">
+                <a16:creationId xmlns:a16="http://schemas.microsoft.com/office/drawing/2014/main" id="{72066490-4A50-1E52-4903-99915B0533A6}"/>
               </a:ext>
             </a:extLst>
           </p:cNvPr>
@@ -9333,8 +6709,8 @@
         </p:blipFill>
         <p:spPr>
           <a:xfrm>
-            <a:off x="235698" y="931582"/>
-            <a:ext cx="4712820" cy="706492"/>
+            <a:off x="6449540" y="3094264"/>
+            <a:ext cx="2400300" cy="520700"/>
           </a:xfrm>
           <a:prstGeom prst="rect">
             <a:avLst/>
@@ -9343,10 +6719,10 @@
       </p:pic>
       <p:pic>
         <p:nvPicPr>
-          <p:cNvPr id="6" name="Picture 5">
-            <a:extLst>
-              <a:ext uri="{FF2B5EF4-FFF2-40B4-BE49-F238E27FC236}">
-                <a16:creationId xmlns:a16="http://schemas.microsoft.com/office/drawing/2014/main" id="{6D6F702C-4AF4-4103-F68E-308F98F529FC}"/>
+          <p:cNvPr id="7" name="Picture 6">
+            <a:extLst>
+              <a:ext uri="{FF2B5EF4-FFF2-40B4-BE49-F238E27FC236}">
+                <a16:creationId xmlns:a16="http://schemas.microsoft.com/office/drawing/2014/main" id="{77D80E2F-BE9F-BAFB-09A6-37EFF5A5775C}"/>
               </a:ext>
             </a:extLst>
           </p:cNvPr>
@@ -9363,18 +6739,395 @@
         </p:blipFill>
         <p:spPr>
           <a:xfrm>
-            <a:off x="235698" y="1638074"/>
-            <a:ext cx="4716206" cy="3700408"/>
+            <a:off x="6454983" y="1670112"/>
+            <a:ext cx="4216400" cy="1054100"/>
           </a:xfrm>
           <a:prstGeom prst="rect">
             <a:avLst/>
           </a:prstGeom>
         </p:spPr>
       </p:pic>
+      <p:sp>
+        <p:nvSpPr>
+          <p:cNvPr id="8" name="TextBox 7">
+            <a:extLst>
+              <a:ext uri="{FF2B5EF4-FFF2-40B4-BE49-F238E27FC236}">
+                <a16:creationId xmlns:a16="http://schemas.microsoft.com/office/drawing/2014/main" id="{1ECB1FD7-0E59-94FC-00CA-3CD30F0175C1}"/>
+              </a:ext>
+            </a:extLst>
+          </p:cNvPr>
+          <p:cNvSpPr txBox="1"/>
+          <p:nvPr/>
+        </p:nvSpPr>
+        <p:spPr>
+          <a:xfrm>
+            <a:off x="5622646" y="1123043"/>
+            <a:ext cx="1590500" cy="369332"/>
+          </a:xfrm>
+          <a:prstGeom prst="rect">
+            <a:avLst/>
+          </a:prstGeom>
+          <a:noFill/>
+        </p:spPr>
+        <p:txBody>
+          <a:bodyPr wrap="none" rtlCol="0">
+            <a:spAutoFit/>
+          </a:bodyPr>
+          <a:lstStyle/>
+          <a:p>
+            <a:r>
+              <a:rPr lang="en-US" dirty="0"/>
+              <a:t>Function name</a:t>
+            </a:r>
+          </a:p>
+        </p:txBody>
+      </p:sp>
+      <p:cxnSp>
+        <p:nvCxnSpPr>
+          <p:cNvPr id="10" name="Straight Arrow Connector 9">
+            <a:extLst>
+              <a:ext uri="{FF2B5EF4-FFF2-40B4-BE49-F238E27FC236}">
+                <a16:creationId xmlns:a16="http://schemas.microsoft.com/office/drawing/2014/main" id="{E77025EA-9293-FFED-DFFF-DB02D893C57E}"/>
+              </a:ext>
+            </a:extLst>
+          </p:cNvPr>
+          <p:cNvCxnSpPr/>
+          <p:nvPr/>
+        </p:nvCxnSpPr>
+        <p:spPr>
+          <a:xfrm>
+            <a:off x="7135586" y="1335377"/>
+            <a:ext cx="155121" cy="334735"/>
+          </a:xfrm>
+          <a:prstGeom prst="straightConnector1">
+            <a:avLst/>
+          </a:prstGeom>
+          <a:ln>
+            <a:tailEnd type="triangle"/>
+          </a:ln>
+        </p:spPr>
+        <p:style>
+          <a:lnRef idx="1">
+            <a:schemeClr val="accent1"/>
+          </a:lnRef>
+          <a:fillRef idx="0">
+            <a:schemeClr val="accent1"/>
+          </a:fillRef>
+          <a:effectRef idx="0">
+            <a:schemeClr val="accent1"/>
+          </a:effectRef>
+          <a:fontRef idx="minor">
+            <a:schemeClr val="tx1"/>
+          </a:fontRef>
+        </p:style>
+      </p:cxnSp>
+      <p:sp>
+        <p:nvSpPr>
+          <p:cNvPr id="12" name="TextBox 11">
+            <a:extLst>
+              <a:ext uri="{FF2B5EF4-FFF2-40B4-BE49-F238E27FC236}">
+                <a16:creationId xmlns:a16="http://schemas.microsoft.com/office/drawing/2014/main" id="{01F89C21-4F61-5000-93C2-1B637C820693}"/>
+              </a:ext>
+            </a:extLst>
+          </p:cNvPr>
+          <p:cNvSpPr txBox="1"/>
+          <p:nvPr/>
+        </p:nvSpPr>
+        <p:spPr>
+          <a:xfrm>
+            <a:off x="4856479" y="1785487"/>
+            <a:ext cx="1964267" cy="646331"/>
+          </a:xfrm>
+          <a:prstGeom prst="rect">
+            <a:avLst/>
+          </a:prstGeom>
+          <a:noFill/>
+        </p:spPr>
+        <p:txBody>
+          <a:bodyPr wrap="square" rtlCol="0">
+            <a:spAutoFit/>
+          </a:bodyPr>
+          <a:lstStyle/>
+          <a:p>
+            <a:r>
+              <a:rPr lang="en-US" dirty="0"/>
+              <a:t>Function</a:t>
+            </a:r>
+          </a:p>
+          <a:p>
+            <a:r>
+              <a:rPr lang="en-US" dirty="0"/>
+              <a:t>body</a:t>
+            </a:r>
+          </a:p>
+        </p:txBody>
+      </p:sp>
+      <p:cxnSp>
+        <p:nvCxnSpPr>
+          <p:cNvPr id="14" name="Straight Arrow Connector 13">
+            <a:extLst>
+              <a:ext uri="{FF2B5EF4-FFF2-40B4-BE49-F238E27FC236}">
+                <a16:creationId xmlns:a16="http://schemas.microsoft.com/office/drawing/2014/main" id="{F74A8A2B-E66D-8ACA-A6B1-D0B88A91536C}"/>
+              </a:ext>
+            </a:extLst>
+          </p:cNvPr>
+          <p:cNvCxnSpPr>
+            <a:endCxn id="12" idx="3"/>
+          </p:cNvCxnSpPr>
+          <p:nvPr/>
+        </p:nvCxnSpPr>
+        <p:spPr>
+          <a:xfrm>
+            <a:off x="5960533" y="2108653"/>
+            <a:ext cx="860213" cy="0"/>
+          </a:xfrm>
+          <a:prstGeom prst="straightConnector1">
+            <a:avLst/>
+          </a:prstGeom>
+          <a:ln>
+            <a:tailEnd type="triangle"/>
+          </a:ln>
+        </p:spPr>
+        <p:style>
+          <a:lnRef idx="1">
+            <a:schemeClr val="accent1"/>
+          </a:lnRef>
+          <a:fillRef idx="0">
+            <a:schemeClr val="accent1"/>
+          </a:fillRef>
+          <a:effectRef idx="0">
+            <a:schemeClr val="accent1"/>
+          </a:effectRef>
+          <a:fontRef idx="minor">
+            <a:schemeClr val="tx1"/>
+          </a:fontRef>
+        </p:style>
+      </p:cxnSp>
+      <p:sp>
+        <p:nvSpPr>
+          <p:cNvPr id="15" name="TextBox 14">
+            <a:extLst>
+              <a:ext uri="{FF2B5EF4-FFF2-40B4-BE49-F238E27FC236}">
+                <a16:creationId xmlns:a16="http://schemas.microsoft.com/office/drawing/2014/main" id="{ECD6190A-089B-853B-4654-D77B6212B547}"/>
+              </a:ext>
+            </a:extLst>
+          </p:cNvPr>
+          <p:cNvSpPr txBox="1"/>
+          <p:nvPr/>
+        </p:nvSpPr>
+        <p:spPr>
+          <a:xfrm>
+            <a:off x="4585477" y="2909598"/>
+            <a:ext cx="1375056" cy="369332"/>
+          </a:xfrm>
+          <a:prstGeom prst="rect">
+            <a:avLst/>
+          </a:prstGeom>
+          <a:noFill/>
+        </p:spPr>
+        <p:txBody>
+          <a:bodyPr wrap="none" rtlCol="0">
+            <a:spAutoFit/>
+          </a:bodyPr>
+          <a:lstStyle/>
+          <a:p>
+            <a:r>
+              <a:rPr lang="en-US" dirty="0"/>
+              <a:t>Return value</a:t>
+            </a:r>
+          </a:p>
+        </p:txBody>
+      </p:sp>
+      <p:cxnSp>
+        <p:nvCxnSpPr>
+          <p:cNvPr id="17" name="Straight Arrow Connector 16">
+            <a:extLst>
+              <a:ext uri="{FF2B5EF4-FFF2-40B4-BE49-F238E27FC236}">
+                <a16:creationId xmlns:a16="http://schemas.microsoft.com/office/drawing/2014/main" id="{6C47EBB0-D2A2-36D7-89CF-8F98575913CE}"/>
+              </a:ext>
+            </a:extLst>
+          </p:cNvPr>
+          <p:cNvCxnSpPr/>
+          <p:nvPr/>
+        </p:nvCxnSpPr>
+        <p:spPr>
+          <a:xfrm flipV="1">
+            <a:off x="6190827" y="2431818"/>
+            <a:ext cx="799253" cy="575542"/>
+          </a:xfrm>
+          <a:prstGeom prst="straightConnector1">
+            <a:avLst/>
+          </a:prstGeom>
+          <a:ln>
+            <a:tailEnd type="triangle"/>
+          </a:ln>
+        </p:spPr>
+        <p:style>
+          <a:lnRef idx="1">
+            <a:schemeClr val="accent1"/>
+          </a:lnRef>
+          <a:fillRef idx="0">
+            <a:schemeClr val="accent1"/>
+          </a:fillRef>
+          <a:effectRef idx="0">
+            <a:schemeClr val="accent1"/>
+          </a:effectRef>
+          <a:fontRef idx="minor">
+            <a:schemeClr val="tx1"/>
+          </a:fontRef>
+        </p:style>
+      </p:cxnSp>
+      <p:sp>
+        <p:nvSpPr>
+          <p:cNvPr id="18" name="TextBox 17">
+            <a:extLst>
+              <a:ext uri="{FF2B5EF4-FFF2-40B4-BE49-F238E27FC236}">
+                <a16:creationId xmlns:a16="http://schemas.microsoft.com/office/drawing/2014/main" id="{8CB50C4E-F271-6DE9-7873-AAA41844FCFC}"/>
+              </a:ext>
+            </a:extLst>
+          </p:cNvPr>
+          <p:cNvSpPr txBox="1"/>
+          <p:nvPr/>
+        </p:nvSpPr>
+        <p:spPr>
+          <a:xfrm>
+            <a:off x="9482083" y="642136"/>
+            <a:ext cx="1189300" cy="369332"/>
+          </a:xfrm>
+          <a:prstGeom prst="rect">
+            <a:avLst/>
+          </a:prstGeom>
+          <a:noFill/>
+        </p:spPr>
+        <p:txBody>
+          <a:bodyPr wrap="none" rtlCol="0">
+            <a:spAutoFit/>
+          </a:bodyPr>
+          <a:lstStyle/>
+          <a:p>
+            <a:r>
+              <a:rPr lang="en-US" dirty="0"/>
+              <a:t>arguments</a:t>
+            </a:r>
+          </a:p>
+        </p:txBody>
+      </p:sp>
+      <p:cxnSp>
+        <p:nvCxnSpPr>
+          <p:cNvPr id="20" name="Straight Arrow Connector 19">
+            <a:extLst>
+              <a:ext uri="{FF2B5EF4-FFF2-40B4-BE49-F238E27FC236}">
+                <a16:creationId xmlns:a16="http://schemas.microsoft.com/office/drawing/2014/main" id="{41F52DD0-7175-D640-E972-5CA407C0D27B}"/>
+              </a:ext>
+            </a:extLst>
+          </p:cNvPr>
+          <p:cNvCxnSpPr/>
+          <p:nvPr/>
+        </p:nvCxnSpPr>
+        <p:spPr>
+          <a:xfrm flipH="1">
+            <a:off x="9821333" y="1123043"/>
+            <a:ext cx="115147" cy="495784"/>
+          </a:xfrm>
+          <a:prstGeom prst="straightConnector1">
+            <a:avLst/>
+          </a:prstGeom>
+          <a:ln>
+            <a:tailEnd type="triangle"/>
+          </a:ln>
+        </p:spPr>
+        <p:style>
+          <a:lnRef idx="1">
+            <a:schemeClr val="accent1"/>
+          </a:lnRef>
+          <a:fillRef idx="0">
+            <a:schemeClr val="accent1"/>
+          </a:fillRef>
+          <a:effectRef idx="0">
+            <a:schemeClr val="accent1"/>
+          </a:effectRef>
+          <a:fontRef idx="minor">
+            <a:schemeClr val="tx1"/>
+          </a:fontRef>
+        </p:style>
+      </p:cxnSp>
+      <p:pic>
+        <p:nvPicPr>
+          <p:cNvPr id="22" name="Picture 21">
+            <a:extLst>
+              <a:ext uri="{FF2B5EF4-FFF2-40B4-BE49-F238E27FC236}">
+                <a16:creationId xmlns:a16="http://schemas.microsoft.com/office/drawing/2014/main" id="{E72C0EBA-2156-DC5A-1B3C-788BA2C2091C}"/>
+              </a:ext>
+            </a:extLst>
+          </p:cNvPr>
+          <p:cNvPicPr>
+            <a:picLocks noChangeAspect="1"/>
+          </p:cNvPicPr>
+          <p:nvPr/>
+        </p:nvPicPr>
+        <p:blipFill>
+          <a:blip r:embed="rId4"/>
+          <a:stretch>
+            <a:fillRect/>
+          </a:stretch>
+        </p:blipFill>
+        <p:spPr>
+          <a:xfrm>
+            <a:off x="287189" y="1171756"/>
+            <a:ext cx="3909561" cy="3845016"/>
+          </a:xfrm>
+          <a:prstGeom prst="rect">
+            <a:avLst/>
+          </a:prstGeom>
+        </p:spPr>
+      </p:pic>
+      <p:sp>
+        <p:nvSpPr>
+          <p:cNvPr id="24" name="TextBox 23">
+            <a:extLst>
+              <a:ext uri="{FF2B5EF4-FFF2-40B4-BE49-F238E27FC236}">
+                <a16:creationId xmlns:a16="http://schemas.microsoft.com/office/drawing/2014/main" id="{B02EAA19-E40B-4019-5A5C-8D693759B186}"/>
+              </a:ext>
+            </a:extLst>
+          </p:cNvPr>
+          <p:cNvSpPr txBox="1"/>
+          <p:nvPr/>
+        </p:nvSpPr>
+        <p:spPr>
+          <a:xfrm>
+            <a:off x="389147" y="4973680"/>
+            <a:ext cx="6096000" cy="369332"/>
+          </a:xfrm>
+          <a:prstGeom prst="rect">
+            <a:avLst/>
+          </a:prstGeom>
+          <a:noFill/>
+        </p:spPr>
+        <p:txBody>
+          <a:bodyPr wrap="square">
+            <a:spAutoFit/>
+          </a:bodyPr>
+          <a:lstStyle/>
+          <a:p>
+            <a:r>
+              <a:rPr lang="en-US" dirty="0"/>
+              <a:t>https://</a:t>
+            </a:r>
+            <a:r>
+              <a:rPr lang="en-US" dirty="0" err="1"/>
+              <a:t>xkcd.com</a:t>
+            </a:r>
+            <a:r>
+              <a:rPr lang="en-US" dirty="0"/>
+              <a:t>/1319/</a:t>
+            </a:r>
+          </a:p>
+        </p:txBody>
+      </p:sp>
     </p:spTree>
     <p:extLst>
       <p:ext uri="{BB962C8B-B14F-4D97-AF65-F5344CB8AC3E}">
-        <p14:creationId xmlns:p14="http://schemas.microsoft.com/office/powerpoint/2010/main" val="1025469433"/>
+        <p14:creationId xmlns:p14="http://schemas.microsoft.com/office/powerpoint/2010/main" val="3179177417"/>
       </p:ext>
     </p:extLst>
   </p:cSld>
@@ -9406,7 +7159,7 @@
           <p:cNvPr id="2" name="TextBox 1">
             <a:extLst>
               <a:ext uri="{FF2B5EF4-FFF2-40B4-BE49-F238E27FC236}">
-                <a16:creationId xmlns:a16="http://schemas.microsoft.com/office/drawing/2014/main" id="{9B58B4FA-F21A-26DC-43DB-D2B51031D171}"/>
+                <a16:creationId xmlns:a16="http://schemas.microsoft.com/office/drawing/2014/main" id="{9D9A0DC5-96D6-AC76-09C9-5C35E3822F89}"/>
               </a:ext>
             </a:extLst>
           </p:cNvPr>
@@ -9415,8 +7168,8 @@
         </p:nvSpPr>
         <p:spPr>
           <a:xfrm>
-            <a:off x="5392669" y="121871"/>
-            <a:ext cx="4775200" cy="369332"/>
+            <a:off x="3239510" y="217808"/>
+            <a:ext cx="7354671" cy="369332"/>
           </a:xfrm>
           <a:prstGeom prst="rect">
             <a:avLst/>
@@ -9431,17 +7184,17 @@
           <a:p>
             <a:r>
               <a:rPr lang="en-US" dirty="0"/>
-              <a:t>Faceting</a:t>
+              <a:t>Loops (or performing the same operation on many things)</a:t>
             </a:r>
           </a:p>
         </p:txBody>
       </p:sp>
       <p:pic>
         <p:nvPicPr>
-          <p:cNvPr id="5" name="Picture 4">
-            <a:extLst>
-              <a:ext uri="{FF2B5EF4-FFF2-40B4-BE49-F238E27FC236}">
-                <a16:creationId xmlns:a16="http://schemas.microsoft.com/office/drawing/2014/main" id="{683F8D41-DD4F-3B81-84AD-F50EF091FF6D}"/>
+          <p:cNvPr id="3" name="Picture 2">
+            <a:extLst>
+              <a:ext uri="{FF2B5EF4-FFF2-40B4-BE49-F238E27FC236}">
+                <a16:creationId xmlns:a16="http://schemas.microsoft.com/office/drawing/2014/main" id="{3D89E326-CBC1-B343-AC5F-DB5EF52F9679}"/>
               </a:ext>
             </a:extLst>
           </p:cNvPr>
@@ -9458,8 +7211,8 @@
         </p:blipFill>
         <p:spPr>
           <a:xfrm>
-            <a:off x="235698" y="931582"/>
-            <a:ext cx="4712820" cy="706492"/>
+            <a:off x="1156347" y="1200714"/>
+            <a:ext cx="3329684" cy="657715"/>
           </a:xfrm>
           <a:prstGeom prst="rect">
             <a:avLst/>
@@ -9468,10 +7221,10 @@
       </p:pic>
       <p:pic>
         <p:nvPicPr>
-          <p:cNvPr id="6" name="Picture 5">
-            <a:extLst>
-              <a:ext uri="{FF2B5EF4-FFF2-40B4-BE49-F238E27FC236}">
-                <a16:creationId xmlns:a16="http://schemas.microsoft.com/office/drawing/2014/main" id="{6D6F702C-4AF4-4103-F68E-308F98F529FC}"/>
+          <p:cNvPr id="4" name="Picture 3">
+            <a:extLst>
+              <a:ext uri="{FF2B5EF4-FFF2-40B4-BE49-F238E27FC236}">
+                <a16:creationId xmlns:a16="http://schemas.microsoft.com/office/drawing/2014/main" id="{A06AB6A5-131B-1B94-1BE1-975CE2DF3AA1}"/>
               </a:ext>
             </a:extLst>
           </p:cNvPr>
@@ -9488,8 +7241,8 @@
         </p:blipFill>
         <p:spPr>
           <a:xfrm>
-            <a:off x="235698" y="1638074"/>
-            <a:ext cx="4716206" cy="3700408"/>
+            <a:off x="1156347" y="2054491"/>
+            <a:ext cx="3594100" cy="520700"/>
           </a:xfrm>
           <a:prstGeom prst="rect">
             <a:avLst/>
@@ -9498,10 +7251,10 @@
       </p:pic>
       <p:pic>
         <p:nvPicPr>
-          <p:cNvPr id="7" name="Picture 6">
-            <a:extLst>
-              <a:ext uri="{FF2B5EF4-FFF2-40B4-BE49-F238E27FC236}">
-                <a16:creationId xmlns:a16="http://schemas.microsoft.com/office/drawing/2014/main" id="{CBDA8E80-44A6-20A1-EF75-B6FA93AA3F25}"/>
+          <p:cNvPr id="5" name="Picture 4">
+            <a:extLst>
+              <a:ext uri="{FF2B5EF4-FFF2-40B4-BE49-F238E27FC236}">
+                <a16:creationId xmlns:a16="http://schemas.microsoft.com/office/drawing/2014/main" id="{4E4B3A31-4713-10F1-264E-753EE869728F}"/>
               </a:ext>
             </a:extLst>
           </p:cNvPr>
@@ -9518,8 +7271,8 @@
         </p:blipFill>
         <p:spPr>
           <a:xfrm>
-            <a:off x="5847230" y="3267636"/>
-            <a:ext cx="5594736" cy="2003520"/>
+            <a:off x="5405327" y="1529571"/>
+            <a:ext cx="5630326" cy="1207767"/>
           </a:xfrm>
           <a:prstGeom prst="rect">
             <a:avLst/>
@@ -9528,10 +7281,10 @@
       </p:pic>
       <p:pic>
         <p:nvPicPr>
-          <p:cNvPr id="8" name="Picture 7">
-            <a:extLst>
-              <a:ext uri="{FF2B5EF4-FFF2-40B4-BE49-F238E27FC236}">
-                <a16:creationId xmlns:a16="http://schemas.microsoft.com/office/drawing/2014/main" id="{E942CE85-4F70-0E98-1A26-729A49FCC142}"/>
+          <p:cNvPr id="6" name="Picture 5">
+            <a:extLst>
+              <a:ext uri="{FF2B5EF4-FFF2-40B4-BE49-F238E27FC236}">
+                <a16:creationId xmlns:a16="http://schemas.microsoft.com/office/drawing/2014/main" id="{13B6F9A7-E702-6C17-D8C5-F7823C8D690E}"/>
               </a:ext>
             </a:extLst>
           </p:cNvPr>
@@ -9548,8 +7301,8 @@
         </p:blipFill>
         <p:spPr>
           <a:xfrm>
-            <a:off x="6096000" y="876930"/>
-            <a:ext cx="5147235" cy="761144"/>
+            <a:off x="5405327" y="3003550"/>
+            <a:ext cx="2722684" cy="2794334"/>
           </a:xfrm>
           <a:prstGeom prst="rect">
             <a:avLst/>
@@ -9559,7 +7312,7 @@
     </p:spTree>
     <p:extLst>
       <p:ext uri="{BB962C8B-B14F-4D97-AF65-F5344CB8AC3E}">
-        <p14:creationId xmlns:p14="http://schemas.microsoft.com/office/powerpoint/2010/main" val="2775474332"/>
+        <p14:creationId xmlns:p14="http://schemas.microsoft.com/office/powerpoint/2010/main" val="2694943225"/>
       </p:ext>
     </p:extLst>
   </p:cSld>
@@ -9591,7 +7344,7 @@
           <p:cNvPr id="2" name="TextBox 1">
             <a:extLst>
               <a:ext uri="{FF2B5EF4-FFF2-40B4-BE49-F238E27FC236}">
-                <a16:creationId xmlns:a16="http://schemas.microsoft.com/office/drawing/2014/main" id="{D791C6AE-1BC4-B1E9-A3D8-86782E25B660}"/>
+                <a16:creationId xmlns:a16="http://schemas.microsoft.com/office/drawing/2014/main" id="{9D9A0DC5-96D6-AC76-09C9-5C35E3822F89}"/>
               </a:ext>
             </a:extLst>
           </p:cNvPr>
@@ -9600,8 +7353,8 @@
         </p:nvSpPr>
         <p:spPr>
           <a:xfrm>
-            <a:off x="4696304" y="198968"/>
-            <a:ext cx="6908800" cy="369332"/>
+            <a:off x="2703729" y="374970"/>
+            <a:ext cx="7354671" cy="369332"/>
           </a:xfrm>
           <a:prstGeom prst="rect">
             <a:avLst/>
@@ -9616,17 +7369,17 @@
           <a:p>
             <a:r>
               <a:rPr lang="en-US" dirty="0"/>
-              <a:t>Characters vs Factors</a:t>
+              <a:t>Loops (or performing the same operation on many things)</a:t>
             </a:r>
           </a:p>
         </p:txBody>
       </p:sp>
       <p:pic>
         <p:nvPicPr>
-          <p:cNvPr id="7" name="Picture 6">
-            <a:extLst>
-              <a:ext uri="{FF2B5EF4-FFF2-40B4-BE49-F238E27FC236}">
-                <a16:creationId xmlns:a16="http://schemas.microsoft.com/office/drawing/2014/main" id="{5A122CF8-55EE-2648-D5D7-50DD741A3A59}"/>
+          <p:cNvPr id="3" name="Picture 2">
+            <a:extLst>
+              <a:ext uri="{FF2B5EF4-FFF2-40B4-BE49-F238E27FC236}">
+                <a16:creationId xmlns:a16="http://schemas.microsoft.com/office/drawing/2014/main" id="{3D89E326-CBC1-B343-AC5F-DB5EF52F9679}"/>
               </a:ext>
             </a:extLst>
           </p:cNvPr>
@@ -9643,8 +7396,8 @@
         </p:blipFill>
         <p:spPr>
           <a:xfrm>
-            <a:off x="593062" y="2017193"/>
-            <a:ext cx="2006600" cy="444500"/>
+            <a:off x="1156347" y="1200714"/>
+            <a:ext cx="3329684" cy="657715"/>
           </a:xfrm>
           <a:prstGeom prst="rect">
             <a:avLst/>
@@ -9653,10 +7406,10 @@
       </p:pic>
       <p:pic>
         <p:nvPicPr>
-          <p:cNvPr id="8" name="Picture 7">
-            <a:extLst>
-              <a:ext uri="{FF2B5EF4-FFF2-40B4-BE49-F238E27FC236}">
-                <a16:creationId xmlns:a16="http://schemas.microsoft.com/office/drawing/2014/main" id="{21F0FD66-6D1E-70B0-81FD-426B8F308423}"/>
+          <p:cNvPr id="7" name="Picture 6">
+            <a:extLst>
+              <a:ext uri="{FF2B5EF4-FFF2-40B4-BE49-F238E27FC236}">
+                <a16:creationId xmlns:a16="http://schemas.microsoft.com/office/drawing/2014/main" id="{3D2D61EF-8C35-B3B2-CDA4-DF4E46313892}"/>
               </a:ext>
             </a:extLst>
           </p:cNvPr>
@@ -9673,20 +7426,61 @@
         </p:blipFill>
         <p:spPr>
           <a:xfrm>
-            <a:off x="540434" y="792023"/>
-            <a:ext cx="4889500" cy="330200"/>
+            <a:off x="1156347" y="2314841"/>
+            <a:ext cx="4584700" cy="1016000"/>
           </a:xfrm>
           <a:prstGeom prst="rect">
             <a:avLst/>
           </a:prstGeom>
         </p:spPr>
       </p:pic>
+      <p:sp>
+        <p:nvSpPr>
+          <p:cNvPr id="8" name="TextBox 7">
+            <a:extLst>
+              <a:ext uri="{FF2B5EF4-FFF2-40B4-BE49-F238E27FC236}">
+                <a16:creationId xmlns:a16="http://schemas.microsoft.com/office/drawing/2014/main" id="{7FC5C157-B92B-1D93-7E74-7ECBDB0F38AF}"/>
+              </a:ext>
+            </a:extLst>
+          </p:cNvPr>
+          <p:cNvSpPr txBox="1"/>
+          <p:nvPr/>
+        </p:nvSpPr>
+        <p:spPr>
+          <a:xfrm>
+            <a:off x="6291385" y="2407138"/>
+            <a:ext cx="4501489" cy="646331"/>
+          </a:xfrm>
+          <a:prstGeom prst="rect">
+            <a:avLst/>
+          </a:prstGeom>
+          <a:noFill/>
+        </p:spPr>
+        <p:txBody>
+          <a:bodyPr wrap="none" rtlCol="0">
+            <a:spAutoFit/>
+          </a:bodyPr>
+          <a:lstStyle/>
+          <a:p>
+            <a:r>
+              <a:rPr lang="en-US" dirty="0"/>
+              <a:t>Function that takes a number and prints it out</a:t>
+            </a:r>
+          </a:p>
+          <a:p>
+            <a:r>
+              <a:rPr lang="en-US" dirty="0"/>
+              <a:t>Just like the loop on the last slide</a:t>
+            </a:r>
+          </a:p>
+        </p:txBody>
+      </p:sp>
       <p:pic>
         <p:nvPicPr>
           <p:cNvPr id="9" name="Picture 8">
             <a:extLst>
               <a:ext uri="{FF2B5EF4-FFF2-40B4-BE49-F238E27FC236}">
-                <a16:creationId xmlns:a16="http://schemas.microsoft.com/office/drawing/2014/main" id="{130D36F0-A21F-E967-53D9-B55D91048E7C}"/>
+                <a16:creationId xmlns:a16="http://schemas.microsoft.com/office/drawing/2014/main" id="{2921F36A-7BDA-359D-95B7-2D2256B4DA1D}"/>
               </a:ext>
             </a:extLst>
           </p:cNvPr>
@@ -9703,8 +7497,8 @@
         </p:blipFill>
         <p:spPr>
           <a:xfrm>
-            <a:off x="540434" y="1209662"/>
-            <a:ext cx="4241800" cy="508000"/>
+            <a:off x="1156347" y="3804532"/>
+            <a:ext cx="5932395" cy="646331"/>
           </a:xfrm>
           <a:prstGeom prst="rect">
             <a:avLst/>
@@ -9713,10 +7507,10 @@
       </p:pic>
       <p:sp>
         <p:nvSpPr>
-          <p:cNvPr id="3" name="TextBox 2">
-            <a:extLst>
-              <a:ext uri="{FF2B5EF4-FFF2-40B4-BE49-F238E27FC236}">
-                <a16:creationId xmlns:a16="http://schemas.microsoft.com/office/drawing/2014/main" id="{105923AA-FAA7-32B7-22FD-BC1287E9C888}"/>
+          <p:cNvPr id="10" name="TextBox 9">
+            <a:extLst>
+              <a:ext uri="{FF2B5EF4-FFF2-40B4-BE49-F238E27FC236}">
+                <a16:creationId xmlns:a16="http://schemas.microsoft.com/office/drawing/2014/main" id="{9EE0BFA8-DE07-6A7B-16C2-23979434500E}"/>
               </a:ext>
             </a:extLst>
           </p:cNvPr>
@@ -9725,8 +7519,8 @@
         </p:nvSpPr>
         <p:spPr>
           <a:xfrm>
-            <a:off x="2218702" y="422691"/>
-            <a:ext cx="1532964" cy="369332"/>
+            <a:off x="7088742" y="3216842"/>
+            <a:ext cx="4501488" cy="923330"/>
           </a:xfrm>
           <a:prstGeom prst="rect">
             <a:avLst/>
@@ -9740,16 +7534,210 @@
           <a:lstStyle/>
           <a:p>
             <a:r>
-              <a:rPr lang="en-US" dirty="0"/>
-              <a:t>Character</a:t>
-            </a:r>
-          </a:p>
-        </p:txBody>
-      </p:sp>
+              <a:rPr lang="en-US" dirty="0" err="1"/>
+              <a:t>lapply</a:t>
+            </a:r>
+            <a:r>
+              <a:rPr lang="en-US" dirty="0"/>
+              <a:t> is a function that takes a list </a:t>
+            </a:r>
+          </a:p>
+          <a:p>
+            <a:r>
+              <a:rPr lang="en-US" dirty="0"/>
+              <a:t>and applies a function to each element </a:t>
+            </a:r>
+          </a:p>
+          <a:p>
+            <a:r>
+              <a:rPr lang="en-US" dirty="0"/>
+              <a:t>of the list</a:t>
+            </a:r>
+          </a:p>
+        </p:txBody>
+      </p:sp>
+      <p:sp>
+        <p:nvSpPr>
+          <p:cNvPr id="11" name="TextBox 10">
+            <a:extLst>
+              <a:ext uri="{FF2B5EF4-FFF2-40B4-BE49-F238E27FC236}">
+                <a16:creationId xmlns:a16="http://schemas.microsoft.com/office/drawing/2014/main" id="{86C96972-673F-8D53-E968-9747091D5A36}"/>
+              </a:ext>
+            </a:extLst>
+          </p:cNvPr>
+          <p:cNvSpPr txBox="1"/>
+          <p:nvPr/>
+        </p:nvSpPr>
+        <p:spPr>
+          <a:xfrm>
+            <a:off x="3071446" y="5201926"/>
+            <a:ext cx="454612" cy="369332"/>
+          </a:xfrm>
+          <a:prstGeom prst="rect">
+            <a:avLst/>
+          </a:prstGeom>
+          <a:noFill/>
+        </p:spPr>
+        <p:txBody>
+          <a:bodyPr wrap="none" rtlCol="0">
+            <a:spAutoFit/>
+          </a:bodyPr>
+          <a:lstStyle/>
+          <a:p>
+            <a:r>
+              <a:rPr lang="en-US" dirty="0"/>
+              <a:t>list</a:t>
+            </a:r>
+          </a:p>
+        </p:txBody>
+      </p:sp>
+      <p:sp>
+        <p:nvSpPr>
+          <p:cNvPr id="12" name="TextBox 11">
+            <a:extLst>
+              <a:ext uri="{FF2B5EF4-FFF2-40B4-BE49-F238E27FC236}">
+                <a16:creationId xmlns:a16="http://schemas.microsoft.com/office/drawing/2014/main" id="{DD178951-A62F-62D4-2C21-1423AA34FABB}"/>
+              </a:ext>
+            </a:extLst>
+          </p:cNvPr>
+          <p:cNvSpPr txBox="1"/>
+          <p:nvPr/>
+        </p:nvSpPr>
+        <p:spPr>
+          <a:xfrm>
+            <a:off x="5410927" y="5201926"/>
+            <a:ext cx="970137" cy="369332"/>
+          </a:xfrm>
+          <a:prstGeom prst="rect">
+            <a:avLst/>
+          </a:prstGeom>
+          <a:noFill/>
+        </p:spPr>
+        <p:txBody>
+          <a:bodyPr wrap="none" rtlCol="0">
+            <a:spAutoFit/>
+          </a:bodyPr>
+          <a:lstStyle/>
+          <a:p>
+            <a:r>
+              <a:rPr lang="en-US" dirty="0"/>
+              <a:t>function</a:t>
+            </a:r>
+          </a:p>
+        </p:txBody>
+      </p:sp>
+      <p:cxnSp>
+        <p:nvCxnSpPr>
+          <p:cNvPr id="14" name="Straight Arrow Connector 13">
+            <a:extLst>
+              <a:ext uri="{FF2B5EF4-FFF2-40B4-BE49-F238E27FC236}">
+                <a16:creationId xmlns:a16="http://schemas.microsoft.com/office/drawing/2014/main" id="{541959FF-6E83-BDB1-4533-8F80CF45848C}"/>
+              </a:ext>
+            </a:extLst>
+          </p:cNvPr>
+          <p:cNvCxnSpPr/>
+          <p:nvPr/>
+        </p:nvCxnSpPr>
+        <p:spPr>
+          <a:xfrm flipV="1">
+            <a:off x="3298752" y="4509477"/>
+            <a:ext cx="0" cy="554892"/>
+          </a:xfrm>
+          <a:prstGeom prst="straightConnector1">
+            <a:avLst/>
+          </a:prstGeom>
+          <a:ln w="41275">
+            <a:tailEnd type="triangle"/>
+          </a:ln>
+        </p:spPr>
+        <p:style>
+          <a:lnRef idx="1">
+            <a:schemeClr val="accent1"/>
+          </a:lnRef>
+          <a:fillRef idx="0">
+            <a:schemeClr val="accent1"/>
+          </a:fillRef>
+          <a:effectRef idx="0">
+            <a:schemeClr val="accent1"/>
+          </a:effectRef>
+          <a:fontRef idx="minor">
+            <a:schemeClr val="tx1"/>
+          </a:fontRef>
+        </p:style>
+      </p:cxnSp>
+      <p:cxnSp>
+        <p:nvCxnSpPr>
+          <p:cNvPr id="15" name="Straight Arrow Connector 14">
+            <a:extLst>
+              <a:ext uri="{FF2B5EF4-FFF2-40B4-BE49-F238E27FC236}">
+                <a16:creationId xmlns:a16="http://schemas.microsoft.com/office/drawing/2014/main" id="{C4E6C7C4-0F6F-89A5-8C9E-FF80DDED5D6E}"/>
+              </a:ext>
+            </a:extLst>
+          </p:cNvPr>
+          <p:cNvCxnSpPr/>
+          <p:nvPr/>
+        </p:nvCxnSpPr>
+        <p:spPr>
+          <a:xfrm flipV="1">
+            <a:off x="5895995" y="4589362"/>
+            <a:ext cx="0" cy="554892"/>
+          </a:xfrm>
+          <a:prstGeom prst="straightConnector1">
+            <a:avLst/>
+          </a:prstGeom>
+          <a:ln w="41275">
+            <a:tailEnd type="triangle"/>
+          </a:ln>
+        </p:spPr>
+        <p:style>
+          <a:lnRef idx="1">
+            <a:schemeClr val="accent1"/>
+          </a:lnRef>
+          <a:fillRef idx="0">
+            <a:schemeClr val="accent1"/>
+          </a:fillRef>
+          <a:effectRef idx="0">
+            <a:schemeClr val="accent1"/>
+          </a:effectRef>
+          <a:fontRef idx="minor">
+            <a:schemeClr val="tx1"/>
+          </a:fontRef>
+        </p:style>
+      </p:cxnSp>
+      <p:pic>
+        <p:nvPicPr>
+          <p:cNvPr id="16" name="Picture 15">
+            <a:extLst>
+              <a:ext uri="{FF2B5EF4-FFF2-40B4-BE49-F238E27FC236}">
+                <a16:creationId xmlns:a16="http://schemas.microsoft.com/office/drawing/2014/main" id="{32D5DA46-7ACF-58D5-7AD7-23973A4959D0}"/>
+              </a:ext>
+            </a:extLst>
+          </p:cNvPr>
+          <p:cNvPicPr>
+            <a:picLocks noChangeAspect="1"/>
+          </p:cNvPicPr>
+          <p:nvPr/>
+        </p:nvPicPr>
+        <p:blipFill>
+          <a:blip r:embed="rId5"/>
+          <a:stretch>
+            <a:fillRect/>
+          </a:stretch>
+        </p:blipFill>
+        <p:spPr>
+          <a:xfrm>
+            <a:off x="9857614" y="3804532"/>
+            <a:ext cx="1128633" cy="2897841"/>
+          </a:xfrm>
+          <a:prstGeom prst="rect">
+            <a:avLst/>
+          </a:prstGeom>
+        </p:spPr>
+      </p:pic>
     </p:spTree>
     <p:extLst>
       <p:ext uri="{BB962C8B-B14F-4D97-AF65-F5344CB8AC3E}">
-        <p14:creationId xmlns:p14="http://schemas.microsoft.com/office/powerpoint/2010/main" val="2377011635"/>
+        <p14:creationId xmlns:p14="http://schemas.microsoft.com/office/powerpoint/2010/main" val="2484998749"/>
       </p:ext>
     </p:extLst>
   </p:cSld>
@@ -9781,7 +7769,7 @@
           <p:cNvPr id="2" name="TextBox 1">
             <a:extLst>
               <a:ext uri="{FF2B5EF4-FFF2-40B4-BE49-F238E27FC236}">
-                <a16:creationId xmlns:a16="http://schemas.microsoft.com/office/drawing/2014/main" id="{D791C6AE-1BC4-B1E9-A3D8-86782E25B660}"/>
+                <a16:creationId xmlns:a16="http://schemas.microsoft.com/office/drawing/2014/main" id="{9D9A0DC5-96D6-AC76-09C9-5C35E3822F89}"/>
               </a:ext>
             </a:extLst>
           </p:cNvPr>
@@ -9790,8 +7778,8 @@
         </p:nvSpPr>
         <p:spPr>
           <a:xfrm>
-            <a:off x="4696304" y="198968"/>
-            <a:ext cx="6908800" cy="369332"/>
+            <a:off x="2703729" y="374970"/>
+            <a:ext cx="7354671" cy="369332"/>
           </a:xfrm>
           <a:prstGeom prst="rect">
             <a:avLst/>
@@ -9806,17 +7794,17 @@
           <a:p>
             <a:r>
               <a:rPr lang="en-US" dirty="0"/>
-              <a:t>Characters vs Factors</a:t>
+              <a:t>Loops (or performing the same operation on many things)</a:t>
             </a:r>
           </a:p>
         </p:txBody>
       </p:sp>
       <p:pic>
         <p:nvPicPr>
-          <p:cNvPr id="7" name="Picture 6">
-            <a:extLst>
-              <a:ext uri="{FF2B5EF4-FFF2-40B4-BE49-F238E27FC236}">
-                <a16:creationId xmlns:a16="http://schemas.microsoft.com/office/drawing/2014/main" id="{5A122CF8-55EE-2648-D5D7-50DD741A3A59}"/>
+          <p:cNvPr id="3" name="Picture 2">
+            <a:extLst>
+              <a:ext uri="{FF2B5EF4-FFF2-40B4-BE49-F238E27FC236}">
+                <a16:creationId xmlns:a16="http://schemas.microsoft.com/office/drawing/2014/main" id="{3D89E326-CBC1-B343-AC5F-DB5EF52F9679}"/>
               </a:ext>
             </a:extLst>
           </p:cNvPr>
@@ -9833,20 +7821,205 @@
         </p:blipFill>
         <p:spPr>
           <a:xfrm>
-            <a:off x="593062" y="2017193"/>
-            <a:ext cx="2006600" cy="444500"/>
+            <a:off x="1156347" y="1200714"/>
+            <a:ext cx="3329684" cy="657715"/>
           </a:xfrm>
           <a:prstGeom prst="rect">
             <a:avLst/>
           </a:prstGeom>
         </p:spPr>
       </p:pic>
+      <p:sp>
+        <p:nvSpPr>
+          <p:cNvPr id="11" name="TextBox 10">
+            <a:extLst>
+              <a:ext uri="{FF2B5EF4-FFF2-40B4-BE49-F238E27FC236}">
+                <a16:creationId xmlns:a16="http://schemas.microsoft.com/office/drawing/2014/main" id="{86C96972-673F-8D53-E968-9747091D5A36}"/>
+              </a:ext>
+            </a:extLst>
+          </p:cNvPr>
+          <p:cNvSpPr txBox="1"/>
+          <p:nvPr/>
+        </p:nvSpPr>
+        <p:spPr>
+          <a:xfrm>
+            <a:off x="1639334" y="4479432"/>
+            <a:ext cx="454612" cy="369332"/>
+          </a:xfrm>
+          <a:prstGeom prst="rect">
+            <a:avLst/>
+          </a:prstGeom>
+          <a:noFill/>
+        </p:spPr>
+        <p:txBody>
+          <a:bodyPr wrap="none" rtlCol="0">
+            <a:spAutoFit/>
+          </a:bodyPr>
+          <a:lstStyle/>
+          <a:p>
+            <a:r>
+              <a:rPr lang="en-US" dirty="0"/>
+              <a:t>list</a:t>
+            </a:r>
+          </a:p>
+        </p:txBody>
+      </p:sp>
+      <p:sp>
+        <p:nvSpPr>
+          <p:cNvPr id="12" name="TextBox 11">
+            <a:extLst>
+              <a:ext uri="{FF2B5EF4-FFF2-40B4-BE49-F238E27FC236}">
+                <a16:creationId xmlns:a16="http://schemas.microsoft.com/office/drawing/2014/main" id="{DD178951-A62F-62D4-2C21-1423AA34FABB}"/>
+              </a:ext>
+            </a:extLst>
+          </p:cNvPr>
+          <p:cNvSpPr txBox="1"/>
+          <p:nvPr/>
+        </p:nvSpPr>
+        <p:spPr>
+          <a:xfrm>
+            <a:off x="4826375" y="5173277"/>
+            <a:ext cx="2139240" cy="369332"/>
+          </a:xfrm>
+          <a:prstGeom prst="rect">
+            <a:avLst/>
+          </a:prstGeom>
+          <a:noFill/>
+        </p:spPr>
+        <p:txBody>
+          <a:bodyPr wrap="none" rtlCol="0">
+            <a:spAutoFit/>
+          </a:bodyPr>
+          <a:lstStyle/>
+          <a:p>
+            <a:r>
+              <a:rPr lang="en-US" dirty="0"/>
+              <a:t>Anonymous function</a:t>
+            </a:r>
+          </a:p>
+        </p:txBody>
+      </p:sp>
+      <p:cxnSp>
+        <p:nvCxnSpPr>
+          <p:cNvPr id="14" name="Straight Arrow Connector 13">
+            <a:extLst>
+              <a:ext uri="{FF2B5EF4-FFF2-40B4-BE49-F238E27FC236}">
+                <a16:creationId xmlns:a16="http://schemas.microsoft.com/office/drawing/2014/main" id="{541959FF-6E83-BDB1-4533-8F80CF45848C}"/>
+              </a:ext>
+            </a:extLst>
+          </p:cNvPr>
+          <p:cNvCxnSpPr/>
+          <p:nvPr/>
+        </p:nvCxnSpPr>
+        <p:spPr>
+          <a:xfrm flipV="1">
+            <a:off x="1866640" y="3837124"/>
+            <a:ext cx="0" cy="554892"/>
+          </a:xfrm>
+          <a:prstGeom prst="straightConnector1">
+            <a:avLst/>
+          </a:prstGeom>
+          <a:ln w="41275">
+            <a:tailEnd type="triangle"/>
+          </a:ln>
+        </p:spPr>
+        <p:style>
+          <a:lnRef idx="1">
+            <a:schemeClr val="accent1"/>
+          </a:lnRef>
+          <a:fillRef idx="0">
+            <a:schemeClr val="accent1"/>
+          </a:fillRef>
+          <a:effectRef idx="0">
+            <a:schemeClr val="accent1"/>
+          </a:effectRef>
+          <a:fontRef idx="minor">
+            <a:schemeClr val="tx1"/>
+          </a:fontRef>
+        </p:style>
+      </p:cxnSp>
+      <p:cxnSp>
+        <p:nvCxnSpPr>
+          <p:cNvPr id="15" name="Straight Arrow Connector 14">
+            <a:extLst>
+              <a:ext uri="{FF2B5EF4-FFF2-40B4-BE49-F238E27FC236}">
+                <a16:creationId xmlns:a16="http://schemas.microsoft.com/office/drawing/2014/main" id="{C4E6C7C4-0F6F-89A5-8C9E-FF80DDED5D6E}"/>
+              </a:ext>
+            </a:extLst>
+          </p:cNvPr>
+          <p:cNvCxnSpPr>
+            <a:cxnSpLocks/>
+          </p:cNvCxnSpPr>
+          <p:nvPr/>
+        </p:nvCxnSpPr>
+        <p:spPr>
+          <a:xfrm flipH="1" flipV="1">
+            <a:off x="5311588" y="3966882"/>
+            <a:ext cx="584407" cy="1177372"/>
+          </a:xfrm>
+          <a:prstGeom prst="straightConnector1">
+            <a:avLst/>
+          </a:prstGeom>
+          <a:ln w="41275">
+            <a:tailEnd type="triangle"/>
+          </a:ln>
+        </p:spPr>
+        <p:style>
+          <a:lnRef idx="1">
+            <a:schemeClr val="accent1"/>
+          </a:lnRef>
+          <a:fillRef idx="0">
+            <a:schemeClr val="accent1"/>
+          </a:fillRef>
+          <a:effectRef idx="0">
+            <a:schemeClr val="accent1"/>
+          </a:effectRef>
+          <a:fontRef idx="minor">
+            <a:schemeClr val="tx1"/>
+          </a:fontRef>
+        </p:style>
+      </p:cxnSp>
+      <p:sp>
+        <p:nvSpPr>
+          <p:cNvPr id="4" name="TextBox 3">
+            <a:extLst>
+              <a:ext uri="{FF2B5EF4-FFF2-40B4-BE49-F238E27FC236}">
+                <a16:creationId xmlns:a16="http://schemas.microsoft.com/office/drawing/2014/main" id="{9E108EBC-2ACB-C669-1CC0-01016B4C1C5C}"/>
+              </a:ext>
+            </a:extLst>
+          </p:cNvPr>
+          <p:cNvSpPr txBox="1"/>
+          <p:nvPr/>
+        </p:nvSpPr>
+        <p:spPr>
+          <a:xfrm>
+            <a:off x="3915915" y="2569393"/>
+            <a:ext cx="3960159" cy="646331"/>
+          </a:xfrm>
+          <a:prstGeom prst="rect">
+            <a:avLst/>
+          </a:prstGeom>
+          <a:noFill/>
+        </p:spPr>
+        <p:txBody>
+          <a:bodyPr wrap="square" rtlCol="0">
+            <a:spAutoFit/>
+          </a:bodyPr>
+          <a:lstStyle/>
+          <a:p>
+            <a:r>
+              <a:rPr lang="en-US" dirty="0"/>
+              <a:t>Function doesn’t have to be have already been made</a:t>
+            </a:r>
+          </a:p>
+        </p:txBody>
+      </p:sp>
       <p:pic>
         <p:nvPicPr>
-          <p:cNvPr id="8" name="Picture 7">
-            <a:extLst>
-              <a:ext uri="{FF2B5EF4-FFF2-40B4-BE49-F238E27FC236}">
-                <a16:creationId xmlns:a16="http://schemas.microsoft.com/office/drawing/2014/main" id="{21F0FD66-6D1E-70B0-81FD-426B8F308423}"/>
+          <p:cNvPr id="5" name="Picture 4">
+            <a:extLst>
+              <a:ext uri="{FF2B5EF4-FFF2-40B4-BE49-F238E27FC236}">
+                <a16:creationId xmlns:a16="http://schemas.microsoft.com/office/drawing/2014/main" id="{C6324D14-3976-5568-B66E-72973C39A74C}"/>
               </a:ext>
             </a:extLst>
           </p:cNvPr>
@@ -9863,238 +8036,55 @@
         </p:blipFill>
         <p:spPr>
           <a:xfrm>
-            <a:off x="540434" y="792023"/>
-            <a:ext cx="4889500" cy="330200"/>
+            <a:off x="569633" y="3312733"/>
+            <a:ext cx="6642100" cy="444500"/>
           </a:xfrm>
           <a:prstGeom prst="rect">
             <a:avLst/>
           </a:prstGeom>
         </p:spPr>
       </p:pic>
-      <p:pic>
-        <p:nvPicPr>
-          <p:cNvPr id="9" name="Picture 8">
-            <a:extLst>
-              <a:ext uri="{FF2B5EF4-FFF2-40B4-BE49-F238E27FC236}">
-                <a16:creationId xmlns:a16="http://schemas.microsoft.com/office/drawing/2014/main" id="{130D36F0-A21F-E967-53D9-B55D91048E7C}"/>
-              </a:ext>
-            </a:extLst>
-          </p:cNvPr>
-          <p:cNvPicPr>
-            <a:picLocks noChangeAspect="1"/>
-          </p:cNvPicPr>
+      <p:cxnSp>
+        <p:nvCxnSpPr>
+          <p:cNvPr id="17" name="Straight Connector 16">
+            <a:extLst>
+              <a:ext uri="{FF2B5EF4-FFF2-40B4-BE49-F238E27FC236}">
+                <a16:creationId xmlns:a16="http://schemas.microsoft.com/office/drawing/2014/main" id="{B3C5300D-4C89-2514-E380-A4707B2BC2C0}"/>
+              </a:ext>
+            </a:extLst>
+          </p:cNvPr>
+          <p:cNvCxnSpPr/>
           <p:nvPr/>
-        </p:nvPicPr>
-        <p:blipFill>
-          <a:blip r:embed="rId4"/>
-          <a:stretch>
-            <a:fillRect/>
-          </a:stretch>
-        </p:blipFill>
-        <p:spPr>
-          <a:xfrm>
-            <a:off x="540434" y="1209662"/>
-            <a:ext cx="4241800" cy="508000"/>
-          </a:xfrm>
-          <a:prstGeom prst="rect">
-            <a:avLst/>
-          </a:prstGeom>
-        </p:spPr>
-      </p:pic>
-      <p:pic>
-        <p:nvPicPr>
-          <p:cNvPr id="10" name="Picture 9">
-            <a:extLst>
-              <a:ext uri="{FF2B5EF4-FFF2-40B4-BE49-F238E27FC236}">
-                <a16:creationId xmlns:a16="http://schemas.microsoft.com/office/drawing/2014/main" id="{DC76B15E-E541-E67B-3201-D74761C8B0B9}"/>
-              </a:ext>
-            </a:extLst>
-          </p:cNvPr>
-          <p:cNvPicPr>
-            <a:picLocks noChangeAspect="1"/>
-          </p:cNvPicPr>
-          <p:nvPr/>
-        </p:nvPicPr>
-        <p:blipFill>
-          <a:blip r:embed="rId5"/>
-          <a:stretch>
-            <a:fillRect/>
-          </a:stretch>
-        </p:blipFill>
-        <p:spPr>
-          <a:xfrm>
-            <a:off x="4244768" y="2017193"/>
-            <a:ext cx="7772400" cy="382987"/>
-          </a:xfrm>
-          <a:prstGeom prst="rect">
-            <a:avLst/>
-          </a:prstGeom>
-        </p:spPr>
-      </p:pic>
-      <p:pic>
-        <p:nvPicPr>
-          <p:cNvPr id="11" name="Picture 10">
-            <a:extLst>
-              <a:ext uri="{FF2B5EF4-FFF2-40B4-BE49-F238E27FC236}">
-                <a16:creationId xmlns:a16="http://schemas.microsoft.com/office/drawing/2014/main" id="{1E0887DF-92D8-BCBE-104F-0FF6894E45EA}"/>
-              </a:ext>
-            </a:extLst>
-          </p:cNvPr>
-          <p:cNvPicPr>
-            <a:picLocks noChangeAspect="1"/>
-          </p:cNvPicPr>
-          <p:nvPr/>
-        </p:nvPicPr>
-        <p:blipFill>
-          <a:blip r:embed="rId6"/>
-          <a:stretch>
-            <a:fillRect/>
-          </a:stretch>
-        </p:blipFill>
-        <p:spPr>
-          <a:xfrm>
-            <a:off x="4244768" y="2494076"/>
-            <a:ext cx="1917700" cy="533400"/>
-          </a:xfrm>
-          <a:prstGeom prst="rect">
-            <a:avLst/>
-          </a:prstGeom>
-        </p:spPr>
-      </p:pic>
-      <p:pic>
-        <p:nvPicPr>
-          <p:cNvPr id="12" name="Picture 11">
-            <a:extLst>
-              <a:ext uri="{FF2B5EF4-FFF2-40B4-BE49-F238E27FC236}">
-                <a16:creationId xmlns:a16="http://schemas.microsoft.com/office/drawing/2014/main" id="{A483AC15-F8E9-851E-29AE-5A8889831DC1}"/>
-              </a:ext>
-            </a:extLst>
-          </p:cNvPr>
-          <p:cNvPicPr>
-            <a:picLocks noChangeAspect="1"/>
-          </p:cNvPicPr>
-          <p:nvPr/>
-        </p:nvPicPr>
-        <p:blipFill>
-          <a:blip r:embed="rId7"/>
-          <a:stretch>
-            <a:fillRect/>
-          </a:stretch>
-        </p:blipFill>
-        <p:spPr>
-          <a:xfrm>
-            <a:off x="4244768" y="3121372"/>
-            <a:ext cx="2501900" cy="800100"/>
-          </a:xfrm>
-          <a:prstGeom prst="rect">
-            <a:avLst/>
-          </a:prstGeom>
-        </p:spPr>
-      </p:pic>
-      <p:pic>
-        <p:nvPicPr>
-          <p:cNvPr id="13" name="Picture 12">
-            <a:extLst>
-              <a:ext uri="{FF2B5EF4-FFF2-40B4-BE49-F238E27FC236}">
-                <a16:creationId xmlns:a16="http://schemas.microsoft.com/office/drawing/2014/main" id="{3598E7ED-B347-0033-29C1-A518472CB09F}"/>
-              </a:ext>
-            </a:extLst>
-          </p:cNvPr>
-          <p:cNvPicPr>
-            <a:picLocks noChangeAspect="1"/>
-          </p:cNvPicPr>
-          <p:nvPr/>
-        </p:nvPicPr>
-        <p:blipFill>
-          <a:blip r:embed="rId8"/>
-          <a:stretch>
-            <a:fillRect/>
-          </a:stretch>
-        </p:blipFill>
-        <p:spPr>
-          <a:xfrm>
-            <a:off x="4073318" y="4290727"/>
-            <a:ext cx="5346700" cy="1181100"/>
-          </a:xfrm>
-          <a:prstGeom prst="rect">
-            <a:avLst/>
-          </a:prstGeom>
-        </p:spPr>
-      </p:pic>
-      <p:sp>
-        <p:nvSpPr>
-          <p:cNvPr id="15" name="TextBox 14">
-            <a:extLst>
-              <a:ext uri="{FF2B5EF4-FFF2-40B4-BE49-F238E27FC236}">
-                <a16:creationId xmlns:a16="http://schemas.microsoft.com/office/drawing/2014/main" id="{A5836B8A-BB8C-0BE1-B04B-B8D05D903C00}"/>
-              </a:ext>
-            </a:extLst>
-          </p:cNvPr>
-          <p:cNvSpPr txBox="1"/>
-          <p:nvPr/>
-        </p:nvSpPr>
-        <p:spPr>
-          <a:xfrm>
-            <a:off x="7409768" y="1647861"/>
-            <a:ext cx="1754841" cy="369332"/>
-          </a:xfrm>
-          <a:prstGeom prst="rect">
-            <a:avLst/>
-          </a:prstGeom>
-          <a:noFill/>
-        </p:spPr>
-        <p:txBody>
-          <a:bodyPr wrap="square" rtlCol="0">
-            <a:spAutoFit/>
-          </a:bodyPr>
-          <a:lstStyle/>
-          <a:p>
-            <a:r>
-              <a:rPr lang="en-US" dirty="0"/>
-              <a:t>Factor</a:t>
-            </a:r>
-          </a:p>
-        </p:txBody>
-      </p:sp>
-      <p:sp>
-        <p:nvSpPr>
-          <p:cNvPr id="16" name="TextBox 15">
-            <a:extLst>
-              <a:ext uri="{FF2B5EF4-FFF2-40B4-BE49-F238E27FC236}">
-                <a16:creationId xmlns:a16="http://schemas.microsoft.com/office/drawing/2014/main" id="{70433D43-0DEA-90AD-3304-3C37D72EC5D3}"/>
-              </a:ext>
-            </a:extLst>
-          </p:cNvPr>
-          <p:cNvSpPr txBox="1"/>
-          <p:nvPr/>
-        </p:nvSpPr>
-        <p:spPr>
-          <a:xfrm>
-            <a:off x="2218702" y="422691"/>
-            <a:ext cx="1532964" cy="369332"/>
-          </a:xfrm>
-          <a:prstGeom prst="rect">
-            <a:avLst/>
-          </a:prstGeom>
-          <a:noFill/>
-        </p:spPr>
-        <p:txBody>
-          <a:bodyPr wrap="square" rtlCol="0">
-            <a:spAutoFit/>
-          </a:bodyPr>
-          <a:lstStyle/>
-          <a:p>
-            <a:r>
-              <a:rPr lang="en-US" dirty="0"/>
-              <a:t>Character</a:t>
-            </a:r>
-          </a:p>
-        </p:txBody>
-      </p:sp>
+        </p:nvCxnSpPr>
+        <p:spPr>
+          <a:xfrm>
+            <a:off x="2703729" y="3906371"/>
+            <a:ext cx="4342530" cy="0"/>
+          </a:xfrm>
+          <a:prstGeom prst="line">
+            <a:avLst/>
+          </a:prstGeom>
+          <a:ln w="34925"/>
+        </p:spPr>
+        <p:style>
+          <a:lnRef idx="1">
+            <a:schemeClr val="accent1"/>
+          </a:lnRef>
+          <a:fillRef idx="0">
+            <a:schemeClr val="accent1"/>
+          </a:fillRef>
+          <a:effectRef idx="0">
+            <a:schemeClr val="accent1"/>
+          </a:effectRef>
+          <a:fontRef idx="minor">
+            <a:schemeClr val="tx1"/>
+          </a:fontRef>
+        </p:style>
+      </p:cxnSp>
     </p:spTree>
     <p:extLst>
       <p:ext uri="{BB962C8B-B14F-4D97-AF65-F5344CB8AC3E}">
-        <p14:creationId xmlns:p14="http://schemas.microsoft.com/office/powerpoint/2010/main" val="2172485284"/>
+        <p14:creationId xmlns:p14="http://schemas.microsoft.com/office/powerpoint/2010/main" val="3187267927"/>
       </p:ext>
     </p:extLst>
   </p:cSld>

--- a/lectures/2026_GNET749_Lecture3.pptx
+++ b/lectures/2026_GNET749_Lecture3.pptx
@@ -5,7 +5,7 @@
     <p:sldMasterId id="2147483648" r:id="rId1"/>
   </p:sldMasterIdLst>
   <p:notesMasterIdLst>
-    <p:notesMasterId r:id="rId19"/>
+    <p:notesMasterId r:id="rId18"/>
   </p:notesMasterIdLst>
   <p:sldIdLst>
     <p:sldId id="256" r:id="rId2"/>
@@ -22,9 +22,8 @@
     <p:sldId id="320" r:id="rId13"/>
     <p:sldId id="308" r:id="rId14"/>
     <p:sldId id="321" r:id="rId15"/>
-    <p:sldId id="324" r:id="rId16"/>
-    <p:sldId id="325" r:id="rId17"/>
-    <p:sldId id="303" r:id="rId18"/>
+    <p:sldId id="325" r:id="rId16"/>
+    <p:sldId id="303" r:id="rId17"/>
   </p:sldIdLst>
   <p:sldSz cx="12192000" cy="6858000"/>
   <p:notesSz cx="6858000" cy="9144000"/>
@@ -213,7 +212,7 @@
           <a:p>
             <a:fld id="{CED3B269-BCFD-3E4D-9867-060E5123D2F8}" type="datetimeFigureOut">
               <a:rPr lang="en-US" smtClean="0"/>
-              <a:t>4/21/26</a:t>
+              <a:t>4/22/26</a:t>
             </a:fld>
             <a:endParaRPr lang="en-US"/>
           </a:p>
@@ -708,7 +707,7 @@
           <a:p>
             <a:fld id="{C17BA9DE-A22B-9A47-BD58-93CE3EC6954C}" type="datetimeFigureOut">
               <a:rPr lang="en-US" smtClean="0"/>
-              <a:t>4/21/26</a:t>
+              <a:t>4/22/26</a:t>
             </a:fld>
             <a:endParaRPr lang="en-US"/>
           </a:p>
@@ -906,7 +905,7 @@
           <a:p>
             <a:fld id="{C17BA9DE-A22B-9A47-BD58-93CE3EC6954C}" type="datetimeFigureOut">
               <a:rPr lang="en-US" smtClean="0"/>
-              <a:t>4/21/26</a:t>
+              <a:t>4/22/26</a:t>
             </a:fld>
             <a:endParaRPr lang="en-US"/>
           </a:p>
@@ -1114,7 +1113,7 @@
           <a:p>
             <a:fld id="{C17BA9DE-A22B-9A47-BD58-93CE3EC6954C}" type="datetimeFigureOut">
               <a:rPr lang="en-US" smtClean="0"/>
-              <a:t>4/21/26</a:t>
+              <a:t>4/22/26</a:t>
             </a:fld>
             <a:endParaRPr lang="en-US"/>
           </a:p>
@@ -1312,7 +1311,7 @@
           <a:p>
             <a:fld id="{C17BA9DE-A22B-9A47-BD58-93CE3EC6954C}" type="datetimeFigureOut">
               <a:rPr lang="en-US" smtClean="0"/>
-              <a:t>4/21/26</a:t>
+              <a:t>4/22/26</a:t>
             </a:fld>
             <a:endParaRPr lang="en-US"/>
           </a:p>
@@ -1587,7 +1586,7 @@
           <a:p>
             <a:fld id="{C17BA9DE-A22B-9A47-BD58-93CE3EC6954C}" type="datetimeFigureOut">
               <a:rPr lang="en-US" smtClean="0"/>
-              <a:t>4/21/26</a:t>
+              <a:t>4/22/26</a:t>
             </a:fld>
             <a:endParaRPr lang="en-US"/>
           </a:p>
@@ -1852,7 +1851,7 @@
           <a:p>
             <a:fld id="{C17BA9DE-A22B-9A47-BD58-93CE3EC6954C}" type="datetimeFigureOut">
               <a:rPr lang="en-US" smtClean="0"/>
-              <a:t>4/21/26</a:t>
+              <a:t>4/22/26</a:t>
             </a:fld>
             <a:endParaRPr lang="en-US"/>
           </a:p>
@@ -2264,7 +2263,7 @@
           <a:p>
             <a:fld id="{C17BA9DE-A22B-9A47-BD58-93CE3EC6954C}" type="datetimeFigureOut">
               <a:rPr lang="en-US" smtClean="0"/>
-              <a:t>4/21/26</a:t>
+              <a:t>4/22/26</a:t>
             </a:fld>
             <a:endParaRPr lang="en-US"/>
           </a:p>
@@ -2405,7 +2404,7 @@
           <a:p>
             <a:fld id="{C17BA9DE-A22B-9A47-BD58-93CE3EC6954C}" type="datetimeFigureOut">
               <a:rPr lang="en-US" smtClean="0"/>
-              <a:t>4/21/26</a:t>
+              <a:t>4/22/26</a:t>
             </a:fld>
             <a:endParaRPr lang="en-US"/>
           </a:p>
@@ -2518,7 +2517,7 @@
           <a:p>
             <a:fld id="{C17BA9DE-A22B-9A47-BD58-93CE3EC6954C}" type="datetimeFigureOut">
               <a:rPr lang="en-US" smtClean="0"/>
-              <a:t>4/21/26</a:t>
+              <a:t>4/22/26</a:t>
             </a:fld>
             <a:endParaRPr lang="en-US"/>
           </a:p>
@@ -2829,7 +2828,7 @@
           <a:p>
             <a:fld id="{C17BA9DE-A22B-9A47-BD58-93CE3EC6954C}" type="datetimeFigureOut">
               <a:rPr lang="en-US" smtClean="0"/>
-              <a:t>4/21/26</a:t>
+              <a:t>4/22/26</a:t>
             </a:fld>
             <a:endParaRPr lang="en-US"/>
           </a:p>
@@ -3117,7 +3116,7 @@
           <a:p>
             <a:fld id="{C17BA9DE-A22B-9A47-BD58-93CE3EC6954C}" type="datetimeFigureOut">
               <a:rPr lang="en-US" smtClean="0"/>
-              <a:t>4/21/26</a:t>
+              <a:t>4/22/26</a:t>
             </a:fld>
             <a:endParaRPr lang="en-US"/>
           </a:p>
@@ -3358,7 +3357,7 @@
           <a:p>
             <a:fld id="{C17BA9DE-A22B-9A47-BD58-93CE3EC6954C}" type="datetimeFigureOut">
               <a:rPr lang="en-US" smtClean="0"/>
-              <a:t>4/21/26</a:t>
+              <a:t>4/22/26</a:t>
             </a:fld>
             <a:endParaRPr lang="en-US"/>
           </a:p>
@@ -4029,7 +4028,7 @@
           </a:ln>
           <a:extLst>
             <a:ext uri="{C572A759-6A51-4108-AA02-DFA0A04FC94B}">
-              <ma14:wrappingTextBoxFlag xmlns:ma14="http://schemas.microsoft.com/office/mac/drawingml/2011/main" xmlns:a14="http://schemas.microsoft.com/office/drawing/2010/main" xmlns:m="http://schemas.openxmlformats.org/officeDocument/2006/math" xmlns="" val="1"/>
+              <ma14:wrappingTextBoxFlag xmlns="" xmlns:m="http://schemas.openxmlformats.org/officeDocument/2006/math" xmlns:a14="http://schemas.microsoft.com/office/drawing/2010/main" xmlns:ma14="http://schemas.microsoft.com/office/mac/drawingml/2011/main" val="1"/>
             </a:ext>
           </a:extLst>
         </p:spPr>
@@ -4065,7 +4064,7 @@
           </a:ln>
           <a:extLst>
             <a:ext uri="{C572A759-6A51-4108-AA02-DFA0A04FC94B}">
-              <ma14:wrappingTextBoxFlag xmlns:ma14="http://schemas.microsoft.com/office/mac/drawingml/2011/main" xmlns:a14="http://schemas.microsoft.com/office/drawing/2010/main" xmlns:m="http://schemas.openxmlformats.org/officeDocument/2006/math" xmlns="" val="1"/>
+              <ma14:wrappingTextBoxFlag xmlns="" xmlns:m="http://schemas.openxmlformats.org/officeDocument/2006/math" xmlns:a14="http://schemas.microsoft.com/office/drawing/2010/main" xmlns:ma14="http://schemas.microsoft.com/office/mac/drawingml/2011/main" val="1"/>
             </a:ext>
           </a:extLst>
         </p:spPr>
@@ -4139,7 +4138,7 @@
           </a:ln>
           <a:extLst>
             <a:ext uri="{C572A759-6A51-4108-AA02-DFA0A04FC94B}">
-              <ma14:wrappingTextBoxFlag xmlns:ma14="http://schemas.microsoft.com/office/mac/drawingml/2011/main" xmlns:a14="http://schemas.microsoft.com/office/drawing/2010/main" xmlns:m="http://schemas.openxmlformats.org/officeDocument/2006/math" xmlns="" val="1"/>
+              <ma14:wrappingTextBoxFlag xmlns="" xmlns:m="http://schemas.openxmlformats.org/officeDocument/2006/math" xmlns:a14="http://schemas.microsoft.com/office/drawing/2010/main" xmlns:ma14="http://schemas.microsoft.com/office/mac/drawingml/2011/main" val="1"/>
             </a:ext>
           </a:extLst>
         </p:spPr>
@@ -4229,7 +4228,7 @@
           </a:ln>
           <a:extLst>
             <a:ext uri="{C572A759-6A51-4108-AA02-DFA0A04FC94B}">
-              <ma14:wrappingTextBoxFlag xmlns:ma14="http://schemas.microsoft.com/office/mac/drawingml/2011/main" xmlns:a14="http://schemas.microsoft.com/office/drawing/2010/main" xmlns:m="http://schemas.openxmlformats.org/officeDocument/2006/math" xmlns="" val="1"/>
+              <ma14:wrappingTextBoxFlag xmlns="" xmlns:m="http://schemas.openxmlformats.org/officeDocument/2006/math" xmlns:a14="http://schemas.microsoft.com/office/drawing/2010/main" xmlns:ma14="http://schemas.microsoft.com/office/mac/drawingml/2011/main" val="1"/>
             </a:ext>
           </a:extLst>
         </p:spPr>
@@ -4326,7 +4325,7 @@
             <a:effectLst/>
             <a:extLst>
               <a:ext uri="{C572A759-6A51-4108-AA02-DFA0A04FC94B}">
-                <ma14:wrappingTextBoxFlag xmlns:ma14="http://schemas.microsoft.com/office/mac/drawingml/2011/main" xmlns:a14="http://schemas.microsoft.com/office/drawing/2010/main" xmlns:m="http://schemas.openxmlformats.org/officeDocument/2006/math" xmlns="" val="1"/>
+                <ma14:wrappingTextBoxFlag xmlns="" xmlns:m="http://schemas.openxmlformats.org/officeDocument/2006/math" xmlns:a14="http://schemas.microsoft.com/office/drawing/2010/main" xmlns:ma14="http://schemas.microsoft.com/office/mac/drawingml/2011/main" val="1"/>
               </a:ext>
             </a:extLst>
           </p:spPr>
@@ -5096,131 +5095,6 @@
           <a:chExt cx="0" cy="0"/>
         </a:xfrm>
       </p:grpSpPr>
-      <p:pic>
-        <p:nvPicPr>
-          <p:cNvPr id="2" name="Picture 1">
-            <a:extLst>
-              <a:ext uri="{FF2B5EF4-FFF2-40B4-BE49-F238E27FC236}">
-                <a16:creationId xmlns:a16="http://schemas.microsoft.com/office/drawing/2014/main" id="{7966EE62-CE85-3404-07A6-C94319D05FF9}"/>
-              </a:ext>
-            </a:extLst>
-          </p:cNvPr>
-          <p:cNvPicPr>
-            <a:picLocks noChangeAspect="1"/>
-          </p:cNvPicPr>
-          <p:nvPr/>
-        </p:nvPicPr>
-        <p:blipFill>
-          <a:blip r:embed="rId2"/>
-          <a:stretch>
-            <a:fillRect/>
-          </a:stretch>
-        </p:blipFill>
-        <p:spPr>
-          <a:xfrm>
-            <a:off x="549724" y="718457"/>
-            <a:ext cx="5867768" cy="5421086"/>
-          </a:xfrm>
-          <a:prstGeom prst="rect">
-            <a:avLst/>
-          </a:prstGeom>
-        </p:spPr>
-      </p:pic>
-      <p:sp>
-        <p:nvSpPr>
-          <p:cNvPr id="3" name="TextBox 2">
-            <a:extLst>
-              <a:ext uri="{FF2B5EF4-FFF2-40B4-BE49-F238E27FC236}">
-                <a16:creationId xmlns:a16="http://schemas.microsoft.com/office/drawing/2014/main" id="{E7F5E365-D6F3-5971-16A9-F2EAAACE5CE0}"/>
-              </a:ext>
-            </a:extLst>
-          </p:cNvPr>
-          <p:cNvSpPr txBox="1"/>
-          <p:nvPr/>
-        </p:nvSpPr>
-        <p:spPr>
-          <a:xfrm>
-            <a:off x="4174177" y="190005"/>
-            <a:ext cx="3937745" cy="369332"/>
-          </a:xfrm>
-          <a:prstGeom prst="rect">
-            <a:avLst/>
-          </a:prstGeom>
-          <a:noFill/>
-        </p:spPr>
-        <p:txBody>
-          <a:bodyPr wrap="none" rtlCol="0">
-            <a:spAutoFit/>
-          </a:bodyPr>
-          <a:lstStyle/>
-          <a:p>
-            <a:r>
-              <a:rPr lang="en-US" dirty="0"/>
-              <a:t>R Project templates can help set this up </a:t>
-            </a:r>
-          </a:p>
-        </p:txBody>
-      </p:sp>
-      <p:pic>
-        <p:nvPicPr>
-          <p:cNvPr id="4" name="Picture 3">
-            <a:extLst>
-              <a:ext uri="{FF2B5EF4-FFF2-40B4-BE49-F238E27FC236}">
-                <a16:creationId xmlns:a16="http://schemas.microsoft.com/office/drawing/2014/main" id="{73358556-5CAB-5075-8D93-D0E6E17A1DFE}"/>
-              </a:ext>
-            </a:extLst>
-          </p:cNvPr>
-          <p:cNvPicPr>
-            <a:picLocks noChangeAspect="1"/>
-          </p:cNvPicPr>
-          <p:nvPr/>
-        </p:nvPicPr>
-        <p:blipFill>
-          <a:blip r:embed="rId3"/>
-          <a:stretch>
-            <a:fillRect/>
-          </a:stretch>
-        </p:blipFill>
-        <p:spPr>
-          <a:xfrm>
-            <a:off x="6522226" y="718457"/>
-            <a:ext cx="5444844" cy="5676406"/>
-          </a:xfrm>
-          <a:prstGeom prst="rect">
-            <a:avLst/>
-          </a:prstGeom>
-        </p:spPr>
-      </p:pic>
-    </p:spTree>
-    <p:extLst>
-      <p:ext uri="{BB962C8B-B14F-4D97-AF65-F5344CB8AC3E}">
-        <p14:creationId xmlns:p14="http://schemas.microsoft.com/office/powerpoint/2010/main" val="2399993793"/>
-      </p:ext>
-    </p:extLst>
-  </p:cSld>
-  <p:clrMapOvr>
-    <a:masterClrMapping/>
-  </p:clrMapOvr>
-</p:sld>
-</file>
-
-<file path=ppt/slides/slide16.xml><?xml version="1.0" encoding="utf-8"?>
-<p:sld xmlns:a="http://schemas.openxmlformats.org/drawingml/2006/main" xmlns:r="http://schemas.openxmlformats.org/officeDocument/2006/relationships" xmlns:p="http://schemas.openxmlformats.org/presentationml/2006/main">
-  <p:cSld>
-    <p:spTree>
-      <p:nvGrpSpPr>
-        <p:cNvPr id="1" name=""/>
-        <p:cNvGrpSpPr/>
-        <p:nvPr/>
-      </p:nvGrpSpPr>
-      <p:grpSpPr>
-        <a:xfrm>
-          <a:off x="0" y="0"/>
-          <a:ext cx="0" cy="0"/>
-          <a:chOff x="0" y="0"/>
-          <a:chExt cx="0" cy="0"/>
-        </a:xfrm>
-      </p:grpSpPr>
       <p:sp>
         <p:nvSpPr>
           <p:cNvPr id="2" name="TextBox 1">
@@ -5270,8 +5144,8 @@
         </p:nvSpPr>
         <p:spPr>
           <a:xfrm>
-            <a:off x="2178121" y="1469205"/>
-            <a:ext cx="8065214" cy="2308324"/>
+            <a:off x="2068643" y="1469205"/>
+            <a:ext cx="8174692" cy="2308324"/>
           </a:xfrm>
           <a:prstGeom prst="rect">
             <a:avLst/>
@@ -5447,7 +5321,7 @@
 </p:sld>
 </file>
 
-<file path=ppt/slides/slide17.xml><?xml version="1.0" encoding="utf-8"?>
+<file path=ppt/slides/slide16.xml><?xml version="1.0" encoding="utf-8"?>
 <p:sld xmlns:a="http://schemas.openxmlformats.org/drawingml/2006/main" xmlns:r="http://schemas.openxmlformats.org/officeDocument/2006/relationships" xmlns:p="http://schemas.openxmlformats.org/presentationml/2006/main">
   <p:cSld>
     <p:spTree>
@@ -5914,7 +5788,7 @@
           </a:ln>
           <a:extLst>
             <a:ext uri="{C572A759-6A51-4108-AA02-DFA0A04FC94B}">
-              <ma14:wrappingTextBoxFlag xmlns="" xmlns:m="http://schemas.openxmlformats.org/officeDocument/2006/math" xmlns:a14="http://schemas.microsoft.com/office/drawing/2010/main" xmlns:ma14="http://schemas.microsoft.com/office/mac/drawingml/2011/main" val="1"/>
+              <ma14:wrappingTextBoxFlag xmlns:ma14="http://schemas.microsoft.com/office/mac/drawingml/2011/main" xmlns:a14="http://schemas.microsoft.com/office/drawing/2010/main" xmlns:m="http://schemas.openxmlformats.org/officeDocument/2006/math" xmlns="" val="1"/>
             </a:ext>
           </a:extLst>
         </p:spPr>
@@ -5959,7 +5833,7 @@
           </a:ln>
           <a:extLst>
             <a:ext uri="{C572A759-6A51-4108-AA02-DFA0A04FC94B}">
-              <ma14:wrappingTextBoxFlag xmlns="" xmlns:m="http://schemas.openxmlformats.org/officeDocument/2006/math" xmlns:a14="http://schemas.microsoft.com/office/drawing/2010/main" xmlns:ma14="http://schemas.microsoft.com/office/mac/drawingml/2011/main" val="1"/>
+              <ma14:wrappingTextBoxFlag xmlns:ma14="http://schemas.microsoft.com/office/mac/drawingml/2011/main" xmlns:a14="http://schemas.microsoft.com/office/drawing/2010/main" xmlns:m="http://schemas.openxmlformats.org/officeDocument/2006/math" xmlns="" val="1"/>
             </a:ext>
           </a:extLst>
         </p:spPr>
@@ -6000,7 +5874,7 @@
           </a:ln>
           <a:extLst>
             <a:ext uri="{C572A759-6A51-4108-AA02-DFA0A04FC94B}">
-              <ma14:wrappingTextBoxFlag xmlns="" xmlns:m="http://schemas.openxmlformats.org/officeDocument/2006/math" xmlns:a14="http://schemas.microsoft.com/office/drawing/2010/main" xmlns:ma14="http://schemas.microsoft.com/office/mac/drawingml/2011/main" val="1"/>
+              <ma14:wrappingTextBoxFlag xmlns:ma14="http://schemas.microsoft.com/office/mac/drawingml/2011/main" xmlns:a14="http://schemas.microsoft.com/office/drawing/2010/main" xmlns:m="http://schemas.openxmlformats.org/officeDocument/2006/math" xmlns="" val="1"/>
             </a:ext>
           </a:extLst>
         </p:spPr>
@@ -6060,7 +5934,7 @@
           </a:ln>
           <a:extLst>
             <a:ext uri="{C572A759-6A51-4108-AA02-DFA0A04FC94B}">
-              <ma14:wrappingTextBoxFlag xmlns="" xmlns:m="http://schemas.openxmlformats.org/officeDocument/2006/math" xmlns:a14="http://schemas.microsoft.com/office/drawing/2010/main" xmlns:ma14="http://schemas.microsoft.com/office/mac/drawingml/2011/main" val="1"/>
+              <ma14:wrappingTextBoxFlag xmlns:ma14="http://schemas.microsoft.com/office/mac/drawingml/2011/main" xmlns:a14="http://schemas.microsoft.com/office/drawing/2010/main" xmlns:m="http://schemas.openxmlformats.org/officeDocument/2006/math" xmlns="" val="1"/>
             </a:ext>
           </a:extLst>
         </p:spPr>
@@ -6135,7 +6009,7 @@
           </a:ln>
           <a:extLst>
             <a:ext uri="{C572A759-6A51-4108-AA02-DFA0A04FC94B}">
-              <ma14:wrappingTextBoxFlag xmlns:ma14="http://schemas.microsoft.com/office/mac/drawingml/2011/main" xmlns:a14="http://schemas.microsoft.com/office/drawing/2010/main" xmlns:m="http://schemas.openxmlformats.org/officeDocument/2006/math" xmlns="" val="1"/>
+              <ma14:wrappingTextBoxFlag xmlns="" xmlns:m="http://schemas.openxmlformats.org/officeDocument/2006/math" xmlns:a14="http://schemas.microsoft.com/office/drawing/2010/main" xmlns:ma14="http://schemas.microsoft.com/office/mac/drawingml/2011/main" val="1"/>
             </a:ext>
           </a:extLst>
         </p:spPr>
@@ -6180,7 +6054,7 @@
           </a:ln>
           <a:extLst>
             <a:ext uri="{C572A759-6A51-4108-AA02-DFA0A04FC94B}">
-              <ma14:wrappingTextBoxFlag xmlns:ma14="http://schemas.microsoft.com/office/mac/drawingml/2011/main" xmlns:a14="http://schemas.microsoft.com/office/drawing/2010/main" xmlns:m="http://schemas.openxmlformats.org/officeDocument/2006/math" xmlns="" val="1"/>
+              <ma14:wrappingTextBoxFlag xmlns="" xmlns:m="http://schemas.openxmlformats.org/officeDocument/2006/math" xmlns:a14="http://schemas.microsoft.com/office/drawing/2010/main" xmlns:ma14="http://schemas.microsoft.com/office/mac/drawingml/2011/main" val="1"/>
             </a:ext>
           </a:extLst>
         </p:spPr>
@@ -6367,7 +6241,7 @@
           </a:ln>
           <a:extLst>
             <a:ext uri="{C572A759-6A51-4108-AA02-DFA0A04FC94B}">
-              <ma14:wrappingTextBoxFlag xmlns:ma14="http://schemas.microsoft.com/office/mac/drawingml/2011/main" xmlns:a14="http://schemas.microsoft.com/office/drawing/2010/main" xmlns:m="http://schemas.openxmlformats.org/officeDocument/2006/math" xmlns="" val="1"/>
+              <ma14:wrappingTextBoxFlag xmlns="" xmlns:m="http://schemas.openxmlformats.org/officeDocument/2006/math" xmlns:a14="http://schemas.microsoft.com/office/drawing/2010/main" xmlns:ma14="http://schemas.microsoft.com/office/mac/drawingml/2011/main" val="1"/>
             </a:ext>
           </a:extLst>
         </p:spPr>
@@ -6408,7 +6282,7 @@
           </a:ln>
           <a:extLst>
             <a:ext uri="{C572A759-6A51-4108-AA02-DFA0A04FC94B}">
-              <ma14:wrappingTextBoxFlag xmlns:ma14="http://schemas.microsoft.com/office/mac/drawingml/2011/main" xmlns:a14="http://schemas.microsoft.com/office/drawing/2010/main" xmlns:m="http://schemas.openxmlformats.org/officeDocument/2006/math" xmlns="" val="1"/>
+              <ma14:wrappingTextBoxFlag xmlns="" xmlns:m="http://schemas.openxmlformats.org/officeDocument/2006/math" xmlns:a14="http://schemas.microsoft.com/office/drawing/2010/main" xmlns:ma14="http://schemas.microsoft.com/office/mac/drawingml/2011/main" val="1"/>
             </a:ext>
           </a:extLst>
         </p:spPr>
@@ -6458,7 +6332,7 @@
           </a:ln>
           <a:extLst>
             <a:ext uri="{C572A759-6A51-4108-AA02-DFA0A04FC94B}">
-              <ma14:wrappingTextBoxFlag xmlns:ma14="http://schemas.microsoft.com/office/mac/drawingml/2011/main" xmlns:a14="http://schemas.microsoft.com/office/drawing/2010/main" xmlns:m="http://schemas.openxmlformats.org/officeDocument/2006/math" xmlns="" val="1"/>
+              <ma14:wrappingTextBoxFlag xmlns="" xmlns:m="http://schemas.openxmlformats.org/officeDocument/2006/math" xmlns:a14="http://schemas.microsoft.com/office/drawing/2010/main" xmlns:ma14="http://schemas.microsoft.com/office/mac/drawingml/2011/main" val="1"/>
             </a:ext>
           </a:extLst>
         </p:spPr>
@@ -6518,7 +6392,7 @@
           </a:ln>
           <a:extLst>
             <a:ext uri="{C572A759-6A51-4108-AA02-DFA0A04FC94B}">
-              <ma14:wrappingTextBoxFlag xmlns:ma14="http://schemas.microsoft.com/office/mac/drawingml/2011/main" xmlns:a14="http://schemas.microsoft.com/office/drawing/2010/main" xmlns:m="http://schemas.openxmlformats.org/officeDocument/2006/math" xmlns="" val="1"/>
+              <ma14:wrappingTextBoxFlag xmlns="" xmlns:m="http://schemas.openxmlformats.org/officeDocument/2006/math" xmlns:a14="http://schemas.microsoft.com/office/drawing/2010/main" xmlns:ma14="http://schemas.microsoft.com/office/mac/drawingml/2011/main" val="1"/>
             </a:ext>
           </a:extLst>
         </p:spPr>
